--- a/Final Presentation.pptx
+++ b/Final Presentation.pptx
@@ -3099,7 +3099,7 @@
     <p:bg>
       <p:bgPr>
         <a:solidFill>
-          <a:srgbClr val="0B0F19"/>
+          <a:srgbClr val="0F172A"/>
         </a:solidFill>
         <a:effectLst/>
       </p:bgPr>
@@ -3113,14 +3113,59 @@
       <p:grpSpPr/>
       <p:sp>
         <p:nvSpPr>
-          <p:cNvPr id="2" name="TextBox 1"/>
+          <p:cNvPr id="2" name="Rounded Rectangle 1"/>
+          <p:cNvSpPr/>
+          <p:nvPr/>
+        </p:nvSpPr>
+        <p:spPr>
+          <a:xfrm>
+            <a:off x="731520" y="1097280"/>
+            <a:ext cx="7680960" cy="4663440"/>
+          </a:xfrm>
+          <a:prstGeom prst="roundRect">
+            <a:avLst/>
+          </a:prstGeom>
+          <a:solidFill>
+            <a:srgbClr val="1E293B"/>
+          </a:solidFill>
+          <a:ln w="19050">
+            <a:solidFill>
+              <a:srgbClr val="334155"/>
+            </a:solidFill>
+          </a:ln>
+        </p:spPr>
+        <p:style>
+          <a:lnRef idx="1">
+            <a:schemeClr val="accent1"/>
+          </a:lnRef>
+          <a:fillRef idx="3">
+            <a:schemeClr val="accent1"/>
+          </a:fillRef>
+          <a:effectRef idx="2">
+            <a:schemeClr val="accent1"/>
+          </a:effectRef>
+          <a:fontRef idx="minor">
+            <a:schemeClr val="lt1"/>
+          </a:fontRef>
+        </p:style>
+        <p:txBody>
+          <a:bodyPr rtlCol="0" anchor="ctr"/>
+          <a:lstStyle/>
+          <a:p>
+            <a:pPr algn="ctr"/>
+          </a:p>
+        </p:txBody>
+      </p:sp>
+      <p:sp>
+        <p:nvSpPr>
+          <p:cNvPr id="3" name="TextBox 2"/>
           <p:cNvSpPr txBox="1"/>
           <p:nvPr/>
         </p:nvSpPr>
         <p:spPr>
           <a:xfrm>
-            <a:off x="457200" y="1371600"/>
-            <a:ext cx="8229600" cy="1828800"/>
+            <a:off x="914400" y="1371600"/>
+            <a:ext cx="7315200" cy="1828800"/>
           </a:xfrm>
           <a:prstGeom prst="rect">
             <a:avLst/>
@@ -3134,9 +3179,9 @@
           <a:lstStyle/>
           <a:p>
             <a:pPr algn="ctr">
-              <a:defRPr sz="3600" b="1">
-                <a:solidFill>
-                  <a:srgbClr val="FFFFFF"/>
+              <a:defRPr sz="3200" b="1">
+                <a:solidFill>
+                  <a:srgbClr val="2DD4BF"/>
                 </a:solidFill>
                 <a:latin typeface="Arial"/>
               </a:defRPr>
@@ -3153,14 +3198,14 @@
       </p:sp>
       <p:sp>
         <p:nvSpPr>
-          <p:cNvPr id="3" name="TextBox 2"/>
+          <p:cNvPr id="4" name="TextBox 3"/>
           <p:cNvSpPr txBox="1"/>
           <p:nvPr/>
         </p:nvSpPr>
         <p:spPr>
           <a:xfrm>
-            <a:off x="457200" y="3200400"/>
-            <a:ext cx="8229600" cy="2743200"/>
+            <a:off x="914400" y="3017520"/>
+            <a:ext cx="7315200" cy="2286000"/>
           </a:xfrm>
           <a:prstGeom prst="rect">
             <a:avLst/>
@@ -3174,7 +3219,7 @@
           <a:lstStyle/>
           <a:p>
             <a:pPr algn="ctr">
-              <a:defRPr sz="1400">
+              <a:defRPr sz="1300">
                 <a:solidFill>
                   <a:srgbClr val="94A3B8"/>
                 </a:solidFill>
@@ -3186,20 +3231,20 @@
             </a:r>
             <a:br/>
             <a:r>
-              <a:t>&lt;Name of the student&gt; (Reg. No: &lt;Reg. No&gt;)</a:t>
+              <a:t>• &lt;Name of the student&gt; (Reg. No: &lt;Reg. No&gt;)</a:t>
             </a:r>
             <a:br/>
             <a:r>
-              <a:t>&lt;Name of the student&gt; (Reg. No: &lt;Reg. No&gt;)</a:t>
+              <a:t>• &lt;Name of the student&gt; (Reg. No: &lt;Reg. No&gt;)</a:t>
             </a:r>
             <a:br/>
             <a:r>
-              <a:t>&lt;Name of the student&gt; (Reg. No: &lt;Reg. No&gt;)</a:t>
+              <a:t>• &lt;Name of the student&gt; (Reg. No: &lt;Reg. No&gt;)</a:t>
             </a:r>
             <a:br/>
             <a:br/>
             <a:r>
-              <a:t>Under the esteemed guidance of:</a:t>
+              <a:t>Under the guidance of:</a:t>
             </a:r>
             <a:br/>
             <a:r>
@@ -3210,14 +3255,14 @@
       </p:sp>
       <p:sp>
         <p:nvSpPr>
-          <p:cNvPr id="4" name="TextBox 3"/>
+          <p:cNvPr id="5" name="TextBox 4"/>
           <p:cNvSpPr txBox="1"/>
           <p:nvPr/>
         </p:nvSpPr>
         <p:spPr>
           <a:xfrm>
-            <a:off x="457200" y="5669280"/>
-            <a:ext cx="8229600" cy="914400"/>
+            <a:off x="914400" y="5943600"/>
+            <a:ext cx="7315200" cy="731520"/>
           </a:xfrm>
           <a:prstGeom prst="rect">
             <a:avLst/>
@@ -3231,7 +3276,7 @@
           <a:lstStyle/>
           <a:p>
             <a:pPr algn="ctr">
-              <a:defRPr sz="1200">
+              <a:defRPr sz="1100" b="1">
                 <a:solidFill>
                   <a:srgbClr val="3B82F6"/>
                 </a:solidFill>
@@ -3239,7 +3284,11 @@
               </a:defRPr>
             </a:pPr>
             <a:r>
-              <a:t>AURORA HIGHER EDUCATION AND RESEARCH ACADEMY  |  2025-26</a:t>
+              <a:t>DEPARTMENT OF COMPUTER SCIENCE AND ENGINEERING</a:t>
+            </a:r>
+            <a:br/>
+            <a:r>
+              <a:t>AURORA HIGHER EDUCATION AND RESEARCH ACADEMY</a:t>
             </a:r>
           </a:p>
         </p:txBody>
@@ -3258,7 +3307,7 @@
     <p:bg>
       <p:bgPr>
         <a:solidFill>
-          <a:srgbClr val="F8FAFC"/>
+          <a:srgbClr val="0F172A"/>
         </a:solidFill>
         <a:effectLst/>
       </p:bgPr>
@@ -3295,7 +3344,7 @@
             <a:pPr>
               <a:defRPr sz="2200" b="1">
                 <a:solidFill>
-                  <a:srgbClr val="0B0F19"/>
+                  <a:srgbClr val="2DD4BF"/>
                 </a:solidFill>
                 <a:latin typeface="Arial"/>
               </a:defRPr>
@@ -3308,14 +3357,102 @@
       </p:sp>
       <p:sp>
         <p:nvSpPr>
-          <p:cNvPr id="3" name="TextBox 2"/>
+          <p:cNvPr id="3" name="Rectangle 2"/>
+          <p:cNvSpPr/>
+          <p:nvPr/>
+        </p:nvSpPr>
+        <p:spPr>
+          <a:xfrm>
+            <a:off x="457200" y="914400"/>
+            <a:ext cx="8229600" cy="25400"/>
+          </a:xfrm>
+          <a:prstGeom prst="rect">
+            <a:avLst/>
+          </a:prstGeom>
+          <a:solidFill>
+            <a:srgbClr val="3B82F6"/>
+          </a:solidFill>
+          <a:ln>
+            <a:noFill/>
+          </a:ln>
+        </p:spPr>
+        <p:style>
+          <a:lnRef idx="1">
+            <a:schemeClr val="accent1"/>
+          </a:lnRef>
+          <a:fillRef idx="3">
+            <a:schemeClr val="accent1"/>
+          </a:fillRef>
+          <a:effectRef idx="2">
+            <a:schemeClr val="accent1"/>
+          </a:effectRef>
+          <a:fontRef idx="minor">
+            <a:schemeClr val="lt1"/>
+          </a:fontRef>
+        </p:style>
+        <p:txBody>
+          <a:bodyPr rtlCol="0" anchor="ctr"/>
+          <a:lstStyle/>
+          <a:p>
+            <a:pPr algn="ctr"/>
+          </a:p>
+        </p:txBody>
+      </p:sp>
+      <p:sp>
+        <p:nvSpPr>
+          <p:cNvPr id="4" name="Rounded Rectangle 3"/>
+          <p:cNvSpPr/>
+          <p:nvPr/>
+        </p:nvSpPr>
+        <p:spPr>
+          <a:xfrm>
+            <a:off x="457200" y="1371600"/>
+            <a:ext cx="3931920" cy="4754880"/>
+          </a:xfrm>
+          <a:prstGeom prst="roundRect">
+            <a:avLst/>
+          </a:prstGeom>
+          <a:solidFill>
+            <a:srgbClr val="1E293B"/>
+          </a:solidFill>
+          <a:ln w="19050">
+            <a:solidFill>
+              <a:srgbClr val="334155"/>
+            </a:solidFill>
+          </a:ln>
+        </p:spPr>
+        <p:style>
+          <a:lnRef idx="1">
+            <a:schemeClr val="accent1"/>
+          </a:lnRef>
+          <a:fillRef idx="3">
+            <a:schemeClr val="accent1"/>
+          </a:fillRef>
+          <a:effectRef idx="2">
+            <a:schemeClr val="accent1"/>
+          </a:effectRef>
+          <a:fontRef idx="minor">
+            <a:schemeClr val="lt1"/>
+          </a:fontRef>
+        </p:style>
+        <p:txBody>
+          <a:bodyPr rtlCol="0" anchor="ctr"/>
+          <a:lstStyle/>
+          <a:p>
+            <a:pPr algn="ctr"/>
+          </a:p>
+        </p:txBody>
+      </p:sp>
+      <p:sp>
+        <p:nvSpPr>
+          <p:cNvPr id="5" name="TextBox 4"/>
           <p:cNvSpPr txBox="1"/>
           <p:nvPr/>
         </p:nvSpPr>
         <p:spPr>
           <a:xfrm>
-            <a:off x="457200" y="1188720"/>
-            <a:ext cx="8229600" cy="5303520"/>
+            <a:off x="548640" y="1463040"/>
+            <a:ext cx="3749039" cy="4572000"/>
           </a:xfrm>
           <a:prstGeom prst="rect">
             <a:avLst/>
@@ -3329,170 +3466,265 @@
           <a:lstStyle/>
           <a:p>
             <a:pPr>
-              <a:spcBef>
-                <a:spcPts val="800"/>
-              </a:spcBef>
-              <a:defRPr sz="1400" b="1">
-                <a:solidFill>
-                  <a:srgbClr val="1E293B"/>
-                </a:solidFill>
-                <a:latin typeface="Arial"/>
-              </a:defRPr>
-            </a:pPr>
-            <a:r>
-              <a:t>Key code resolutions implemented to secure and optimize the codebase:</a:t>
-            </a:r>
-          </a:p>
-          <a:p>
-            <a:pPr>
-              <a:spcBef>
-                <a:spcPts val="800"/>
-              </a:spcBef>
-              <a:defRPr sz="1400" b="1">
-                <a:solidFill>
-                  <a:srgbClr val="1E293B"/>
-                </a:solidFill>
-                <a:latin typeface="Arial"/>
-              </a:defRPr>
-            </a:pPr>
-            <a:r>
-              <a:t>1. Express 5 Wildcard Routing Resolution:</a:t>
-            </a:r>
-          </a:p>
-          <a:p>
-            <a:pPr lvl="1">
-              <a:defRPr sz="1300">
-                <a:solidFill>
-                  <a:srgbClr val="475569"/>
-                </a:solidFill>
-                <a:latin typeface="Arial"/>
-              </a:defRPr>
-            </a:pPr>
-            <a:r>
-              <a:t>- Express 5's upgraded parser crashed with app.get('*') due to strict parameters.</a:t>
-            </a:r>
-          </a:p>
-          <a:p>
-            <a:pPr lvl="1">
-              <a:defRPr sz="1300">
-                <a:solidFill>
-                  <a:srgbClr val="475569"/>
-                </a:solidFill>
-                <a:latin typeface="Arial"/>
-              </a:defRPr>
-            </a:pPr>
-            <a:r>
-              <a:t>- Refactored into a request-method middleware using app.use():</a:t>
-            </a:r>
-          </a:p>
-          <a:p>
-            <a:pPr lvl="1">
-              <a:defRPr sz="1300">
-                <a:solidFill>
-                  <a:srgbClr val="475569"/>
-                </a:solidFill>
-                <a:latin typeface="Arial"/>
-              </a:defRPr>
-            </a:pPr>
-            <a:r>
-              <a:t>  • Checks if the request is a GET method and not directed to /api.</a:t>
-            </a:r>
-          </a:p>
-          <a:p>
-            <a:pPr lvl="1">
-              <a:defRPr sz="1300">
-                <a:solidFill>
-                  <a:srgbClr val="475569"/>
-                </a:solidFill>
-                <a:latin typeface="Arial"/>
-              </a:defRPr>
-            </a:pPr>
-            <a:r>
-              <a:t>  • Safely serves React's compiled index.html without parsing issues.</a:t>
-            </a:r>
-          </a:p>
-          <a:p>
-            <a:pPr>
-              <a:spcBef>
-                <a:spcPts val="800"/>
-              </a:spcBef>
-              <a:defRPr sz="1400" b="1">
-                <a:solidFill>
-                  <a:srgbClr val="1E293B"/>
-                </a:solidFill>
-                <a:latin typeface="Arial"/>
-              </a:defRPr>
-            </a:pPr>
-            <a:r>
-              <a:t>2. Secure Cookie-based JWT Handshake:</a:t>
-            </a:r>
-          </a:p>
-          <a:p>
-            <a:pPr lvl="1">
-              <a:defRPr sz="1300">
-                <a:solidFill>
-                  <a:srgbClr val="475569"/>
-                </a:solidFill>
-                <a:latin typeface="Arial"/>
-              </a:defRPr>
-            </a:pPr>
-            <a:r>
-              <a:t>- Dispatched HTTP-only secure cookies containing the session signature.</a:t>
-            </a:r>
-          </a:p>
-          <a:p>
-            <a:pPr lvl="1">
-              <a:defRPr sz="1300">
-                <a:solidFill>
-                  <a:srgbClr val="475569"/>
-                </a:solidFill>
-                <a:latin typeface="Arial"/>
-              </a:defRPr>
-            </a:pPr>
-            <a:r>
-              <a:t>- Prevented client-side scripts from reading administrative tokens, neutralizing XSS risks.</a:t>
-            </a:r>
-          </a:p>
-          <a:p>
-            <a:pPr>
-              <a:spcBef>
-                <a:spcPts val="800"/>
-              </a:spcBef>
-              <a:defRPr sz="1400" b="1">
-                <a:solidFill>
-                  <a:srgbClr val="1E293B"/>
-                </a:solidFill>
-                <a:latin typeface="Arial"/>
-              </a:defRPr>
-            </a:pPr>
-            <a:r>
-              <a:t>3. Responsive UI Theme System:</a:t>
-            </a:r>
-          </a:p>
-          <a:p>
-            <a:pPr lvl="1">
-              <a:defRPr sz="1300">
-                <a:solidFill>
-                  <a:srgbClr val="475569"/>
-                </a:solidFill>
-                <a:latin typeface="Arial"/>
-              </a:defRPr>
-            </a:pPr>
-            <a:r>
-              <a:t>- Engineered CSS color mappings and glassmorphism styling using custom variables.</a:t>
-            </a:r>
-          </a:p>
-          <a:p>
-            <a:pPr lvl="1">
-              <a:defRPr sz="1300">
-                <a:solidFill>
-                  <a:srgbClr val="475569"/>
-                </a:solidFill>
-                <a:latin typeface="Arial"/>
-              </a:defRPr>
-            </a:pPr>
-            <a:r>
-              <a:t>- Optimized browser rendering paths by minimizing layout recalculations.</a:t>
+              <a:spcAft>
+                <a:spcPts val="1200"/>
+              </a:spcAft>
+              <a:defRPr b="1" sz="1400">
+                <a:solidFill>
+                  <a:srgbClr val="2DD4BF"/>
+                </a:solidFill>
+              </a:defRPr>
+            </a:pPr>
+            <a:r>
+              <a:t>EXPRESS 5 WILDCARD RESOLUTION</a:t>
+            </a:r>
+          </a:p>
+          <a:p>
+            <a:pPr>
+              <a:spcAft>
+                <a:spcPts val="600"/>
+              </a:spcAft>
+              <a:defRPr sz="1200">
+                <a:solidFill>
+                  <a:srgbClr val="94A3B8"/>
+                </a:solidFill>
+              </a:defRPr>
+            </a:pPr>
+            <a:r>
+              <a:t>Express 5 wildcard routing fix:</a:t>
+            </a:r>
+          </a:p>
+          <a:p>
+            <a:pPr>
+              <a:spcAft>
+                <a:spcPts val="600"/>
+              </a:spcAft>
+              <a:defRPr sz="1200">
+                <a:solidFill>
+                  <a:srgbClr val="F8FAFC"/>
+                </a:solidFill>
+              </a:defRPr>
+            </a:pPr>
+            <a:r>
+              <a:t>• Express 5's upgraded parser crashed with app.get('*') due to strict parameters.</a:t>
+            </a:r>
+          </a:p>
+          <a:p>
+            <a:pPr>
+              <a:spcAft>
+                <a:spcPts val="600"/>
+              </a:spcAft>
+              <a:defRPr sz="1200">
+                <a:solidFill>
+                  <a:srgbClr val="F8FAFC"/>
+                </a:solidFill>
+              </a:defRPr>
+            </a:pPr>
+            <a:r>
+              <a:t>• Refactored into a custom middleware using app.use() to route requests correctly.</a:t>
+            </a:r>
+          </a:p>
+          <a:p>
+            <a:pPr>
+              <a:spcAft>
+                <a:spcPts val="600"/>
+              </a:spcAft>
+              <a:defRPr sz="1200">
+                <a:solidFill>
+                  <a:srgbClr val="F8FAFC"/>
+                </a:solidFill>
+              </a:defRPr>
+            </a:pPr>
+            <a:r>
+              <a:t>• The script checks req.method === 'GET' and bypasses /api queries.</a:t>
+            </a:r>
+          </a:p>
+          <a:p>
+            <a:pPr>
+              <a:spcAft>
+                <a:spcPts val="600"/>
+              </a:spcAft>
+              <a:defRPr sz="1200">
+                <a:solidFill>
+                  <a:srgbClr val="F8FAFC"/>
+                </a:solidFill>
+              </a:defRPr>
+            </a:pPr>
+            <a:r>
+              <a:t>• Safely serves React's compiled index.html without parsing issues.</a:t>
+            </a:r>
+          </a:p>
+        </p:txBody>
+      </p:sp>
+      <p:sp>
+        <p:nvSpPr>
+          <p:cNvPr id="6" name="Rounded Rectangle 5"/>
+          <p:cNvSpPr/>
+          <p:nvPr/>
+        </p:nvSpPr>
+        <p:spPr>
+          <a:xfrm>
+            <a:off x="4754880" y="1371600"/>
+            <a:ext cx="3931920" cy="4754880"/>
+          </a:xfrm>
+          <a:prstGeom prst="roundRect">
+            <a:avLst/>
+          </a:prstGeom>
+          <a:solidFill>
+            <a:srgbClr val="1E293B"/>
+          </a:solidFill>
+          <a:ln w="19050">
+            <a:solidFill>
+              <a:srgbClr val="334155"/>
+            </a:solidFill>
+          </a:ln>
+        </p:spPr>
+        <p:style>
+          <a:lnRef idx="1">
+            <a:schemeClr val="accent1"/>
+          </a:lnRef>
+          <a:fillRef idx="3">
+            <a:schemeClr val="accent1"/>
+          </a:fillRef>
+          <a:effectRef idx="2">
+            <a:schemeClr val="accent1"/>
+          </a:effectRef>
+          <a:fontRef idx="minor">
+            <a:schemeClr val="lt1"/>
+          </a:fontRef>
+        </p:style>
+        <p:txBody>
+          <a:bodyPr rtlCol="0" anchor="ctr"/>
+          <a:lstStyle/>
+          <a:p>
+            <a:pPr algn="ctr"/>
+          </a:p>
+        </p:txBody>
+      </p:sp>
+      <p:sp>
+        <p:nvSpPr>
+          <p:cNvPr id="7" name="TextBox 6"/>
+          <p:cNvSpPr txBox="1"/>
+          <p:nvPr/>
+        </p:nvSpPr>
+        <p:spPr>
+          <a:xfrm>
+            <a:off x="4846320" y="1463040"/>
+            <a:ext cx="3749039" cy="4572000"/>
+          </a:xfrm>
+          <a:prstGeom prst="rect">
+            <a:avLst/>
+          </a:prstGeom>
+          <a:noFill/>
+        </p:spPr>
+        <p:txBody>
+          <a:bodyPr wrap="square">
+            <a:spAutoFit/>
+          </a:bodyPr>
+          <a:lstStyle/>
+          <a:p>
+            <a:pPr>
+              <a:spcAft>
+                <a:spcPts val="1200"/>
+              </a:spcAft>
+              <a:defRPr b="1" sz="1400">
+                <a:solidFill>
+                  <a:srgbClr val="2DD4BF"/>
+                </a:solidFill>
+              </a:defRPr>
+            </a:pPr>
+            <a:r>
+              <a:t>SECURE Handshake &amp; UI TOKENS</a:t>
+            </a:r>
+          </a:p>
+          <a:p>
+            <a:pPr>
+              <a:spcAft>
+                <a:spcPts val="600"/>
+              </a:spcAft>
+              <a:defRPr sz="1200">
+                <a:solidFill>
+                  <a:srgbClr val="94A3B8"/>
+                </a:solidFill>
+              </a:defRPr>
+            </a:pPr>
+            <a:r>
+              <a:t>JWT Cookie Persistent Sessions:</a:t>
+            </a:r>
+          </a:p>
+          <a:p>
+            <a:pPr>
+              <a:spcAft>
+                <a:spcPts val="600"/>
+              </a:spcAft>
+              <a:defRPr sz="1200">
+                <a:solidFill>
+                  <a:srgbClr val="F8FAFC"/>
+                </a:solidFill>
+              </a:defRPr>
+            </a:pPr>
+            <a:r>
+              <a:t>• Encrypts cookies containing the JWT key with HTTP-only flags.</a:t>
+            </a:r>
+          </a:p>
+          <a:p>
+            <a:pPr>
+              <a:spcAft>
+                <a:spcPts val="600"/>
+              </a:spcAft>
+              <a:defRPr sz="1200">
+                <a:solidFill>
+                  <a:srgbClr val="F8FAFC"/>
+                </a:solidFill>
+              </a:defRPr>
+            </a:pPr>
+            <a:r>
+              <a:t>• Prevents client-side scripts from reading administrative tokens.</a:t>
+            </a:r>
+          </a:p>
+          <a:p>
+            <a:pPr>
+              <a:spcAft>
+                <a:spcPts val="600"/>
+              </a:spcAft>
+              <a:defRPr sz="1200">
+                <a:solidFill>
+                  <a:srgbClr val="94A3B8"/>
+                </a:solidFill>
+              </a:defRPr>
+            </a:pPr>
+            <a:r>
+              <a:t>Theme System Configuration:</a:t>
+            </a:r>
+          </a:p>
+          <a:p>
+            <a:pPr>
+              <a:spcAft>
+                <a:spcPts val="600"/>
+              </a:spcAft>
+              <a:defRPr sz="1200">
+                <a:solidFill>
+                  <a:srgbClr val="F8FAFC"/>
+                </a:solidFill>
+              </a:defRPr>
+            </a:pPr>
+            <a:r>
+              <a:t>• Styled with clean CSS variables.</a:t>
+            </a:r>
+          </a:p>
+          <a:p>
+            <a:pPr>
+              <a:spcAft>
+                <a:spcPts val="600"/>
+              </a:spcAft>
+              <a:defRPr sz="1200">
+                <a:solidFill>
+                  <a:srgbClr val="F8FAFC"/>
+                </a:solidFill>
+              </a:defRPr>
+            </a:pPr>
+            <a:r>
+              <a:t>• Glow elements, hover card effects, and visual graphs are optimized for smooth rendering.</a:t>
             </a:r>
           </a:p>
         </p:txBody>
@@ -3511,7 +3743,7 @@
     <p:bg>
       <p:bgPr>
         <a:solidFill>
-          <a:srgbClr val="F8FAFC"/>
+          <a:srgbClr val="0F172A"/>
         </a:solidFill>
         <a:effectLst/>
       </p:bgPr>
@@ -3548,7 +3780,7 @@
             <a:pPr>
               <a:defRPr sz="2200" b="1">
                 <a:solidFill>
-                  <a:srgbClr val="0B0F19"/>
+                  <a:srgbClr val="2DD4BF"/>
                 </a:solidFill>
                 <a:latin typeface="Arial"/>
               </a:defRPr>
@@ -3561,14 +3793,102 @@
       </p:sp>
       <p:sp>
         <p:nvSpPr>
-          <p:cNvPr id="3" name="TextBox 2"/>
+          <p:cNvPr id="3" name="Rectangle 2"/>
+          <p:cNvSpPr/>
+          <p:nvPr/>
+        </p:nvSpPr>
+        <p:spPr>
+          <a:xfrm>
+            <a:off x="457200" y="914400"/>
+            <a:ext cx="8229600" cy="25400"/>
+          </a:xfrm>
+          <a:prstGeom prst="rect">
+            <a:avLst/>
+          </a:prstGeom>
+          <a:solidFill>
+            <a:srgbClr val="3B82F6"/>
+          </a:solidFill>
+          <a:ln>
+            <a:noFill/>
+          </a:ln>
+        </p:spPr>
+        <p:style>
+          <a:lnRef idx="1">
+            <a:schemeClr val="accent1"/>
+          </a:lnRef>
+          <a:fillRef idx="3">
+            <a:schemeClr val="accent1"/>
+          </a:fillRef>
+          <a:effectRef idx="2">
+            <a:schemeClr val="accent1"/>
+          </a:effectRef>
+          <a:fontRef idx="minor">
+            <a:schemeClr val="lt1"/>
+          </a:fontRef>
+        </p:style>
+        <p:txBody>
+          <a:bodyPr rtlCol="0" anchor="ctr"/>
+          <a:lstStyle/>
+          <a:p>
+            <a:pPr algn="ctr"/>
+          </a:p>
+        </p:txBody>
+      </p:sp>
+      <p:sp>
+        <p:nvSpPr>
+          <p:cNvPr id="4" name="Rounded Rectangle 3"/>
+          <p:cNvSpPr/>
+          <p:nvPr/>
+        </p:nvSpPr>
+        <p:spPr>
+          <a:xfrm>
+            <a:off x="457200" y="1371600"/>
+            <a:ext cx="2560320" cy="4754880"/>
+          </a:xfrm>
+          <a:prstGeom prst="roundRect">
+            <a:avLst/>
+          </a:prstGeom>
+          <a:solidFill>
+            <a:srgbClr val="1E293B"/>
+          </a:solidFill>
+          <a:ln w="19050">
+            <a:solidFill>
+              <a:srgbClr val="334155"/>
+            </a:solidFill>
+          </a:ln>
+        </p:spPr>
+        <p:style>
+          <a:lnRef idx="1">
+            <a:schemeClr val="accent1"/>
+          </a:lnRef>
+          <a:fillRef idx="3">
+            <a:schemeClr val="accent1"/>
+          </a:fillRef>
+          <a:effectRef idx="2">
+            <a:schemeClr val="accent1"/>
+          </a:effectRef>
+          <a:fontRef idx="minor">
+            <a:schemeClr val="lt1"/>
+          </a:fontRef>
+        </p:style>
+        <p:txBody>
+          <a:bodyPr rtlCol="0" anchor="ctr"/>
+          <a:lstStyle/>
+          <a:p>
+            <a:pPr algn="ctr"/>
+          </a:p>
+        </p:txBody>
+      </p:sp>
+      <p:sp>
+        <p:nvSpPr>
+          <p:cNvPr id="5" name="TextBox 4"/>
           <p:cNvSpPr txBox="1"/>
           <p:nvPr/>
         </p:nvSpPr>
         <p:spPr>
           <a:xfrm>
-            <a:off x="457200" y="1188720"/>
-            <a:ext cx="8229600" cy="5303520"/>
+            <a:off x="548640" y="1463040"/>
+            <a:ext cx="2377440" cy="4572000"/>
           </a:xfrm>
           <a:prstGeom prst="rect">
             <a:avLst/>
@@ -3581,177 +3901,574 @@
           </a:bodyPr>
           <a:lstStyle/>
           <a:p>
-            <a:pPr>
-              <a:spcBef>
-                <a:spcPts val="800"/>
-              </a:spcBef>
-              <a:defRPr sz="1400" b="1">
-                <a:solidFill>
-                  <a:srgbClr val="1E293B"/>
-                </a:solidFill>
-                <a:latin typeface="Arial"/>
-              </a:defRPr>
-            </a:pPr>
-            <a:r>
-              <a:t>MongoDB Collections structure and design schema overview:</a:t>
-            </a:r>
-          </a:p>
-          <a:p>
-            <a:pPr>
-              <a:spcBef>
-                <a:spcPts val="800"/>
-              </a:spcBef>
-              <a:defRPr sz="1400" b="1">
-                <a:solidFill>
-                  <a:srgbClr val="1E293B"/>
-                </a:solidFill>
-                <a:latin typeface="Arial"/>
-              </a:defRPr>
-            </a:pPr>
-            <a:r>
-              <a:t>1. Products Collection:</a:t>
-            </a:r>
-          </a:p>
-          <a:p>
-            <a:pPr lvl="1">
-              <a:defRPr sz="1300">
-                <a:solidFill>
-                  <a:srgbClr val="475569"/>
-                </a:solidFill>
-                <a:latin typeface="Arial"/>
-              </a:defRPr>
-            </a:pPr>
-            <a:r>
-              <a:t>- Fields: name, category, currentPrice, priceHistory (Array of numbers), lastUpdated.</a:t>
-            </a:r>
-          </a:p>
-          <a:p>
-            <a:pPr lvl="1">
-              <a:defRPr sz="1300">
-                <a:solidFill>
-                  <a:srgbClr val="475569"/>
-                </a:solidFill>
-                <a:latin typeface="Arial"/>
-              </a:defRPr>
-            </a:pPr>
-            <a:r>
-              <a:t>- Design Decision: Storing previous rates inside an array allows historical struck-through representations.</a:t>
-            </a:r>
-          </a:p>
-          <a:p>
-            <a:pPr>
-              <a:spcBef>
-                <a:spcPts val="800"/>
-              </a:spcBef>
-              <a:defRPr sz="1400" b="1">
-                <a:solidFill>
-                  <a:srgbClr val="1E293B"/>
-                </a:solidFill>
-                <a:latin typeface="Arial"/>
-              </a:defRPr>
-            </a:pPr>
-            <a:r>
-              <a:t>2. Users Collection (Admin Credentials):</a:t>
-            </a:r>
-          </a:p>
-          <a:p>
-            <a:pPr lvl="1">
-              <a:defRPr sz="1300">
-                <a:solidFill>
-                  <a:srgbClr val="475569"/>
-                </a:solidFill>
-                <a:latin typeface="Arial"/>
-              </a:defRPr>
-            </a:pPr>
-            <a:r>
-              <a:t>- Fields: username, password (bcrypt hashed), createdAt.</a:t>
-            </a:r>
-          </a:p>
-          <a:p>
-            <a:pPr>
-              <a:spcBef>
-                <a:spcPts val="800"/>
-              </a:spcBef>
-              <a:defRPr sz="1400" b="1">
-                <a:solidFill>
-                  <a:srgbClr val="1E293B"/>
-                </a:solidFill>
-                <a:latin typeface="Arial"/>
-              </a:defRPr>
-            </a:pPr>
-            <a:r>
-              <a:t>3. Subscribers Collection:</a:t>
-            </a:r>
-          </a:p>
-          <a:p>
-            <a:pPr lvl="1">
-              <a:defRPr sz="1300">
-                <a:solidFill>
-                  <a:srgbClr val="475569"/>
-                </a:solidFill>
-                <a:latin typeface="Arial"/>
-              </a:defRPr>
-            </a:pPr>
-            <a:r>
-              <a:t>- Fields: phone, email, isWhatsAppSubed, isEmailSubed, createdAt.</a:t>
-            </a:r>
-          </a:p>
-          <a:p>
-            <a:pPr>
-              <a:spcBef>
-                <a:spcPts val="800"/>
-              </a:spcBef>
-              <a:defRPr sz="1400" b="1">
-                <a:solidFill>
-                  <a:srgbClr val="1E293B"/>
-                </a:solidFill>
-                <a:latin typeface="Arial"/>
-              </a:defRPr>
-            </a:pPr>
-            <a:r>
-              <a:t>4. Inquiries Collection:</a:t>
-            </a:r>
-          </a:p>
-          <a:p>
-            <a:pPr lvl="1">
-              <a:defRPr sz="1300">
-                <a:solidFill>
-                  <a:srgbClr val="475569"/>
-                </a:solidFill>
-                <a:latin typeface="Arial"/>
-              </a:defRPr>
-            </a:pPr>
-            <a:r>
-              <a:t>- Fields: clientName, phone, email, message, materialType, estimatedQuantity, createdAt.</a:t>
-            </a:r>
-          </a:p>
-          <a:p>
-            <a:pPr>
-              <a:spcBef>
-                <a:spcPts val="800"/>
-              </a:spcBef>
-              <a:defRPr sz="1400" b="1">
-                <a:solidFill>
-                  <a:srgbClr val="1E293B"/>
-                </a:solidFill>
-                <a:latin typeface="Arial"/>
-              </a:defRPr>
-            </a:pPr>
-            <a:r>
-              <a:t>5. BroadcastLogs Collection:</a:t>
-            </a:r>
-          </a:p>
-          <a:p>
-            <a:pPr lvl="1">
-              <a:defRPr sz="1300">
-                <a:solidFill>
-                  <a:srgbClr val="475569"/>
-                </a:solidFill>
-                <a:latin typeface="Arial"/>
-              </a:defRPr>
-            </a:pPr>
-            <a:r>
-              <a:t>- Fields: sender, type, messageContent, recipientsCount, status, sentAt.</a:t>
+            <a:pPr algn="ctr">
+              <a:spcAft>
+                <a:spcPts val="1200"/>
+              </a:spcAft>
+              <a:defRPr b="1" sz="1300">
+                <a:solidFill>
+                  <a:srgbClr val="2DD4BF"/>
+                </a:solidFill>
+              </a:defRPr>
+            </a:pPr>
+            <a:r>
+              <a:t>PRODUCT SCHEMAS</a:t>
+            </a:r>
+          </a:p>
+          <a:p>
+            <a:pPr>
+              <a:spcAft>
+                <a:spcPts val="400"/>
+              </a:spcAft>
+              <a:defRPr sz="1100" b="1">
+                <a:solidFill>
+                  <a:srgbClr val="F8FAFC"/>
+                </a:solidFill>
+              </a:defRPr>
+            </a:pPr>
+            <a:r>
+              <a:t>Products Collection</a:t>
+            </a:r>
+          </a:p>
+          <a:p>
+            <a:pPr>
+              <a:spcAft>
+                <a:spcPts val="400"/>
+              </a:spcAft>
+              <a:defRPr sz="1100" b="0">
+                <a:solidFill>
+                  <a:srgbClr val="F8FAFC"/>
+                </a:solidFill>
+              </a:defRPr>
+            </a:pPr>
+            <a:r>
+              <a:t>• name: String</a:t>
+            </a:r>
+          </a:p>
+          <a:p>
+            <a:pPr>
+              <a:spcAft>
+                <a:spcPts val="400"/>
+              </a:spcAft>
+              <a:defRPr sz="1100" b="0">
+                <a:solidFill>
+                  <a:srgbClr val="F8FAFC"/>
+                </a:solidFill>
+              </a:defRPr>
+            </a:pPr>
+            <a:r>
+              <a:t>• category: String</a:t>
+            </a:r>
+          </a:p>
+          <a:p>
+            <a:pPr>
+              <a:spcAft>
+                <a:spcPts val="400"/>
+              </a:spcAft>
+              <a:defRPr sz="1100" b="0">
+                <a:solidFill>
+                  <a:srgbClr val="F8FAFC"/>
+                </a:solidFill>
+              </a:defRPr>
+            </a:pPr>
+            <a:r>
+              <a:t>• currentPrice: Number</a:t>
+            </a:r>
+          </a:p>
+          <a:p>
+            <a:pPr>
+              <a:spcAft>
+                <a:spcPts val="400"/>
+              </a:spcAft>
+              <a:defRPr sz="1100" b="0">
+                <a:solidFill>
+                  <a:srgbClr val="F8FAFC"/>
+                </a:solidFill>
+              </a:defRPr>
+            </a:pPr>
+            <a:r>
+              <a:t>• priceHistory: Array</a:t>
+            </a:r>
+          </a:p>
+          <a:p>
+            <a:pPr>
+              <a:spcAft>
+                <a:spcPts val="400"/>
+              </a:spcAft>
+              <a:defRPr sz="1100" b="0">
+                <a:solidFill>
+                  <a:srgbClr val="F8FAFC"/>
+                </a:solidFill>
+              </a:defRPr>
+            </a:pPr>
+            <a:r>
+              <a:t>• lastUpdated: Date</a:t>
+            </a:r>
+          </a:p>
+          <a:p>
+            <a:pPr>
+              <a:spcAft>
+                <a:spcPts val="400"/>
+              </a:spcAft>
+              <a:defRPr sz="1100" b="1">
+                <a:solidFill>
+                  <a:srgbClr val="94A3B8"/>
+                </a:solidFill>
+              </a:defRPr>
+            </a:pPr>
+            <a:r>
+              <a:t>Design Decision:</a:t>
+            </a:r>
+          </a:p>
+          <a:p>
+            <a:pPr>
+              <a:spcAft>
+                <a:spcPts val="400"/>
+              </a:spcAft>
+              <a:defRPr sz="1100" b="0">
+                <a:solidFill>
+                  <a:srgbClr val="94A3B8"/>
+                </a:solidFill>
+              </a:defRPr>
+            </a:pPr>
+            <a:r>
+              <a:t>Logging historic rates inside an array allows historical struck-through representations.</a:t>
+            </a:r>
+          </a:p>
+        </p:txBody>
+      </p:sp>
+      <p:sp>
+        <p:nvSpPr>
+          <p:cNvPr id="6" name="Rounded Rectangle 5"/>
+          <p:cNvSpPr/>
+          <p:nvPr/>
+        </p:nvSpPr>
+        <p:spPr>
+          <a:xfrm>
+            <a:off x="3291840" y="1371600"/>
+            <a:ext cx="2560320" cy="4754880"/>
+          </a:xfrm>
+          <a:prstGeom prst="roundRect">
+            <a:avLst/>
+          </a:prstGeom>
+          <a:solidFill>
+            <a:srgbClr val="1E293B"/>
+          </a:solidFill>
+          <a:ln w="19050">
+            <a:solidFill>
+              <a:srgbClr val="334155"/>
+            </a:solidFill>
+          </a:ln>
+        </p:spPr>
+        <p:style>
+          <a:lnRef idx="1">
+            <a:schemeClr val="accent1"/>
+          </a:lnRef>
+          <a:fillRef idx="3">
+            <a:schemeClr val="accent1"/>
+          </a:fillRef>
+          <a:effectRef idx="2">
+            <a:schemeClr val="accent1"/>
+          </a:effectRef>
+          <a:fontRef idx="minor">
+            <a:schemeClr val="lt1"/>
+          </a:fontRef>
+        </p:style>
+        <p:txBody>
+          <a:bodyPr rtlCol="0" anchor="ctr"/>
+          <a:lstStyle/>
+          <a:p>
+            <a:pPr algn="ctr"/>
+          </a:p>
+        </p:txBody>
+      </p:sp>
+      <p:sp>
+        <p:nvSpPr>
+          <p:cNvPr id="7" name="TextBox 6"/>
+          <p:cNvSpPr txBox="1"/>
+          <p:nvPr/>
+        </p:nvSpPr>
+        <p:spPr>
+          <a:xfrm>
+            <a:off x="3383280" y="1463040"/>
+            <a:ext cx="2377440" cy="4572000"/>
+          </a:xfrm>
+          <a:prstGeom prst="rect">
+            <a:avLst/>
+          </a:prstGeom>
+          <a:noFill/>
+        </p:spPr>
+        <p:txBody>
+          <a:bodyPr wrap="square">
+            <a:spAutoFit/>
+          </a:bodyPr>
+          <a:lstStyle/>
+          <a:p>
+            <a:pPr algn="ctr">
+              <a:spcAft>
+                <a:spcPts val="1200"/>
+              </a:spcAft>
+              <a:defRPr b="1" sz="1300">
+                <a:solidFill>
+                  <a:srgbClr val="2DD4BF"/>
+                </a:solidFill>
+              </a:defRPr>
+            </a:pPr>
+            <a:r>
+              <a:t>CLIENT LEADS &amp; ACCTS</a:t>
+            </a:r>
+          </a:p>
+          <a:p>
+            <a:pPr>
+              <a:spcAft>
+                <a:spcPts val="400"/>
+              </a:spcAft>
+              <a:defRPr sz="1100" b="1">
+                <a:solidFill>
+                  <a:srgbClr val="F8FAFC"/>
+                </a:solidFill>
+              </a:defRPr>
+            </a:pPr>
+            <a:r>
+              <a:t>Inquiries Collection</a:t>
+            </a:r>
+          </a:p>
+          <a:p>
+            <a:pPr>
+              <a:spcAft>
+                <a:spcPts val="400"/>
+              </a:spcAft>
+              <a:defRPr sz="1100" b="0">
+                <a:solidFill>
+                  <a:srgbClr val="F8FAFC"/>
+                </a:solidFill>
+              </a:defRPr>
+            </a:pPr>
+            <a:r>
+              <a:t>• clientName: String</a:t>
+            </a:r>
+          </a:p>
+          <a:p>
+            <a:pPr>
+              <a:spcAft>
+                <a:spcPts val="400"/>
+              </a:spcAft>
+              <a:defRPr sz="1100" b="0">
+                <a:solidFill>
+                  <a:srgbClr val="F8FAFC"/>
+                </a:solidFill>
+              </a:defRPr>
+            </a:pPr>
+            <a:r>
+              <a:t>• phone: String</a:t>
+            </a:r>
+          </a:p>
+          <a:p>
+            <a:pPr>
+              <a:spcAft>
+                <a:spcPts val="400"/>
+              </a:spcAft>
+              <a:defRPr sz="1100" b="0">
+                <a:solidFill>
+                  <a:srgbClr val="F8FAFC"/>
+                </a:solidFill>
+              </a:defRPr>
+            </a:pPr>
+            <a:r>
+              <a:t>• email: String</a:t>
+            </a:r>
+          </a:p>
+          <a:p>
+            <a:pPr>
+              <a:spcAft>
+                <a:spcPts val="400"/>
+              </a:spcAft>
+              <a:defRPr sz="1100" b="0">
+                <a:solidFill>
+                  <a:srgbClr val="F8FAFC"/>
+                </a:solidFill>
+              </a:defRPr>
+            </a:pPr>
+            <a:r>
+              <a:t>• message: String</a:t>
+            </a:r>
+          </a:p>
+          <a:p>
+            <a:pPr>
+              <a:spcAft>
+                <a:spcPts val="400"/>
+              </a:spcAft>
+              <a:defRPr sz="1100" b="0">
+                <a:solidFill>
+                  <a:srgbClr val="F8FAFC"/>
+                </a:solidFill>
+              </a:defRPr>
+            </a:pPr>
+            <a:r>
+              <a:t>• estimatedQuantity: Number</a:t>
+            </a:r>
+          </a:p>
+          <a:p>
+            <a:pPr>
+              <a:spcAft>
+                <a:spcPts val="400"/>
+              </a:spcAft>
+              <a:defRPr sz="1100" b="1">
+                <a:solidFill>
+                  <a:srgbClr val="F8FAFC"/>
+                </a:solidFill>
+              </a:defRPr>
+            </a:pPr>
+            <a:r>
+              <a:t>Users Collection</a:t>
+            </a:r>
+          </a:p>
+          <a:p>
+            <a:pPr>
+              <a:spcAft>
+                <a:spcPts val="400"/>
+              </a:spcAft>
+              <a:defRPr sz="1100" b="0">
+                <a:solidFill>
+                  <a:srgbClr val="F8FAFC"/>
+                </a:solidFill>
+              </a:defRPr>
+            </a:pPr>
+            <a:r>
+              <a:t>• username: String</a:t>
+            </a:r>
+          </a:p>
+          <a:p>
+            <a:pPr>
+              <a:spcAft>
+                <a:spcPts val="400"/>
+              </a:spcAft>
+              <a:defRPr sz="1100" b="0">
+                <a:solidFill>
+                  <a:srgbClr val="F8FAFC"/>
+                </a:solidFill>
+              </a:defRPr>
+            </a:pPr>
+            <a:r>
+              <a:t>• password (bcrypt hashed)</a:t>
+            </a:r>
+          </a:p>
+        </p:txBody>
+      </p:sp>
+      <p:sp>
+        <p:nvSpPr>
+          <p:cNvPr id="8" name="Rounded Rectangle 7"/>
+          <p:cNvSpPr/>
+          <p:nvPr/>
+        </p:nvSpPr>
+        <p:spPr>
+          <a:xfrm>
+            <a:off x="6126480" y="1371600"/>
+            <a:ext cx="2560320" cy="4754880"/>
+          </a:xfrm>
+          <a:prstGeom prst="roundRect">
+            <a:avLst/>
+          </a:prstGeom>
+          <a:solidFill>
+            <a:srgbClr val="1E293B"/>
+          </a:solidFill>
+          <a:ln w="19050">
+            <a:solidFill>
+              <a:srgbClr val="334155"/>
+            </a:solidFill>
+          </a:ln>
+        </p:spPr>
+        <p:style>
+          <a:lnRef idx="1">
+            <a:schemeClr val="accent1"/>
+          </a:lnRef>
+          <a:fillRef idx="3">
+            <a:schemeClr val="accent1"/>
+          </a:fillRef>
+          <a:effectRef idx="2">
+            <a:schemeClr val="accent1"/>
+          </a:effectRef>
+          <a:fontRef idx="minor">
+            <a:schemeClr val="lt1"/>
+          </a:fontRef>
+        </p:style>
+        <p:txBody>
+          <a:bodyPr rtlCol="0" anchor="ctr"/>
+          <a:lstStyle/>
+          <a:p>
+            <a:pPr algn="ctr"/>
+          </a:p>
+        </p:txBody>
+      </p:sp>
+      <p:sp>
+        <p:nvSpPr>
+          <p:cNvPr id="9" name="TextBox 8"/>
+          <p:cNvSpPr txBox="1"/>
+          <p:nvPr/>
+        </p:nvSpPr>
+        <p:spPr>
+          <a:xfrm>
+            <a:off x="6217920" y="1463040"/>
+            <a:ext cx="2377440" cy="4572000"/>
+          </a:xfrm>
+          <a:prstGeom prst="rect">
+            <a:avLst/>
+          </a:prstGeom>
+          <a:noFill/>
+        </p:spPr>
+        <p:txBody>
+          <a:bodyPr wrap="square">
+            <a:spAutoFit/>
+          </a:bodyPr>
+          <a:lstStyle/>
+          <a:p>
+            <a:pPr algn="ctr">
+              <a:spcAft>
+                <a:spcPts val="1200"/>
+              </a:spcAft>
+              <a:defRPr b="1" sz="1300">
+                <a:solidFill>
+                  <a:srgbClr val="2DD4BF"/>
+                </a:solidFill>
+              </a:defRPr>
+            </a:pPr>
+            <a:r>
+              <a:t>SUBSCRIBERS &amp; LOGS</a:t>
+            </a:r>
+          </a:p>
+          <a:p>
+            <a:pPr>
+              <a:spcAft>
+                <a:spcPts val="400"/>
+              </a:spcAft>
+              <a:defRPr sz="1100" b="1">
+                <a:solidFill>
+                  <a:srgbClr val="F8FAFC"/>
+                </a:solidFill>
+              </a:defRPr>
+            </a:pPr>
+            <a:r>
+              <a:t>Subscribers Collection</a:t>
+            </a:r>
+          </a:p>
+          <a:p>
+            <a:pPr>
+              <a:spcAft>
+                <a:spcPts val="400"/>
+              </a:spcAft>
+              <a:defRPr sz="1100" b="0">
+                <a:solidFill>
+                  <a:srgbClr val="F8FAFC"/>
+                </a:solidFill>
+              </a:defRPr>
+            </a:pPr>
+            <a:r>
+              <a:t>• phone: String</a:t>
+            </a:r>
+          </a:p>
+          <a:p>
+            <a:pPr>
+              <a:spcAft>
+                <a:spcPts val="400"/>
+              </a:spcAft>
+              <a:defRPr sz="1100" b="0">
+                <a:solidFill>
+                  <a:srgbClr val="F8FAFC"/>
+                </a:solidFill>
+              </a:defRPr>
+            </a:pPr>
+            <a:r>
+              <a:t>• email: String</a:t>
+            </a:r>
+          </a:p>
+          <a:p>
+            <a:pPr>
+              <a:spcAft>
+                <a:spcPts val="400"/>
+              </a:spcAft>
+              <a:defRPr sz="1100" b="0">
+                <a:solidFill>
+                  <a:srgbClr val="F8FAFC"/>
+                </a:solidFill>
+              </a:defRPr>
+            </a:pPr>
+            <a:r>
+              <a:t>• isWhatsAppSubed: Boolean</a:t>
+            </a:r>
+          </a:p>
+          <a:p>
+            <a:pPr>
+              <a:spcAft>
+                <a:spcPts val="400"/>
+              </a:spcAft>
+              <a:defRPr sz="1100" b="0">
+                <a:solidFill>
+                  <a:srgbClr val="F8FAFC"/>
+                </a:solidFill>
+              </a:defRPr>
+            </a:pPr>
+            <a:r>
+              <a:t>• isEmailSubed: Boolean</a:t>
+            </a:r>
+          </a:p>
+          <a:p>
+            <a:pPr>
+              <a:spcAft>
+                <a:spcPts val="400"/>
+              </a:spcAft>
+              <a:defRPr sz="1100" b="0">
+                <a:solidFill>
+                  <a:srgbClr val="94A3B8"/>
+                </a:solidFill>
+              </a:defRPr>
+            </a:pPr>
+            <a:r>
+              <a:t>BroadcastLogs</a:t>
+            </a:r>
+          </a:p>
+          <a:p>
+            <a:pPr>
+              <a:spcAft>
+                <a:spcPts val="400"/>
+              </a:spcAft>
+              <a:defRPr sz="1100" b="0">
+                <a:solidFill>
+                  <a:srgbClr val="F8FAFC"/>
+                </a:solidFill>
+              </a:defRPr>
+            </a:pPr>
+            <a:r>
+              <a:t>• messageContent: String</a:t>
+            </a:r>
+          </a:p>
+          <a:p>
+            <a:pPr>
+              <a:spcAft>
+                <a:spcPts val="400"/>
+              </a:spcAft>
+              <a:defRPr sz="1100" b="0">
+                <a:solidFill>
+                  <a:srgbClr val="F8FAFC"/>
+                </a:solidFill>
+              </a:defRPr>
+            </a:pPr>
+            <a:r>
+              <a:t>• recipientsCount: Number</a:t>
+            </a:r>
+          </a:p>
+          <a:p>
+            <a:pPr>
+              <a:spcAft>
+                <a:spcPts val="400"/>
+              </a:spcAft>
+              <a:defRPr sz="1100" b="0">
+                <a:solidFill>
+                  <a:srgbClr val="F8FAFC"/>
+                </a:solidFill>
+              </a:defRPr>
+            </a:pPr>
+            <a:r>
+              <a:t>• status: String</a:t>
             </a:r>
           </a:p>
         </p:txBody>
@@ -3770,7 +4487,7 @@
     <p:bg>
       <p:bgPr>
         <a:solidFill>
-          <a:srgbClr val="F8FAFC"/>
+          <a:srgbClr val="0F172A"/>
         </a:solidFill>
         <a:effectLst/>
       </p:bgPr>
@@ -3807,7 +4524,7 @@
             <a:pPr>
               <a:defRPr sz="2200" b="1">
                 <a:solidFill>
-                  <a:srgbClr val="0B0F19"/>
+                  <a:srgbClr val="2DD4BF"/>
                 </a:solidFill>
                 <a:latin typeface="Arial"/>
               </a:defRPr>
@@ -3820,14 +4537,102 @@
       </p:sp>
       <p:sp>
         <p:nvSpPr>
-          <p:cNvPr id="3" name="TextBox 2"/>
+          <p:cNvPr id="3" name="Rectangle 2"/>
+          <p:cNvSpPr/>
+          <p:nvPr/>
+        </p:nvSpPr>
+        <p:spPr>
+          <a:xfrm>
+            <a:off x="457200" y="914400"/>
+            <a:ext cx="8229600" cy="25400"/>
+          </a:xfrm>
+          <a:prstGeom prst="rect">
+            <a:avLst/>
+          </a:prstGeom>
+          <a:solidFill>
+            <a:srgbClr val="3B82F6"/>
+          </a:solidFill>
+          <a:ln>
+            <a:noFill/>
+          </a:ln>
+        </p:spPr>
+        <p:style>
+          <a:lnRef idx="1">
+            <a:schemeClr val="accent1"/>
+          </a:lnRef>
+          <a:fillRef idx="3">
+            <a:schemeClr val="accent1"/>
+          </a:fillRef>
+          <a:effectRef idx="2">
+            <a:schemeClr val="accent1"/>
+          </a:effectRef>
+          <a:fontRef idx="minor">
+            <a:schemeClr val="lt1"/>
+          </a:fontRef>
+        </p:style>
+        <p:txBody>
+          <a:bodyPr rtlCol="0" anchor="ctr"/>
+          <a:lstStyle/>
+          <a:p>
+            <a:pPr algn="ctr"/>
+          </a:p>
+        </p:txBody>
+      </p:sp>
+      <p:sp>
+        <p:nvSpPr>
+          <p:cNvPr id="4" name="Rounded Rectangle 3"/>
+          <p:cNvSpPr/>
+          <p:nvPr/>
+        </p:nvSpPr>
+        <p:spPr>
+          <a:xfrm>
+            <a:off x="457200" y="1371600"/>
+            <a:ext cx="3931920" cy="4754880"/>
+          </a:xfrm>
+          <a:prstGeom prst="roundRect">
+            <a:avLst/>
+          </a:prstGeom>
+          <a:solidFill>
+            <a:srgbClr val="1E293B"/>
+          </a:solidFill>
+          <a:ln w="19050">
+            <a:solidFill>
+              <a:srgbClr val="334155"/>
+            </a:solidFill>
+          </a:ln>
+        </p:spPr>
+        <p:style>
+          <a:lnRef idx="1">
+            <a:schemeClr val="accent1"/>
+          </a:lnRef>
+          <a:fillRef idx="3">
+            <a:schemeClr val="accent1"/>
+          </a:fillRef>
+          <a:effectRef idx="2">
+            <a:schemeClr val="accent1"/>
+          </a:effectRef>
+          <a:fontRef idx="minor">
+            <a:schemeClr val="lt1"/>
+          </a:fontRef>
+        </p:style>
+        <p:txBody>
+          <a:bodyPr rtlCol="0" anchor="ctr"/>
+          <a:lstStyle/>
+          <a:p>
+            <a:pPr algn="ctr"/>
+          </a:p>
+        </p:txBody>
+      </p:sp>
+      <p:sp>
+        <p:nvSpPr>
+          <p:cNvPr id="5" name="TextBox 4"/>
           <p:cNvSpPr txBox="1"/>
           <p:nvPr/>
         </p:nvSpPr>
         <p:spPr>
           <a:xfrm>
-            <a:off x="457200" y="1188720"/>
-            <a:ext cx="8229600" cy="5303520"/>
+            <a:off x="548640" y="1463040"/>
+            <a:ext cx="3749039" cy="4572000"/>
           </a:xfrm>
           <a:prstGeom prst="rect">
             <a:avLst/>
@@ -3841,180 +4646,340 @@
           <a:lstStyle/>
           <a:p>
             <a:pPr>
-              <a:spcBef>
-                <a:spcPts val="800"/>
-              </a:spcBef>
-              <a:defRPr sz="1400" b="1">
-                <a:solidFill>
-                  <a:srgbClr val="1E293B"/>
-                </a:solidFill>
-                <a:latin typeface="Arial"/>
-              </a:defRPr>
-            </a:pPr>
-            <a:r>
-              <a:t>Technical issues resolved during database setup and server configurations:</a:t>
-            </a:r>
-          </a:p>
-          <a:p>
-            <a:pPr>
-              <a:spcBef>
-                <a:spcPts val="800"/>
-              </a:spcBef>
-              <a:defRPr sz="1400" b="1">
-                <a:solidFill>
-                  <a:srgbClr val="1E293B"/>
-                </a:solidFill>
-                <a:latin typeface="Arial"/>
-              </a:defRPr>
-            </a:pPr>
-            <a:r>
-              <a:t>Challenge 1: Express 5 Wildcard Routing Crash</a:t>
-            </a:r>
-          </a:p>
-          <a:p>
-            <a:pPr lvl="1">
-              <a:defRPr sz="1300">
-                <a:solidFill>
-                  <a:srgbClr val="475569"/>
-                </a:solidFill>
-                <a:latin typeface="Arial"/>
-              </a:defRPr>
-            </a:pPr>
-            <a:r>
-              <a:t>• Problem: Upon deploying the backend, the server crashed with 'PathError: Missing parameter name'.</a:t>
-            </a:r>
-          </a:p>
-          <a:p>
-            <a:pPr lvl="1">
-              <a:defRPr sz="1300">
-                <a:solidFill>
-                  <a:srgbClr val="475569"/>
-                </a:solidFill>
-                <a:latin typeface="Arial"/>
-              </a:defRPr>
-            </a:pPr>
-            <a:r>
-              <a:t>• What we tried first: Tried escaping the wildcard character like app.get('\*').</a:t>
-            </a:r>
-          </a:p>
-          <a:p>
-            <a:pPr lvl="1">
-              <a:defRPr sz="1300">
-                <a:solidFill>
-                  <a:srgbClr val="475569"/>
-                </a:solidFill>
-                <a:latin typeface="Arial"/>
-              </a:defRPr>
-            </a:pPr>
-            <a:r>
-              <a:t>• Why it failed: Express 5 uses path-to-regexp v8 which completely dropped the un-named wildcard.</a:t>
-            </a:r>
-          </a:p>
-          <a:p>
-            <a:pPr lvl="1">
-              <a:defRPr sz="1300">
-                <a:solidFill>
-                  <a:srgbClr val="475569"/>
-                </a:solidFill>
-                <a:latin typeface="Arial"/>
-              </a:defRPr>
-            </a:pPr>
-            <a:r>
-              <a:t>• What we did instead: Refactored the catch-all router to use a custom app.use() middleware.</a:t>
-            </a:r>
-          </a:p>
-          <a:p>
-            <a:pPr lvl="1">
-              <a:defRPr sz="1300">
-                <a:solidFill>
-                  <a:srgbClr val="475569"/>
-                </a:solidFill>
-                <a:latin typeface="Arial"/>
-              </a:defRPr>
-            </a:pPr>
-            <a:r>
-              <a:t>• Learning: Express versions differ in routing engines; middleware is more robust for fallbacks.</a:t>
-            </a:r>
-          </a:p>
-          <a:p>
-            <a:pPr>
-              <a:spcBef>
-                <a:spcPts val="800"/>
-              </a:spcBef>
-              <a:defRPr sz="1400" b="1">
-                <a:solidFill>
-                  <a:srgbClr val="1E293B"/>
-                </a:solidFill>
-                <a:latin typeface="Arial"/>
-              </a:defRPr>
-            </a:pPr>
-            <a:r>
-              <a:t>Challenge 2: Admin Session Expiry &amp; Inquiries Sync</a:t>
-            </a:r>
-          </a:p>
-          <a:p>
-            <a:pPr lvl="1">
-              <a:defRPr sz="1300">
-                <a:solidFill>
-                  <a:srgbClr val="475569"/>
-                </a:solidFill>
-                <a:latin typeface="Arial"/>
-              </a:defRPr>
-            </a:pPr>
-            <a:r>
-              <a:t>• Problem: Administrators were logged out frequently, causing active data display lag.</a:t>
-            </a:r>
-          </a:p>
-          <a:p>
-            <a:pPr lvl="1">
-              <a:defRPr sz="1300">
-                <a:solidFill>
-                  <a:srgbClr val="475569"/>
-                </a:solidFill>
-                <a:latin typeface="Arial"/>
-              </a:defRPr>
-            </a:pPr>
-            <a:r>
-              <a:t>• What we tried first: Storing the login token in localStorage.</a:t>
-            </a:r>
-          </a:p>
-          <a:p>
-            <a:pPr lvl="1">
-              <a:defRPr sz="1300">
-                <a:solidFill>
-                  <a:srgbClr val="475569"/>
-                </a:solidFill>
-                <a:latin typeface="Arial"/>
-              </a:defRPr>
-            </a:pPr>
-            <a:r>
-              <a:t>• Why it failed: Vulnerable to XSS, and tokens cleared on browser closes.</a:t>
-            </a:r>
-          </a:p>
-          <a:p>
-            <a:pPr lvl="1">
-              <a:defRPr sz="1300">
-                <a:solidFill>
-                  <a:srgbClr val="475569"/>
-                </a:solidFill>
-                <a:latin typeface="Arial"/>
-              </a:defRPr>
-            </a:pPr>
-            <a:r>
-              <a:t>• What we did instead: Persisted sessions inside secure httpOnly JWT cookies with long lifespans.</a:t>
-            </a:r>
-          </a:p>
-          <a:p>
-            <a:pPr lvl="1">
-              <a:defRPr sz="1300">
-                <a:solidFill>
-                  <a:srgbClr val="475569"/>
-                </a:solidFill>
-                <a:latin typeface="Arial"/>
-              </a:defRPr>
-            </a:pPr>
-            <a:r>
-              <a:t>• Learning: Session persistence requires secure cookies rather than browser storage.</a:t>
+              <a:spcAft>
+                <a:spcPts val="1200"/>
+              </a:spcAft>
+              <a:defRPr b="1" sz="1400">
+                <a:solidFill>
+                  <a:srgbClr val="2DD4BF"/>
+                </a:solidFill>
+              </a:defRPr>
+            </a:pPr>
+            <a:r>
+              <a:t>1. EXPRESS 5 WILDCARD CRASH</a:t>
+            </a:r>
+          </a:p>
+          <a:p>
+            <a:pPr>
+              <a:spcAft>
+                <a:spcPts val="400"/>
+              </a:spcAft>
+              <a:defRPr sz="1200" b="1">
+                <a:solidFill>
+                  <a:srgbClr val="F8FAFC"/>
+                </a:solidFill>
+              </a:defRPr>
+            </a:pPr>
+            <a:r>
+              <a:t>Problem:</a:t>
+            </a:r>
+          </a:p>
+          <a:p>
+            <a:pPr>
+              <a:spcAft>
+                <a:spcPts val="400"/>
+              </a:spcAft>
+              <a:defRPr sz="1200" b="0">
+                <a:solidFill>
+                  <a:srgbClr val="94A3B8"/>
+                </a:solidFill>
+              </a:defRPr>
+            </a:pPr>
+            <a:r>
+              <a:t>• Node server crashed with 'PathError: Missing parameter name' during Express 5 setup.</a:t>
+            </a:r>
+          </a:p>
+          <a:p>
+            <a:pPr>
+              <a:spcAft>
+                <a:spcPts val="400"/>
+              </a:spcAft>
+              <a:defRPr sz="1200" b="1">
+                <a:solidFill>
+                  <a:srgbClr val="F8FAFC"/>
+                </a:solidFill>
+              </a:defRPr>
+            </a:pPr>
+            <a:r>
+              <a:t>What we tried first:</a:t>
+            </a:r>
+          </a:p>
+          <a:p>
+            <a:pPr>
+              <a:spcAft>
+                <a:spcPts val="400"/>
+              </a:spcAft>
+              <a:defRPr sz="1200" b="0">
+                <a:solidFill>
+                  <a:srgbClr val="94A3B8"/>
+                </a:solidFill>
+              </a:defRPr>
+            </a:pPr>
+            <a:r>
+              <a:t>• Tried escaping wildcard values.</a:t>
+            </a:r>
+          </a:p>
+          <a:p>
+            <a:pPr>
+              <a:spcAft>
+                <a:spcPts val="400"/>
+              </a:spcAft>
+              <a:defRPr sz="1200" b="1">
+                <a:solidFill>
+                  <a:srgbClr val="F8FAFC"/>
+                </a:solidFill>
+              </a:defRPr>
+            </a:pPr>
+            <a:r>
+              <a:t>Why it failed:</a:t>
+            </a:r>
+          </a:p>
+          <a:p>
+            <a:pPr>
+              <a:spcAft>
+                <a:spcPts val="400"/>
+              </a:spcAft>
+              <a:defRPr sz="1200" b="0">
+                <a:solidFill>
+                  <a:srgbClr val="94A3B8"/>
+                </a:solidFill>
+              </a:defRPr>
+            </a:pPr>
+            <a:r>
+              <a:t>• Express 5 uses path-to-regexp v8 which dropped un-named wildcard.</a:t>
+            </a:r>
+          </a:p>
+          <a:p>
+            <a:pPr>
+              <a:spcAft>
+                <a:spcPts val="400"/>
+              </a:spcAft>
+              <a:defRPr sz="1200" b="1">
+                <a:solidFill>
+                  <a:srgbClr val="F8FAFC"/>
+                </a:solidFill>
+              </a:defRPr>
+            </a:pPr>
+            <a:r>
+              <a:t>Resolution:</a:t>
+            </a:r>
+          </a:p>
+          <a:p>
+            <a:pPr>
+              <a:spcAft>
+                <a:spcPts val="400"/>
+              </a:spcAft>
+              <a:defRPr sz="1200" b="0">
+                <a:solidFill>
+                  <a:srgbClr val="94A3B8"/>
+                </a:solidFill>
+              </a:defRPr>
+            </a:pPr>
+            <a:r>
+              <a:t>• Refactored to custom app.use() middleware to serve index.html.</a:t>
+            </a:r>
+          </a:p>
+        </p:txBody>
+      </p:sp>
+      <p:sp>
+        <p:nvSpPr>
+          <p:cNvPr id="6" name="Rounded Rectangle 5"/>
+          <p:cNvSpPr/>
+          <p:nvPr/>
+        </p:nvSpPr>
+        <p:spPr>
+          <a:xfrm>
+            <a:off x="4754880" y="1371600"/>
+            <a:ext cx="3931920" cy="4754880"/>
+          </a:xfrm>
+          <a:prstGeom prst="roundRect">
+            <a:avLst/>
+          </a:prstGeom>
+          <a:solidFill>
+            <a:srgbClr val="1E293B"/>
+          </a:solidFill>
+          <a:ln w="19050">
+            <a:solidFill>
+              <a:srgbClr val="334155"/>
+            </a:solidFill>
+          </a:ln>
+        </p:spPr>
+        <p:style>
+          <a:lnRef idx="1">
+            <a:schemeClr val="accent1"/>
+          </a:lnRef>
+          <a:fillRef idx="3">
+            <a:schemeClr val="accent1"/>
+          </a:fillRef>
+          <a:effectRef idx="2">
+            <a:schemeClr val="accent1"/>
+          </a:effectRef>
+          <a:fontRef idx="minor">
+            <a:schemeClr val="lt1"/>
+          </a:fontRef>
+        </p:style>
+        <p:txBody>
+          <a:bodyPr rtlCol="0" anchor="ctr"/>
+          <a:lstStyle/>
+          <a:p>
+            <a:pPr algn="ctr"/>
+          </a:p>
+        </p:txBody>
+      </p:sp>
+      <p:sp>
+        <p:nvSpPr>
+          <p:cNvPr id="7" name="TextBox 6"/>
+          <p:cNvSpPr txBox="1"/>
+          <p:nvPr/>
+        </p:nvSpPr>
+        <p:spPr>
+          <a:xfrm>
+            <a:off x="4846320" y="1463040"/>
+            <a:ext cx="3749039" cy="4572000"/>
+          </a:xfrm>
+          <a:prstGeom prst="rect">
+            <a:avLst/>
+          </a:prstGeom>
+          <a:noFill/>
+        </p:spPr>
+        <p:txBody>
+          <a:bodyPr wrap="square">
+            <a:spAutoFit/>
+          </a:bodyPr>
+          <a:lstStyle/>
+          <a:p>
+            <a:pPr>
+              <a:spcAft>
+                <a:spcPts val="1200"/>
+              </a:spcAft>
+              <a:defRPr b="1" sz="1400">
+                <a:solidFill>
+                  <a:srgbClr val="2DD4BF"/>
+                </a:solidFill>
+              </a:defRPr>
+            </a:pPr>
+            <a:r>
+              <a:t>2. ADMIN SESSION EXPIRY</a:t>
+            </a:r>
+          </a:p>
+          <a:p>
+            <a:pPr>
+              <a:spcAft>
+                <a:spcPts val="400"/>
+              </a:spcAft>
+              <a:defRPr sz="1200" b="1">
+                <a:solidFill>
+                  <a:srgbClr val="F8FAFC"/>
+                </a:solidFill>
+              </a:defRPr>
+            </a:pPr>
+            <a:r>
+              <a:t>Problem:</a:t>
+            </a:r>
+          </a:p>
+          <a:p>
+            <a:pPr>
+              <a:spcAft>
+                <a:spcPts val="400"/>
+              </a:spcAft>
+              <a:defRPr sz="1200" b="0">
+                <a:solidFill>
+                  <a:srgbClr val="94A3B8"/>
+                </a:solidFill>
+              </a:defRPr>
+            </a:pPr>
+            <a:r>
+              <a:t>• Administrative dashboard data loading was frequently interrupted.</a:t>
+            </a:r>
+          </a:p>
+          <a:p>
+            <a:pPr>
+              <a:spcAft>
+                <a:spcPts val="400"/>
+              </a:spcAft>
+              <a:defRPr sz="1200" b="1">
+                <a:solidFill>
+                  <a:srgbClr val="F8FAFC"/>
+                </a:solidFill>
+              </a:defRPr>
+            </a:pPr>
+            <a:r>
+              <a:t>What we tried first:</a:t>
+            </a:r>
+          </a:p>
+          <a:p>
+            <a:pPr>
+              <a:spcAft>
+                <a:spcPts val="400"/>
+              </a:spcAft>
+              <a:defRPr sz="1200" b="0">
+                <a:solidFill>
+                  <a:srgbClr val="94A3B8"/>
+                </a:solidFill>
+              </a:defRPr>
+            </a:pPr>
+            <a:r>
+              <a:t>• Stored session tokens inside client localStorage.</a:t>
+            </a:r>
+          </a:p>
+          <a:p>
+            <a:pPr>
+              <a:spcAft>
+                <a:spcPts val="400"/>
+              </a:spcAft>
+              <a:defRPr sz="1200" b="1">
+                <a:solidFill>
+                  <a:srgbClr val="F8FAFC"/>
+                </a:solidFill>
+              </a:defRPr>
+            </a:pPr>
+            <a:r>
+              <a:t>Why it failed:</a:t>
+            </a:r>
+          </a:p>
+          <a:p>
+            <a:pPr>
+              <a:spcAft>
+                <a:spcPts val="400"/>
+              </a:spcAft>
+              <a:defRPr sz="1200" b="0">
+                <a:solidFill>
+                  <a:srgbClr val="94A3B8"/>
+                </a:solidFill>
+              </a:defRPr>
+            </a:pPr>
+            <a:r>
+              <a:t>• localStorage is vulnerable to XSS and clears on window closes.</a:t>
+            </a:r>
+          </a:p>
+          <a:p>
+            <a:pPr>
+              <a:spcAft>
+                <a:spcPts val="400"/>
+              </a:spcAft>
+              <a:defRPr sz="1200" b="1">
+                <a:solidFill>
+                  <a:srgbClr val="F8FAFC"/>
+                </a:solidFill>
+              </a:defRPr>
+            </a:pPr>
+            <a:r>
+              <a:t>Resolution:</a:t>
+            </a:r>
+          </a:p>
+          <a:p>
+            <a:pPr>
+              <a:spcAft>
+                <a:spcPts val="400"/>
+              </a:spcAft>
+              <a:defRPr sz="1200" b="0">
+                <a:solidFill>
+                  <a:srgbClr val="94A3B8"/>
+                </a:solidFill>
+              </a:defRPr>
+            </a:pPr>
+            <a:r>
+              <a:t>• Configured secure httpOnly JWT cookies with long persistence.</a:t>
             </a:r>
           </a:p>
         </p:txBody>
@@ -4033,7 +4998,7 @@
     <p:bg>
       <p:bgPr>
         <a:solidFill>
-          <a:srgbClr val="F8FAFC"/>
+          <a:srgbClr val="0F172A"/>
         </a:solidFill>
         <a:effectLst/>
       </p:bgPr>
@@ -4070,7 +5035,7 @@
             <a:pPr>
               <a:defRPr sz="2200" b="1">
                 <a:solidFill>
-                  <a:srgbClr val="0B0F19"/>
+                  <a:srgbClr val="2DD4BF"/>
                 </a:solidFill>
                 <a:latin typeface="Arial"/>
               </a:defRPr>
@@ -4083,14 +5048,102 @@
       </p:sp>
       <p:sp>
         <p:nvSpPr>
-          <p:cNvPr id="3" name="TextBox 2"/>
+          <p:cNvPr id="3" name="Rectangle 2"/>
+          <p:cNvSpPr/>
+          <p:nvPr/>
+        </p:nvSpPr>
+        <p:spPr>
+          <a:xfrm>
+            <a:off x="457200" y="914400"/>
+            <a:ext cx="8229600" cy="25400"/>
+          </a:xfrm>
+          <a:prstGeom prst="rect">
+            <a:avLst/>
+          </a:prstGeom>
+          <a:solidFill>
+            <a:srgbClr val="3B82F6"/>
+          </a:solidFill>
+          <a:ln>
+            <a:noFill/>
+          </a:ln>
+        </p:spPr>
+        <p:style>
+          <a:lnRef idx="1">
+            <a:schemeClr val="accent1"/>
+          </a:lnRef>
+          <a:fillRef idx="3">
+            <a:schemeClr val="accent1"/>
+          </a:fillRef>
+          <a:effectRef idx="2">
+            <a:schemeClr val="accent1"/>
+          </a:effectRef>
+          <a:fontRef idx="minor">
+            <a:schemeClr val="lt1"/>
+          </a:fontRef>
+        </p:style>
+        <p:txBody>
+          <a:bodyPr rtlCol="0" anchor="ctr"/>
+          <a:lstStyle/>
+          <a:p>
+            <a:pPr algn="ctr"/>
+          </a:p>
+        </p:txBody>
+      </p:sp>
+      <p:sp>
+        <p:nvSpPr>
+          <p:cNvPr id="4" name="Rounded Rectangle 3"/>
+          <p:cNvSpPr/>
+          <p:nvPr/>
+        </p:nvSpPr>
+        <p:spPr>
+          <a:xfrm>
+            <a:off x="457200" y="1371600"/>
+            <a:ext cx="3931920" cy="4754880"/>
+          </a:xfrm>
+          <a:prstGeom prst="roundRect">
+            <a:avLst/>
+          </a:prstGeom>
+          <a:solidFill>
+            <a:srgbClr val="1E293B"/>
+          </a:solidFill>
+          <a:ln w="19050">
+            <a:solidFill>
+              <a:srgbClr val="334155"/>
+            </a:solidFill>
+          </a:ln>
+        </p:spPr>
+        <p:style>
+          <a:lnRef idx="1">
+            <a:schemeClr val="accent1"/>
+          </a:lnRef>
+          <a:fillRef idx="3">
+            <a:schemeClr val="accent1"/>
+          </a:fillRef>
+          <a:effectRef idx="2">
+            <a:schemeClr val="accent1"/>
+          </a:effectRef>
+          <a:fontRef idx="minor">
+            <a:schemeClr val="lt1"/>
+          </a:fontRef>
+        </p:style>
+        <p:txBody>
+          <a:bodyPr rtlCol="0" anchor="ctr"/>
+          <a:lstStyle/>
+          <a:p>
+            <a:pPr algn="ctr"/>
+          </a:p>
+        </p:txBody>
+      </p:sp>
+      <p:sp>
+        <p:nvSpPr>
+          <p:cNvPr id="5" name="TextBox 4"/>
           <p:cNvSpPr txBox="1"/>
           <p:nvPr/>
         </p:nvSpPr>
         <p:spPr>
           <a:xfrm>
-            <a:off x="457200" y="1188720"/>
-            <a:ext cx="8229600" cy="5303520"/>
+            <a:off x="548640" y="1463040"/>
+            <a:ext cx="3749039" cy="4572000"/>
           </a:xfrm>
           <a:prstGeom prst="rect">
             <a:avLst/>
@@ -4104,167 +5157,340 @@
           <a:lstStyle/>
           <a:p>
             <a:pPr>
-              <a:spcBef>
-                <a:spcPts val="800"/>
-              </a:spcBef>
-              <a:defRPr sz="1400" b="1">
-                <a:solidFill>
-                  <a:srgbClr val="1E293B"/>
-                </a:solidFill>
-                <a:latin typeface="Arial"/>
-              </a:defRPr>
-            </a:pPr>
-            <a:r>
-              <a:t>Technical issues resolved during frontend assembly and repository setup:</a:t>
-            </a:r>
-          </a:p>
-          <a:p>
-            <a:pPr>
-              <a:spcBef>
-                <a:spcPts val="800"/>
-              </a:spcBef>
-              <a:defRPr sz="1400" b="1">
-                <a:solidFill>
-                  <a:srgbClr val="1E293B"/>
-                </a:solidFill>
-                <a:latin typeface="Arial"/>
-              </a:defRPr>
-            </a:pPr>
-            <a:r>
-              <a:t>Challenge 3: Vercel Peer Dependency Conflict</a:t>
-            </a:r>
-          </a:p>
-          <a:p>
-            <a:pPr lvl="1">
-              <a:defRPr sz="1300">
-                <a:solidFill>
-                  <a:srgbClr val="475569"/>
-                </a:solidFill>
-                <a:latin typeface="Arial"/>
-              </a:defRPr>
-            </a:pPr>
-            <a:r>
-              <a:t>• Problem: Vercel aborted frontend builds due to npm ERESOLVE peer dependency warnings.</a:t>
-            </a:r>
-          </a:p>
-          <a:p>
-            <a:pPr lvl="1">
-              <a:defRPr sz="1300">
-                <a:solidFill>
-                  <a:srgbClr val="475569"/>
-                </a:solidFill>
-                <a:latin typeface="Arial"/>
-              </a:defRPr>
-            </a:pPr>
-            <a:r>
-              <a:t>• What we tried first: Added --legacy-peer-deps to local scripts.</a:t>
-            </a:r>
-          </a:p>
-          <a:p>
-            <a:pPr lvl="1">
-              <a:defRPr sz="1300">
-                <a:solidFill>
-                  <a:srgbClr val="475569"/>
-                </a:solidFill>
-                <a:latin typeface="Arial"/>
-              </a:defRPr>
-            </a:pPr>
-            <a:r>
-              <a:t>• Why it failed: Vercel's automated builder ignored local run scripts and used default npm ci.</a:t>
-            </a:r>
-          </a:p>
-          <a:p>
-            <a:pPr lvl="1">
-              <a:defRPr sz="1300">
-                <a:solidFill>
-                  <a:srgbClr val="475569"/>
-                </a:solidFill>
-                <a:latin typeface="Arial"/>
-              </a:defRPr>
-            </a:pPr>
-            <a:r>
-              <a:t>• What we did instead: Added .npmrc file to client root, and upgraded lucide-react to 1.21.0.</a:t>
-            </a:r>
-          </a:p>
-          <a:p>
-            <a:pPr lvl="1">
-              <a:defRPr sz="1300">
-                <a:solidFill>
-                  <a:srgbClr val="475569"/>
-                </a:solidFill>
-                <a:latin typeface="Arial"/>
-              </a:defRPr>
-            </a:pPr>
-            <a:r>
-              <a:t>• Learning: Upgrading dependencies directly resolves peer conflicts cleanly on cloud builders.</a:t>
-            </a:r>
-          </a:p>
-          <a:p>
-            <a:pPr>
-              <a:spcBef>
-                <a:spcPts val="800"/>
-              </a:spcBef>
-              <a:defRPr sz="1400" b="1">
-                <a:solidFill>
-                  <a:srgbClr val="1E293B"/>
-                </a:solidFill>
-                <a:latin typeface="Arial"/>
-              </a:defRPr>
-            </a:pPr>
-            <a:r>
-              <a:t>Challenge 4: Repository Remote URL Re-alignment</a:t>
-            </a:r>
-          </a:p>
-          <a:p>
-            <a:pPr lvl="1">
-              <a:defRPr sz="1300">
-                <a:solidFill>
-                  <a:srgbClr val="475569"/>
-                </a:solidFill>
-                <a:latin typeface="Arial"/>
-              </a:defRPr>
-            </a:pPr>
-            <a:r>
-              <a:t>• Problem: The git remote target changed to https://github.com/naveen7607/vigneshwara-traders.</a:t>
-            </a:r>
-          </a:p>
-          <a:p>
-            <a:pPr lvl="1">
-              <a:defRPr sz="1300">
-                <a:solidFill>
-                  <a:srgbClr val="475569"/>
-                </a:solidFill>
-                <a:latin typeface="Arial"/>
-              </a:defRPr>
-            </a:pPr>
-            <a:r>
-              <a:t>• What we tried first: Pulled commits normally, but git threw divergent history conflicts.</a:t>
-            </a:r>
-          </a:p>
-          <a:p>
-            <a:pPr lvl="1">
-              <a:defRPr sz="1300">
-                <a:solidFill>
-                  <a:srgbClr val="475569"/>
-                </a:solidFill>
-                <a:latin typeface="Arial"/>
-              </a:defRPr>
-            </a:pPr>
-            <a:r>
-              <a:t>• What we did instead: Changed the remote URL, resolved conflicts, and force-pushed to origin main.</a:t>
-            </a:r>
-          </a:p>
-          <a:p>
-            <a:pPr lvl="1">
-              <a:defRPr sz="1300">
-                <a:solidFill>
-                  <a:srgbClr val="475569"/>
-                </a:solidFill>
-                <a:latin typeface="Arial"/>
-              </a:defRPr>
-            </a:pPr>
-            <a:r>
-              <a:t>• Learning: Aligning git remotes early prevents commit blockages on auto-deployment hooks.</a:t>
+              <a:spcAft>
+                <a:spcPts val="1200"/>
+              </a:spcAft>
+              <a:defRPr b="1" sz="1400">
+                <a:solidFill>
+                  <a:srgbClr val="2DD4BF"/>
+                </a:solidFill>
+              </a:defRPr>
+            </a:pPr>
+            <a:r>
+              <a:t>3. VERCEL DEPLOYMENT BLOCKED</a:t>
+            </a:r>
+          </a:p>
+          <a:p>
+            <a:pPr>
+              <a:spcAft>
+                <a:spcPts val="400"/>
+              </a:spcAft>
+              <a:defRPr sz="1200" b="1">
+                <a:solidFill>
+                  <a:srgbClr val="F8FAFC"/>
+                </a:solidFill>
+              </a:defRPr>
+            </a:pPr>
+            <a:r>
+              <a:t>Problem:</a:t>
+            </a:r>
+          </a:p>
+          <a:p>
+            <a:pPr>
+              <a:spcAft>
+                <a:spcPts val="400"/>
+              </a:spcAft>
+              <a:defRPr sz="1200" b="0">
+                <a:solidFill>
+                  <a:srgbClr val="94A3B8"/>
+                </a:solidFill>
+              </a:defRPr>
+            </a:pPr>
+            <a:r>
+              <a:t>• Vercel builds failed due to npm ERESOLVE peer conflicts.</a:t>
+            </a:r>
+          </a:p>
+          <a:p>
+            <a:pPr>
+              <a:spcAft>
+                <a:spcPts val="400"/>
+              </a:spcAft>
+              <a:defRPr sz="1200" b="1">
+                <a:solidFill>
+                  <a:srgbClr val="F8FAFC"/>
+                </a:solidFill>
+              </a:defRPr>
+            </a:pPr>
+            <a:r>
+              <a:t>What we tried first:</a:t>
+            </a:r>
+          </a:p>
+          <a:p>
+            <a:pPr>
+              <a:spcAft>
+                <a:spcPts val="400"/>
+              </a:spcAft>
+              <a:defRPr sz="1200" b="0">
+                <a:solidFill>
+                  <a:srgbClr val="94A3B8"/>
+                </a:solidFill>
+              </a:defRPr>
+            </a:pPr>
+            <a:r>
+              <a:t>• Ran builds using local scripts with --legacy-peer-deps.</a:t>
+            </a:r>
+          </a:p>
+          <a:p>
+            <a:pPr>
+              <a:spcAft>
+                <a:spcPts val="400"/>
+              </a:spcAft>
+              <a:defRPr sz="1200" b="1">
+                <a:solidFill>
+                  <a:srgbClr val="F8FAFC"/>
+                </a:solidFill>
+              </a:defRPr>
+            </a:pPr>
+            <a:r>
+              <a:t>Why it failed:</a:t>
+            </a:r>
+          </a:p>
+          <a:p>
+            <a:pPr>
+              <a:spcAft>
+                <a:spcPts val="400"/>
+              </a:spcAft>
+              <a:defRPr sz="1200" b="0">
+                <a:solidFill>
+                  <a:srgbClr val="94A3B8"/>
+                </a:solidFill>
+              </a:defRPr>
+            </a:pPr>
+            <a:r>
+              <a:t>• Vercel's builder uses npm ci, which ignores script flags.</a:t>
+            </a:r>
+          </a:p>
+          <a:p>
+            <a:pPr>
+              <a:spcAft>
+                <a:spcPts val="400"/>
+              </a:spcAft>
+              <a:defRPr sz="1200" b="1">
+                <a:solidFill>
+                  <a:srgbClr val="F8FAFC"/>
+                </a:solidFill>
+              </a:defRPr>
+            </a:pPr>
+            <a:r>
+              <a:t>Resolution:</a:t>
+            </a:r>
+          </a:p>
+          <a:p>
+            <a:pPr>
+              <a:spcAft>
+                <a:spcPts val="400"/>
+              </a:spcAft>
+              <a:defRPr sz="1200" b="0">
+                <a:solidFill>
+                  <a:srgbClr val="94A3B8"/>
+                </a:solidFill>
+              </a:defRPr>
+            </a:pPr>
+            <a:r>
+              <a:t>• Added .npmrc rules to client, and upgraded lucide-react.</a:t>
+            </a:r>
+          </a:p>
+        </p:txBody>
+      </p:sp>
+      <p:sp>
+        <p:nvSpPr>
+          <p:cNvPr id="6" name="Rounded Rectangle 5"/>
+          <p:cNvSpPr/>
+          <p:nvPr/>
+        </p:nvSpPr>
+        <p:spPr>
+          <a:xfrm>
+            <a:off x="4754880" y="1371600"/>
+            <a:ext cx="3931920" cy="4754880"/>
+          </a:xfrm>
+          <a:prstGeom prst="roundRect">
+            <a:avLst/>
+          </a:prstGeom>
+          <a:solidFill>
+            <a:srgbClr val="1E293B"/>
+          </a:solidFill>
+          <a:ln w="19050">
+            <a:solidFill>
+              <a:srgbClr val="334155"/>
+            </a:solidFill>
+          </a:ln>
+        </p:spPr>
+        <p:style>
+          <a:lnRef idx="1">
+            <a:schemeClr val="accent1"/>
+          </a:lnRef>
+          <a:fillRef idx="3">
+            <a:schemeClr val="accent1"/>
+          </a:fillRef>
+          <a:effectRef idx="2">
+            <a:schemeClr val="accent1"/>
+          </a:effectRef>
+          <a:fontRef idx="minor">
+            <a:schemeClr val="lt1"/>
+          </a:fontRef>
+        </p:style>
+        <p:txBody>
+          <a:bodyPr rtlCol="0" anchor="ctr"/>
+          <a:lstStyle/>
+          <a:p>
+            <a:pPr algn="ctr"/>
+          </a:p>
+        </p:txBody>
+      </p:sp>
+      <p:sp>
+        <p:nvSpPr>
+          <p:cNvPr id="7" name="TextBox 6"/>
+          <p:cNvSpPr txBox="1"/>
+          <p:nvPr/>
+        </p:nvSpPr>
+        <p:spPr>
+          <a:xfrm>
+            <a:off x="4846320" y="1463040"/>
+            <a:ext cx="3749039" cy="4572000"/>
+          </a:xfrm>
+          <a:prstGeom prst="rect">
+            <a:avLst/>
+          </a:prstGeom>
+          <a:noFill/>
+        </p:spPr>
+        <p:txBody>
+          <a:bodyPr wrap="square">
+            <a:spAutoFit/>
+          </a:bodyPr>
+          <a:lstStyle/>
+          <a:p>
+            <a:pPr>
+              <a:spcAft>
+                <a:spcPts val="1200"/>
+              </a:spcAft>
+              <a:defRPr b="1" sz="1400">
+                <a:solidFill>
+                  <a:srgbClr val="2DD4BF"/>
+                </a:solidFill>
+              </a:defRPr>
+            </a:pPr>
+            <a:r>
+              <a:t>4. GIT REMOTE RE-ALIGNMENT</a:t>
+            </a:r>
+          </a:p>
+          <a:p>
+            <a:pPr>
+              <a:spcAft>
+                <a:spcPts val="400"/>
+              </a:spcAft>
+              <a:defRPr sz="1200" b="1">
+                <a:solidFill>
+                  <a:srgbClr val="F8FAFC"/>
+                </a:solidFill>
+              </a:defRPr>
+            </a:pPr>
+            <a:r>
+              <a:t>Problem:</a:t>
+            </a:r>
+          </a:p>
+          <a:p>
+            <a:pPr>
+              <a:spcAft>
+                <a:spcPts val="400"/>
+              </a:spcAft>
+              <a:defRPr sz="1200" b="0">
+                <a:solidFill>
+                  <a:srgbClr val="94A3B8"/>
+                </a:solidFill>
+              </a:defRPr>
+            </a:pPr>
+            <a:r>
+              <a:t>• The remote URL changed, causing git conflicts.</a:t>
+            </a:r>
+          </a:p>
+          <a:p>
+            <a:pPr>
+              <a:spcAft>
+                <a:spcPts val="400"/>
+              </a:spcAft>
+              <a:defRPr sz="1200" b="1">
+                <a:solidFill>
+                  <a:srgbClr val="F8FAFC"/>
+                </a:solidFill>
+              </a:defRPr>
+            </a:pPr>
+            <a:r>
+              <a:t>What we tried first:</a:t>
+            </a:r>
+          </a:p>
+          <a:p>
+            <a:pPr>
+              <a:spcAft>
+                <a:spcPts val="400"/>
+              </a:spcAft>
+              <a:defRPr sz="1200" b="0">
+                <a:solidFill>
+                  <a:srgbClr val="94A3B8"/>
+                </a:solidFill>
+              </a:defRPr>
+            </a:pPr>
+            <a:r>
+              <a:t>• Tried pulling updates directly from main branch.</a:t>
+            </a:r>
+          </a:p>
+          <a:p>
+            <a:pPr>
+              <a:spcAft>
+                <a:spcPts val="400"/>
+              </a:spcAft>
+              <a:defRPr sz="1200" b="1">
+                <a:solidFill>
+                  <a:srgbClr val="F8FAFC"/>
+                </a:solidFill>
+              </a:defRPr>
+            </a:pPr>
+            <a:r>
+              <a:t>Why it failed:</a:t>
+            </a:r>
+          </a:p>
+          <a:p>
+            <a:pPr>
+              <a:spcAft>
+                <a:spcPts val="400"/>
+              </a:spcAft>
+              <a:defRPr sz="1200" b="0">
+                <a:solidFill>
+                  <a:srgbClr val="94A3B8"/>
+                </a:solidFill>
+              </a:defRPr>
+            </a:pPr>
+            <a:r>
+              <a:t>• Divergent histories threw unresolved conflicts.</a:t>
+            </a:r>
+          </a:p>
+          <a:p>
+            <a:pPr>
+              <a:spcAft>
+                <a:spcPts val="400"/>
+              </a:spcAft>
+              <a:defRPr sz="1200" b="1">
+                <a:solidFill>
+                  <a:srgbClr val="F8FAFC"/>
+                </a:solidFill>
+              </a:defRPr>
+            </a:pPr>
+            <a:r>
+              <a:t>Resolution:</a:t>
+            </a:r>
+          </a:p>
+          <a:p>
+            <a:pPr>
+              <a:spcAft>
+                <a:spcPts val="400"/>
+              </a:spcAft>
+              <a:defRPr sz="1200" b="0">
+                <a:solidFill>
+                  <a:srgbClr val="94A3B8"/>
+                </a:solidFill>
+              </a:defRPr>
+            </a:pPr>
+            <a:r>
+              <a:t>• Reset remote URLs, aligned branches, and force-pushed.</a:t>
             </a:r>
           </a:p>
         </p:txBody>
@@ -4283,7 +5509,7 @@
     <p:bg>
       <p:bgPr>
         <a:solidFill>
-          <a:srgbClr val="F8FAFC"/>
+          <a:srgbClr val="0F172A"/>
         </a:solidFill>
         <a:effectLst/>
       </p:bgPr>
@@ -4320,7 +5546,7 @@
             <a:pPr>
               <a:defRPr sz="2200" b="1">
                 <a:solidFill>
-                  <a:srgbClr val="0B0F19"/>
+                  <a:srgbClr val="2DD4BF"/>
                 </a:solidFill>
                 <a:latin typeface="Arial"/>
               </a:defRPr>
@@ -4333,14 +5559,102 @@
       </p:sp>
       <p:sp>
         <p:nvSpPr>
-          <p:cNvPr id="3" name="TextBox 2"/>
+          <p:cNvPr id="3" name="Rectangle 2"/>
+          <p:cNvSpPr/>
+          <p:nvPr/>
+        </p:nvSpPr>
+        <p:spPr>
+          <a:xfrm>
+            <a:off x="457200" y="914400"/>
+            <a:ext cx="8229600" cy="25400"/>
+          </a:xfrm>
+          <a:prstGeom prst="rect">
+            <a:avLst/>
+          </a:prstGeom>
+          <a:solidFill>
+            <a:srgbClr val="3B82F6"/>
+          </a:solidFill>
+          <a:ln>
+            <a:noFill/>
+          </a:ln>
+        </p:spPr>
+        <p:style>
+          <a:lnRef idx="1">
+            <a:schemeClr val="accent1"/>
+          </a:lnRef>
+          <a:fillRef idx="3">
+            <a:schemeClr val="accent1"/>
+          </a:fillRef>
+          <a:effectRef idx="2">
+            <a:schemeClr val="accent1"/>
+          </a:effectRef>
+          <a:fontRef idx="minor">
+            <a:schemeClr val="lt1"/>
+          </a:fontRef>
+        </p:style>
+        <p:txBody>
+          <a:bodyPr rtlCol="0" anchor="ctr"/>
+          <a:lstStyle/>
+          <a:p>
+            <a:pPr algn="ctr"/>
+          </a:p>
+        </p:txBody>
+      </p:sp>
+      <p:sp>
+        <p:nvSpPr>
+          <p:cNvPr id="4" name="Rounded Rectangle 3"/>
+          <p:cNvSpPr/>
+          <p:nvPr/>
+        </p:nvSpPr>
+        <p:spPr>
+          <a:xfrm>
+            <a:off x="457200" y="1371600"/>
+            <a:ext cx="3931920" cy="4754880"/>
+          </a:xfrm>
+          <a:prstGeom prst="roundRect">
+            <a:avLst/>
+          </a:prstGeom>
+          <a:solidFill>
+            <a:srgbClr val="1E293B"/>
+          </a:solidFill>
+          <a:ln w="19050">
+            <a:solidFill>
+              <a:srgbClr val="334155"/>
+            </a:solidFill>
+          </a:ln>
+        </p:spPr>
+        <p:style>
+          <a:lnRef idx="1">
+            <a:schemeClr val="accent1"/>
+          </a:lnRef>
+          <a:fillRef idx="3">
+            <a:schemeClr val="accent1"/>
+          </a:fillRef>
+          <a:effectRef idx="2">
+            <a:schemeClr val="accent1"/>
+          </a:effectRef>
+          <a:fontRef idx="minor">
+            <a:schemeClr val="lt1"/>
+          </a:fontRef>
+        </p:style>
+        <p:txBody>
+          <a:bodyPr rtlCol="0" anchor="ctr"/>
+          <a:lstStyle/>
+          <a:p>
+            <a:pPr algn="ctr"/>
+          </a:p>
+        </p:txBody>
+      </p:sp>
+      <p:sp>
+        <p:nvSpPr>
+          <p:cNvPr id="5" name="TextBox 4"/>
           <p:cNvSpPr txBox="1"/>
           <p:nvPr/>
         </p:nvSpPr>
         <p:spPr>
           <a:xfrm>
-            <a:off x="457200" y="1188720"/>
-            <a:ext cx="8229600" cy="5303520"/>
+            <a:off x="548640" y="1463040"/>
+            <a:ext cx="3749039" cy="4572000"/>
           </a:xfrm>
           <a:prstGeom prst="rect">
             <a:avLst/>
@@ -4354,157 +5668,235 @@
           <a:lstStyle/>
           <a:p>
             <a:pPr>
-              <a:spcBef>
+              <a:spcAft>
+                <a:spcPts val="1200"/>
+              </a:spcAft>
+              <a:defRPr b="1" sz="1400">
+                <a:solidFill>
+                  <a:srgbClr val="2DD4BF"/>
+                </a:solidFill>
+              </a:defRPr>
+            </a:pPr>
+            <a:r>
+              <a:t>VERIFICATION METHODS</a:t>
+            </a:r>
+          </a:p>
+          <a:p>
+            <a:pPr>
+              <a:spcAft>
                 <a:spcPts val="800"/>
-              </a:spcBef>
-              <a:defRPr sz="1400" b="1">
-                <a:solidFill>
-                  <a:srgbClr val="1E293B"/>
-                </a:solidFill>
-                <a:latin typeface="Arial"/>
-              </a:defRPr>
-            </a:pPr>
-            <a:r>
-              <a:t>Final testing results demonstrating system completeness:</a:t>
-            </a:r>
-          </a:p>
-          <a:p>
-            <a:pPr>
-              <a:spcBef>
+              </a:spcAft>
+              <a:defRPr sz="1200">
+                <a:solidFill>
+                  <a:srgbClr val="F8FAFC"/>
+                </a:solidFill>
+              </a:defRPr>
+            </a:pPr>
+            <a:r>
+              <a:t>• REST API: Postman test suite to verify JWT authentication endpoint returns.</a:t>
+            </a:r>
+          </a:p>
+          <a:p>
+            <a:pPr>
+              <a:spcAft>
                 <a:spcPts val="800"/>
-              </a:spcBef>
-              <a:defRPr sz="1400" b="1">
-                <a:solidFill>
-                  <a:srgbClr val="1E293B"/>
-                </a:solidFill>
-                <a:latin typeface="Arial"/>
-              </a:defRPr>
-            </a:pPr>
-            <a:r>
-              <a:t>Functional Verification Methods:</a:t>
-            </a:r>
-          </a:p>
-          <a:p>
-            <a:pPr lvl="1">
-              <a:defRPr sz="1300">
-                <a:solidFill>
-                  <a:srgbClr val="475569"/>
-                </a:solidFill>
-                <a:latin typeface="Arial"/>
-              </a:defRPr>
-            </a:pPr>
-            <a:r>
-              <a:t>• REST API Testing: Tested endpoints using Postman to verify JWT authentication validations.</a:t>
-            </a:r>
-          </a:p>
-          <a:p>
-            <a:pPr lvl="1">
-              <a:defRPr sz="1300">
-                <a:solidFill>
-                  <a:srgbClr val="475569"/>
-                </a:solidFill>
-                <a:latin typeface="Arial"/>
-              </a:defRPr>
-            </a:pPr>
-            <a:r>
-              <a:t>• Frontend Build Verification: Verified client-side assets build with no warnings via Vite compiler.</a:t>
-            </a:r>
-          </a:p>
-          <a:p>
-            <a:pPr lvl="1">
-              <a:defRPr sz="1300">
-                <a:solidFill>
-                  <a:srgbClr val="475569"/>
-                </a:solidFill>
-                <a:latin typeface="Arial"/>
-              </a:defRPr>
-            </a:pPr>
-            <a:r>
-              <a:t>• Integration Flow Checks: Validated user-to-admin inquiries pipeline end-to-end.</a:t>
-            </a:r>
-          </a:p>
-          <a:p>
-            <a:pPr>
-              <a:spcBef>
+              </a:spcAft>
+              <a:defRPr sz="1200">
+                <a:solidFill>
+                  <a:srgbClr val="F8FAFC"/>
+                </a:solidFill>
+              </a:defRPr>
+            </a:pPr>
+            <a:r>
+              <a:t>• Production builds: Vite compiler ran checks to ensure zero warnings.</a:t>
+            </a:r>
+          </a:p>
+          <a:p>
+            <a:pPr>
+              <a:spcAft>
                 <a:spcPts val="800"/>
-              </a:spcBef>
-              <a:defRPr sz="1400" b="1">
-                <a:solidFill>
-                  <a:srgbClr val="1E293B"/>
-                </a:solidFill>
-                <a:latin typeface="Arial"/>
-              </a:defRPr>
-            </a:pPr>
-            <a:r>
-              <a:t>Bugs Found &amp; Resolved:</a:t>
-            </a:r>
-          </a:p>
-          <a:p>
-            <a:pPr lvl="1">
-              <a:defRPr sz="1300">
-                <a:solidFill>
-                  <a:srgbClr val="475569"/>
-                </a:solidFill>
-                <a:latin typeface="Arial"/>
-              </a:defRPr>
-            </a:pPr>
-            <a:r>
-              <a:t>• Authentication Bug: Admin dashboard failed to fetch subscribers list upon reload.</a:t>
-            </a:r>
-          </a:p>
-          <a:p>
-            <a:pPr lvl="1">
-              <a:defRPr sz="1300">
-                <a:solidFill>
-                  <a:srgbClr val="475569"/>
-                </a:solidFill>
-                <a:latin typeface="Arial"/>
-              </a:defRPr>
-            </a:pPr>
-            <a:r>
-              <a:t>  - Fix: Configured axios client to include credentials flag (`withCredentials: true`) to pass cookies.</a:t>
-            </a:r>
-          </a:p>
-          <a:p>
-            <a:pPr lvl="1">
-              <a:defRPr sz="1300">
-                <a:solidFill>
-                  <a:srgbClr val="475569"/>
-                </a:solidFill>
-                <a:latin typeface="Arial"/>
-              </a:defRPr>
-            </a:pPr>
-            <a:r>
-              <a:t>• Alert Routing Bug: Price drops were shown as hikes in notification texts.</a:t>
-            </a:r>
-          </a:p>
-          <a:p>
-            <a:pPr lvl="1">
-              <a:defRPr sz="1300">
-                <a:solidFill>
-                  <a:srgbClr val="475569"/>
-                </a:solidFill>
-                <a:latin typeface="Arial"/>
-              </a:defRPr>
-            </a:pPr>
-            <a:r>
-              <a:t>  - Fix: Corrected comparison checks mapping the new rate against the preceding historic value.</a:t>
-            </a:r>
-          </a:p>
-          <a:p>
-            <a:pPr>
-              <a:spcBef>
-                <a:spcPts val="800"/>
-              </a:spcBef>
-              <a:defRPr sz="1400" b="1">
-                <a:solidFill>
-                  <a:srgbClr val="1E293B"/>
-                </a:solidFill>
-                <a:latin typeface="Arial"/>
-              </a:defRPr>
-            </a:pPr>
-            <a:r>
-              <a:t>Overall System Status: 100% stable in production.</a:t>
+              </a:spcAft>
+              <a:defRPr sz="1200">
+                <a:solidFill>
+                  <a:srgbClr val="F8FAFC"/>
+                </a:solidFill>
+              </a:defRPr>
+            </a:pPr>
+            <a:r>
+              <a:t>• UI validation: Manual layout checks verified responsive alignments.</a:t>
+            </a:r>
+          </a:p>
+        </p:txBody>
+      </p:sp>
+      <p:sp>
+        <p:nvSpPr>
+          <p:cNvPr id="6" name="Rounded Rectangle 5"/>
+          <p:cNvSpPr/>
+          <p:nvPr/>
+        </p:nvSpPr>
+        <p:spPr>
+          <a:xfrm>
+            <a:off x="4754880" y="1371600"/>
+            <a:ext cx="3931920" cy="4754880"/>
+          </a:xfrm>
+          <a:prstGeom prst="roundRect">
+            <a:avLst/>
+          </a:prstGeom>
+          <a:solidFill>
+            <a:srgbClr val="1E293B"/>
+          </a:solidFill>
+          <a:ln w="19050">
+            <a:solidFill>
+              <a:srgbClr val="334155"/>
+            </a:solidFill>
+          </a:ln>
+        </p:spPr>
+        <p:style>
+          <a:lnRef idx="1">
+            <a:schemeClr val="accent1"/>
+          </a:lnRef>
+          <a:fillRef idx="3">
+            <a:schemeClr val="accent1"/>
+          </a:fillRef>
+          <a:effectRef idx="2">
+            <a:schemeClr val="accent1"/>
+          </a:effectRef>
+          <a:fontRef idx="minor">
+            <a:schemeClr val="lt1"/>
+          </a:fontRef>
+        </p:style>
+        <p:txBody>
+          <a:bodyPr rtlCol="0" anchor="ctr"/>
+          <a:lstStyle/>
+          <a:p>
+            <a:pPr algn="ctr"/>
+          </a:p>
+        </p:txBody>
+      </p:sp>
+      <p:sp>
+        <p:nvSpPr>
+          <p:cNvPr id="7" name="TextBox 6"/>
+          <p:cNvSpPr txBox="1"/>
+          <p:nvPr/>
+        </p:nvSpPr>
+        <p:spPr>
+          <a:xfrm>
+            <a:off x="4846320" y="1463040"/>
+            <a:ext cx="3749039" cy="4572000"/>
+          </a:xfrm>
+          <a:prstGeom prst="rect">
+            <a:avLst/>
+          </a:prstGeom>
+          <a:noFill/>
+        </p:spPr>
+        <p:txBody>
+          <a:bodyPr wrap="square">
+            <a:spAutoFit/>
+          </a:bodyPr>
+          <a:lstStyle/>
+          <a:p>
+            <a:pPr>
+              <a:spcAft>
+                <a:spcPts val="1200"/>
+              </a:spcAft>
+              <a:defRPr b="1" sz="1400">
+                <a:solidFill>
+                  <a:srgbClr val="2DD4BF"/>
+                </a:solidFill>
+              </a:defRPr>
+            </a:pPr>
+            <a:r>
+              <a:t>RESOLVED BUGS LOG</a:t>
+            </a:r>
+          </a:p>
+          <a:p>
+            <a:pPr>
+              <a:spcAft>
+                <a:spcPts val="600"/>
+              </a:spcAft>
+              <a:defRPr sz="1100">
+                <a:solidFill>
+                  <a:srgbClr val="F8FAFC"/>
+                </a:solidFill>
+              </a:defRPr>
+            </a:pPr>
+            <a:r>
+              <a:t>• Axios credentials bug: Login checks failed on page reloads.</a:t>
+            </a:r>
+          </a:p>
+          <a:p>
+            <a:pPr>
+              <a:spcAft>
+                <a:spcPts val="600"/>
+              </a:spcAft>
+              <a:defRPr sz="1100">
+                <a:solidFill>
+                  <a:srgbClr val="94A3B8"/>
+                </a:solidFill>
+              </a:defRPr>
+            </a:pPr>
+            <a:r>
+              <a:t>  - Resolution: Added withCredentials=true to pass secure HTTP-only cookies.</a:t>
+            </a:r>
+          </a:p>
+          <a:p>
+            <a:pPr>
+              <a:spcAft>
+                <a:spcPts val="600"/>
+              </a:spcAft>
+              <a:defRPr sz="1100">
+                <a:solidFill>
+                  <a:srgbClr val="F8FAFC"/>
+                </a:solidFill>
+              </a:defRPr>
+            </a:pPr>
+            <a:r>
+              <a:t>• Alert trend bug: New price hikes rendered downward trends.</a:t>
+            </a:r>
+          </a:p>
+          <a:p>
+            <a:pPr>
+              <a:spcAft>
+                <a:spcPts val="600"/>
+              </a:spcAft>
+              <a:defRPr sz="1100">
+                <a:solidFill>
+                  <a:srgbClr val="94A3B8"/>
+                </a:solidFill>
+              </a:defRPr>
+            </a:pPr>
+            <a:r>
+              <a:t>  - Resolution: Corrected conditional statements evaluating currentPrice against priceHistory arrays.</a:t>
+            </a:r>
+          </a:p>
+          <a:p>
+            <a:pPr>
+              <a:spcAft>
+                <a:spcPts val="600"/>
+              </a:spcAft>
+              <a:defRPr sz="1100">
+                <a:solidFill>
+                  <a:srgbClr val="F8FAFC"/>
+                </a:solidFill>
+              </a:defRPr>
+            </a:pPr>
+            <a:r>
+              <a:t>• Node path error: Wildcard routings crashed on Express 5.</a:t>
+            </a:r>
+          </a:p>
+          <a:p>
+            <a:pPr>
+              <a:spcAft>
+                <a:spcPts val="600"/>
+              </a:spcAft>
+              <a:defRPr sz="1100">
+                <a:solidFill>
+                  <a:srgbClr val="94A3B8"/>
+                </a:solidFill>
+              </a:defRPr>
+            </a:pPr>
+            <a:r>
+              <a:t>  - Resolution: Custom app.use() middleware to route request endpoints.</a:t>
             </a:r>
           </a:p>
         </p:txBody>
@@ -4523,7 +5915,7 @@
     <p:bg>
       <p:bgPr>
         <a:solidFill>
-          <a:srgbClr val="F8FAFC"/>
+          <a:srgbClr val="0F172A"/>
         </a:solidFill>
         <a:effectLst/>
       </p:bgPr>
@@ -4560,7 +5952,7 @@
             <a:pPr>
               <a:defRPr sz="2200" b="1">
                 <a:solidFill>
-                  <a:srgbClr val="0B0F19"/>
+                  <a:srgbClr val="2DD4BF"/>
                 </a:solidFill>
                 <a:latin typeface="Arial"/>
               </a:defRPr>
@@ -4573,14 +5965,102 @@
       </p:sp>
       <p:sp>
         <p:nvSpPr>
-          <p:cNvPr id="3" name="TextBox 2"/>
+          <p:cNvPr id="3" name="Rectangle 2"/>
+          <p:cNvSpPr/>
+          <p:nvPr/>
+        </p:nvSpPr>
+        <p:spPr>
+          <a:xfrm>
+            <a:off x="457200" y="914400"/>
+            <a:ext cx="8229600" cy="25400"/>
+          </a:xfrm>
+          <a:prstGeom prst="rect">
+            <a:avLst/>
+          </a:prstGeom>
+          <a:solidFill>
+            <a:srgbClr val="3B82F6"/>
+          </a:solidFill>
+          <a:ln>
+            <a:noFill/>
+          </a:ln>
+        </p:spPr>
+        <p:style>
+          <a:lnRef idx="1">
+            <a:schemeClr val="accent1"/>
+          </a:lnRef>
+          <a:fillRef idx="3">
+            <a:schemeClr val="accent1"/>
+          </a:fillRef>
+          <a:effectRef idx="2">
+            <a:schemeClr val="accent1"/>
+          </a:effectRef>
+          <a:fontRef idx="minor">
+            <a:schemeClr val="lt1"/>
+          </a:fontRef>
+        </p:style>
+        <p:txBody>
+          <a:bodyPr rtlCol="0" anchor="ctr"/>
+          <a:lstStyle/>
+          <a:p>
+            <a:pPr algn="ctr"/>
+          </a:p>
+        </p:txBody>
+      </p:sp>
+      <p:sp>
+        <p:nvSpPr>
+          <p:cNvPr id="4" name="Rounded Rectangle 3"/>
+          <p:cNvSpPr/>
+          <p:nvPr/>
+        </p:nvSpPr>
+        <p:spPr>
+          <a:xfrm>
+            <a:off x="457200" y="1371600"/>
+            <a:ext cx="2560320" cy="4754880"/>
+          </a:xfrm>
+          <a:prstGeom prst="roundRect">
+            <a:avLst/>
+          </a:prstGeom>
+          <a:solidFill>
+            <a:srgbClr val="1E293B"/>
+          </a:solidFill>
+          <a:ln w="19050">
+            <a:solidFill>
+              <a:srgbClr val="334155"/>
+            </a:solidFill>
+          </a:ln>
+        </p:spPr>
+        <p:style>
+          <a:lnRef idx="1">
+            <a:schemeClr val="accent1"/>
+          </a:lnRef>
+          <a:fillRef idx="3">
+            <a:schemeClr val="accent1"/>
+          </a:fillRef>
+          <a:effectRef idx="2">
+            <a:schemeClr val="accent1"/>
+          </a:effectRef>
+          <a:fontRef idx="minor">
+            <a:schemeClr val="lt1"/>
+          </a:fontRef>
+        </p:style>
+        <p:txBody>
+          <a:bodyPr rtlCol="0" anchor="ctr"/>
+          <a:lstStyle/>
+          <a:p>
+            <a:pPr algn="ctr"/>
+          </a:p>
+        </p:txBody>
+      </p:sp>
+      <p:sp>
+        <p:nvSpPr>
+          <p:cNvPr id="5" name="TextBox 4"/>
           <p:cNvSpPr txBox="1"/>
           <p:nvPr/>
         </p:nvSpPr>
         <p:spPr>
           <a:xfrm>
-            <a:off x="457200" y="1188720"/>
-            <a:ext cx="8229600" cy="5303520"/>
+            <a:off x="548640" y="1463040"/>
+            <a:ext cx="2377440" cy="4572000"/>
           </a:xfrm>
           <a:prstGeom prst="rect">
             <a:avLst/>
@@ -4593,158 +6073,409 @@
           </a:bodyPr>
           <a:lstStyle/>
           <a:p>
-            <a:pPr>
-              <a:spcBef>
-                <a:spcPts val="800"/>
-              </a:spcBef>
-              <a:defRPr sz="1400" b="1">
-                <a:solidFill>
-                  <a:srgbClr val="1E293B"/>
-                </a:solidFill>
-                <a:latin typeface="Arial"/>
-              </a:defRPr>
-            </a:pPr>
-            <a:r>
-              <a:t>Professional growth outcomes, boundaries, and roadmap for future iterations:</a:t>
-            </a:r>
-          </a:p>
-          <a:p>
-            <a:pPr>
-              <a:spcBef>
-                <a:spcPts val="800"/>
-              </a:spcBef>
-              <a:defRPr sz="1400" b="1">
-                <a:solidFill>
-                  <a:srgbClr val="1E293B"/>
-                </a:solidFill>
-                <a:latin typeface="Arial"/>
-              </a:defRPr>
-            </a:pPr>
-            <a:r>
-              <a:t>Technical &amp; Professional Learnings:</a:t>
-            </a:r>
-          </a:p>
-          <a:p>
-            <a:pPr lvl="1">
-              <a:defRPr sz="1300">
-                <a:solidFill>
-                  <a:srgbClr val="475569"/>
-                </a:solidFill>
-                <a:latin typeface="Arial"/>
-              </a:defRPr>
-            </a:pPr>
-            <a:r>
-              <a:t>• Decoupled Deployments: Mastered proxying client requests across distinct hosting networks.</a:t>
-            </a:r>
-          </a:p>
-          <a:p>
-            <a:pPr lvl="1">
-              <a:defRPr sz="1300">
-                <a:solidFill>
-                  <a:srgbClr val="475569"/>
-                </a:solidFill>
-                <a:latin typeface="Arial"/>
-              </a:defRPr>
-            </a:pPr>
-            <a:r>
-              <a:t>• Version Upgrades: Experienced migration patterns in Express 5 and React 19 libraries.</a:t>
-            </a:r>
-          </a:p>
-          <a:p>
-            <a:pPr lvl="1">
-              <a:defRPr sz="1300">
-                <a:solidFill>
-                  <a:srgbClr val="475569"/>
-                </a:solidFill>
-                <a:latin typeface="Arial"/>
-              </a:defRPr>
-            </a:pPr>
-            <a:r>
-              <a:t>• Agile Response: Handled scope adjustments like removing scheduled syncs for manual admin controls.</a:t>
-            </a:r>
-          </a:p>
-          <a:p>
-            <a:pPr>
-              <a:spcBef>
-                <a:spcPts val="800"/>
-              </a:spcBef>
-              <a:defRPr sz="1400" b="1">
-                <a:solidFill>
-                  <a:srgbClr val="1E293B"/>
-                </a:solidFill>
-                <a:latin typeface="Arial"/>
-              </a:defRPr>
-            </a:pPr>
-            <a:r>
-              <a:t>System Limitations (Current Version):</a:t>
-            </a:r>
-          </a:p>
-          <a:p>
-            <a:pPr lvl="1">
-              <a:defRPr sz="1300">
-                <a:solidFill>
-                  <a:srgbClr val="475569"/>
-                </a:solidFill>
-                <a:latin typeface="Arial"/>
-              </a:defRPr>
-            </a:pPr>
-            <a:r>
-              <a:t>• Ephemeral Files: Render's free tier clears local image uploads upon instance restarts.</a:t>
-            </a:r>
-          </a:p>
-          <a:p>
-            <a:pPr lvl="1">
-              <a:defRPr sz="1300">
-                <a:solidFill>
-                  <a:srgbClr val="475569"/>
-                </a:solidFill>
-                <a:latin typeface="Arial"/>
-              </a:defRPr>
-            </a:pPr>
-            <a:r>
-              <a:t>• Alert Channels: WhatsApp notifications require manual admin dispatch triggers.</a:t>
-            </a:r>
-          </a:p>
-          <a:p>
-            <a:pPr>
-              <a:spcBef>
-                <a:spcPts val="800"/>
-              </a:spcBef>
-              <a:defRPr sz="1400" b="1">
-                <a:solidFill>
-                  <a:srgbClr val="1E293B"/>
-                </a:solidFill>
-                <a:latin typeface="Arial"/>
-              </a:defRPr>
-            </a:pPr>
-            <a:r>
-              <a:t>Future Scope Roadmap:</a:t>
-            </a:r>
-          </a:p>
-          <a:p>
-            <a:pPr lvl="1">
-              <a:defRPr sz="1300">
-                <a:solidFill>
-                  <a:srgbClr val="475569"/>
-                </a:solidFill>
-                <a:latin typeface="Arial"/>
-              </a:defRPr>
-            </a:pPr>
-            <a:r>
-              <a:t>• Cloud Image Storage: Integrate Cloudinary or Amazon S3 buckets for product image persistence.</a:t>
-            </a:r>
-          </a:p>
-          <a:p>
-            <a:pPr lvl="1">
-              <a:defRPr sz="1300">
-                <a:solidFill>
-                  <a:srgbClr val="475569"/>
-                </a:solidFill>
-                <a:latin typeface="Arial"/>
-              </a:defRPr>
-            </a:pPr>
-            <a:r>
-              <a:t>• Historical Analytics: Render pricing fluctuation graphs using Chart.js or Recharts.</a:t>
+            <a:pPr algn="ctr">
+              <a:spcAft>
+                <a:spcPts val="1200"/>
+              </a:spcAft>
+              <a:defRPr b="1" sz="1400">
+                <a:solidFill>
+                  <a:srgbClr val="2DD4BF"/>
+                </a:solidFill>
+              </a:defRPr>
+            </a:pPr>
+            <a:r>
+              <a:t>LEARNINGS</a:t>
+            </a:r>
+          </a:p>
+          <a:p>
+            <a:pPr>
+              <a:spcAft>
+                <a:spcPts val="600"/>
+              </a:spcAft>
+              <a:defRPr sz="1200" b="1">
+                <a:solidFill>
+                  <a:srgbClr val="F8FAFC"/>
+                </a:solidFill>
+              </a:defRPr>
+            </a:pPr>
+            <a:r>
+              <a:t>Technical Growth:</a:t>
+            </a:r>
+          </a:p>
+          <a:p>
+            <a:pPr>
+              <a:spcAft>
+                <a:spcPts val="600"/>
+              </a:spcAft>
+              <a:defRPr sz="1200" b="0">
+                <a:solidFill>
+                  <a:srgbClr val="F8FAFC"/>
+                </a:solidFill>
+              </a:defRPr>
+            </a:pPr>
+            <a:r>
+              <a:t>• Mastered decoupled monorepos.</a:t>
+            </a:r>
+          </a:p>
+          <a:p>
+            <a:pPr>
+              <a:spcAft>
+                <a:spcPts val="600"/>
+              </a:spcAft>
+              <a:defRPr sz="1200" b="0">
+                <a:solidFill>
+                  <a:srgbClr val="F8FAFC"/>
+                </a:solidFill>
+              </a:defRPr>
+            </a:pPr>
+            <a:r>
+              <a:t>• Managed updates in Express 5 and React 19.</a:t>
+            </a:r>
+          </a:p>
+          <a:p>
+            <a:pPr>
+              <a:spcAft>
+                <a:spcPts val="600"/>
+              </a:spcAft>
+              <a:defRPr sz="1200" b="1">
+                <a:solidFill>
+                  <a:srgbClr val="F8FAFC"/>
+                </a:solidFill>
+              </a:defRPr>
+            </a:pPr>
+            <a:r>
+              <a:t>Professional growth:</a:t>
+            </a:r>
+          </a:p>
+          <a:p>
+            <a:pPr>
+              <a:spcAft>
+                <a:spcPts val="600"/>
+              </a:spcAft>
+              <a:defRPr sz="1200" b="0">
+                <a:solidFill>
+                  <a:srgbClr val="F8FAFC"/>
+                </a:solidFill>
+              </a:defRPr>
+            </a:pPr>
+            <a:r>
+              <a:t>• Learned to balance customer priorities, such as manual control overrides.</a:t>
+            </a:r>
+          </a:p>
+        </p:txBody>
+      </p:sp>
+      <p:sp>
+        <p:nvSpPr>
+          <p:cNvPr id="6" name="Rounded Rectangle 5"/>
+          <p:cNvSpPr/>
+          <p:nvPr/>
+        </p:nvSpPr>
+        <p:spPr>
+          <a:xfrm>
+            <a:off x="3291840" y="1371600"/>
+            <a:ext cx="2560320" cy="4754880"/>
+          </a:xfrm>
+          <a:prstGeom prst="roundRect">
+            <a:avLst/>
+          </a:prstGeom>
+          <a:solidFill>
+            <a:srgbClr val="1E293B"/>
+          </a:solidFill>
+          <a:ln w="19050">
+            <a:solidFill>
+              <a:srgbClr val="334155"/>
+            </a:solidFill>
+          </a:ln>
+        </p:spPr>
+        <p:style>
+          <a:lnRef idx="1">
+            <a:schemeClr val="accent1"/>
+          </a:lnRef>
+          <a:fillRef idx="3">
+            <a:schemeClr val="accent1"/>
+          </a:fillRef>
+          <a:effectRef idx="2">
+            <a:schemeClr val="accent1"/>
+          </a:effectRef>
+          <a:fontRef idx="minor">
+            <a:schemeClr val="lt1"/>
+          </a:fontRef>
+        </p:style>
+        <p:txBody>
+          <a:bodyPr rtlCol="0" anchor="ctr"/>
+          <a:lstStyle/>
+          <a:p>
+            <a:pPr algn="ctr"/>
+          </a:p>
+        </p:txBody>
+      </p:sp>
+      <p:sp>
+        <p:nvSpPr>
+          <p:cNvPr id="7" name="TextBox 6"/>
+          <p:cNvSpPr txBox="1"/>
+          <p:nvPr/>
+        </p:nvSpPr>
+        <p:spPr>
+          <a:xfrm>
+            <a:off x="3383280" y="1463040"/>
+            <a:ext cx="2377440" cy="4572000"/>
+          </a:xfrm>
+          <a:prstGeom prst="rect">
+            <a:avLst/>
+          </a:prstGeom>
+          <a:noFill/>
+        </p:spPr>
+        <p:txBody>
+          <a:bodyPr wrap="square">
+            <a:spAutoFit/>
+          </a:bodyPr>
+          <a:lstStyle/>
+          <a:p>
+            <a:pPr algn="ctr">
+              <a:spcAft>
+                <a:spcPts val="1200"/>
+              </a:spcAft>
+              <a:defRPr b="1" sz="1400">
+                <a:solidFill>
+                  <a:srgbClr val="2DD4BF"/>
+                </a:solidFill>
+              </a:defRPr>
+            </a:pPr>
+            <a:r>
+              <a:t>LIMITATIONS</a:t>
+            </a:r>
+          </a:p>
+          <a:p>
+            <a:pPr>
+              <a:spcAft>
+                <a:spcPts val="600"/>
+              </a:spcAft>
+              <a:defRPr sz="1200" b="1">
+                <a:solidFill>
+                  <a:srgbClr val="F8FAFC"/>
+                </a:solidFill>
+              </a:defRPr>
+            </a:pPr>
+            <a:r>
+              <a:t>System Boundaries:</a:t>
+            </a:r>
+          </a:p>
+          <a:p>
+            <a:pPr>
+              <a:spcAft>
+                <a:spcPts val="600"/>
+              </a:spcAft>
+              <a:defRPr sz="1200" b="1">
+                <a:solidFill>
+                  <a:srgbClr val="F8FAFC"/>
+                </a:solidFill>
+              </a:defRPr>
+            </a:pPr>
+            <a:r>
+              <a:t>• Ephemeral filesystem:</a:t>
+            </a:r>
+          </a:p>
+          <a:p>
+            <a:pPr>
+              <a:spcAft>
+                <a:spcPts val="600"/>
+              </a:spcAft>
+              <a:defRPr sz="1200" b="0">
+                <a:solidFill>
+                  <a:srgbClr val="94A3B8"/>
+                </a:solidFill>
+              </a:defRPr>
+            </a:pPr>
+            <a:r>
+              <a:t>  - Render's instance resets clear local image files on restarts.</a:t>
+            </a:r>
+          </a:p>
+          <a:p>
+            <a:pPr>
+              <a:spcAft>
+                <a:spcPts val="600"/>
+              </a:spcAft>
+              <a:defRPr sz="1200" b="1">
+                <a:solidFill>
+                  <a:srgbClr val="F8FAFC"/>
+                </a:solidFill>
+              </a:defRPr>
+            </a:pPr>
+            <a:r>
+              <a:t>• Trigger controls:</a:t>
+            </a:r>
+          </a:p>
+          <a:p>
+            <a:pPr>
+              <a:spcAft>
+                <a:spcPts val="600"/>
+              </a:spcAft>
+              <a:defRPr sz="1200" b="0">
+                <a:solidFill>
+                  <a:srgbClr val="94A3B8"/>
+                </a:solidFill>
+              </a:defRPr>
+            </a:pPr>
+            <a:r>
+              <a:t>  - WhatsApp alerts require manual administrator activations.</a:t>
+            </a:r>
+          </a:p>
+        </p:txBody>
+      </p:sp>
+      <p:sp>
+        <p:nvSpPr>
+          <p:cNvPr id="8" name="Rounded Rectangle 7"/>
+          <p:cNvSpPr/>
+          <p:nvPr/>
+        </p:nvSpPr>
+        <p:spPr>
+          <a:xfrm>
+            <a:off x="6126480" y="1371600"/>
+            <a:ext cx="2560320" cy="4754880"/>
+          </a:xfrm>
+          <a:prstGeom prst="roundRect">
+            <a:avLst/>
+          </a:prstGeom>
+          <a:solidFill>
+            <a:srgbClr val="1E293B"/>
+          </a:solidFill>
+          <a:ln w="19050">
+            <a:solidFill>
+              <a:srgbClr val="334155"/>
+            </a:solidFill>
+          </a:ln>
+        </p:spPr>
+        <p:style>
+          <a:lnRef idx="1">
+            <a:schemeClr val="accent1"/>
+          </a:lnRef>
+          <a:fillRef idx="3">
+            <a:schemeClr val="accent1"/>
+          </a:fillRef>
+          <a:effectRef idx="2">
+            <a:schemeClr val="accent1"/>
+          </a:effectRef>
+          <a:fontRef idx="minor">
+            <a:schemeClr val="lt1"/>
+          </a:fontRef>
+        </p:style>
+        <p:txBody>
+          <a:bodyPr rtlCol="0" anchor="ctr"/>
+          <a:lstStyle/>
+          <a:p>
+            <a:pPr algn="ctr"/>
+          </a:p>
+        </p:txBody>
+      </p:sp>
+      <p:sp>
+        <p:nvSpPr>
+          <p:cNvPr id="9" name="TextBox 8"/>
+          <p:cNvSpPr txBox="1"/>
+          <p:nvPr/>
+        </p:nvSpPr>
+        <p:spPr>
+          <a:xfrm>
+            <a:off x="6217920" y="1463040"/>
+            <a:ext cx="2377440" cy="4572000"/>
+          </a:xfrm>
+          <a:prstGeom prst="rect">
+            <a:avLst/>
+          </a:prstGeom>
+          <a:noFill/>
+        </p:spPr>
+        <p:txBody>
+          <a:bodyPr wrap="square">
+            <a:spAutoFit/>
+          </a:bodyPr>
+          <a:lstStyle/>
+          <a:p>
+            <a:pPr algn="ctr">
+              <a:spcAft>
+                <a:spcPts val="1200"/>
+              </a:spcAft>
+              <a:defRPr b="1" sz="1400">
+                <a:solidFill>
+                  <a:srgbClr val="2DD4BF"/>
+                </a:solidFill>
+              </a:defRPr>
+            </a:pPr>
+            <a:r>
+              <a:t>FUTURE SCOPE</a:t>
+            </a:r>
+          </a:p>
+          <a:p>
+            <a:pPr>
+              <a:spcAft>
+                <a:spcPts val="600"/>
+              </a:spcAft>
+              <a:defRPr sz="1200" b="1">
+                <a:solidFill>
+                  <a:srgbClr val="F8FAFC"/>
+                </a:solidFill>
+              </a:defRPr>
+            </a:pPr>
+            <a:r>
+              <a:t>Roadmap Upgrades:</a:t>
+            </a:r>
+          </a:p>
+          <a:p>
+            <a:pPr>
+              <a:spcAft>
+                <a:spcPts val="600"/>
+              </a:spcAft>
+              <a:defRPr sz="1200" b="1">
+                <a:solidFill>
+                  <a:srgbClr val="F8FAFC"/>
+                </a:solidFill>
+              </a:defRPr>
+            </a:pPr>
+            <a:r>
+              <a:t>• Cloud Media Integration:</a:t>
+            </a:r>
+          </a:p>
+          <a:p>
+            <a:pPr>
+              <a:spcAft>
+                <a:spcPts val="600"/>
+              </a:spcAft>
+              <a:defRPr sz="1200" b="0">
+                <a:solidFill>
+                  <a:srgbClr val="94A3B8"/>
+                </a:solidFill>
+              </a:defRPr>
+            </a:pPr>
+            <a:r>
+              <a:t>  - Connect S3 or Cloudinary APIs for product uploads.</a:t>
+            </a:r>
+          </a:p>
+          <a:p>
+            <a:pPr>
+              <a:spcAft>
+                <a:spcPts val="600"/>
+              </a:spcAft>
+              <a:defRPr sz="1200" b="1">
+                <a:solidFill>
+                  <a:srgbClr val="F8FAFC"/>
+                </a:solidFill>
+              </a:defRPr>
+            </a:pPr>
+            <a:r>
+              <a:t>• Data Visualizations:</a:t>
+            </a:r>
+          </a:p>
+          <a:p>
+            <a:pPr>
+              <a:spcAft>
+                <a:spcPts val="600"/>
+              </a:spcAft>
+              <a:defRPr sz="1200" b="0">
+                <a:solidFill>
+                  <a:srgbClr val="94A3B8"/>
+                </a:solidFill>
+              </a:defRPr>
+            </a:pPr>
+            <a:r>
+              <a:t>  - Integrate Chart.js/Recharts to display rate timelines.</a:t>
             </a:r>
           </a:p>
         </p:txBody>
@@ -4763,7 +6494,7 @@
     <p:bg>
       <p:bgPr>
         <a:solidFill>
-          <a:srgbClr val="0B0F19"/>
+          <a:srgbClr val="0F172A"/>
         </a:solidFill>
         <a:effectLst/>
       </p:bgPr>
@@ -4777,14 +6508,59 @@
       <p:grpSpPr/>
       <p:sp>
         <p:nvSpPr>
-          <p:cNvPr id="2" name="TextBox 1"/>
+          <p:cNvPr id="2" name="Rounded Rectangle 1"/>
+          <p:cNvSpPr/>
+          <p:nvPr/>
+        </p:nvSpPr>
+        <p:spPr>
+          <a:xfrm>
+            <a:off x="731520" y="1097280"/>
+            <a:ext cx="7680960" cy="4663440"/>
+          </a:xfrm>
+          <a:prstGeom prst="roundRect">
+            <a:avLst/>
+          </a:prstGeom>
+          <a:solidFill>
+            <a:srgbClr val="1E293B"/>
+          </a:solidFill>
+          <a:ln w="19050">
+            <a:solidFill>
+              <a:srgbClr val="334155"/>
+            </a:solidFill>
+          </a:ln>
+        </p:spPr>
+        <p:style>
+          <a:lnRef idx="1">
+            <a:schemeClr val="accent1"/>
+          </a:lnRef>
+          <a:fillRef idx="3">
+            <a:schemeClr val="accent1"/>
+          </a:fillRef>
+          <a:effectRef idx="2">
+            <a:schemeClr val="accent1"/>
+          </a:effectRef>
+          <a:fontRef idx="minor">
+            <a:schemeClr val="lt1"/>
+          </a:fontRef>
+        </p:style>
+        <p:txBody>
+          <a:bodyPr rtlCol="0" anchor="ctr"/>
+          <a:lstStyle/>
+          <a:p>
+            <a:pPr algn="ctr"/>
+          </a:p>
+        </p:txBody>
+      </p:sp>
+      <p:sp>
+        <p:nvSpPr>
+          <p:cNvPr id="3" name="TextBox 2"/>
           <p:cNvSpPr txBox="1"/>
           <p:nvPr/>
         </p:nvSpPr>
         <p:spPr>
           <a:xfrm>
-            <a:off x="457200" y="1828800"/>
-            <a:ext cx="8229600" cy="1828800"/>
+            <a:off x="914400" y="1645920"/>
+            <a:ext cx="7315200" cy="1371600"/>
           </a:xfrm>
           <a:prstGeom prst="rect">
             <a:avLst/>
@@ -4800,7 +6576,7 @@
             <a:pPr algn="ctr">
               <a:defRPr sz="4400" b="1">
                 <a:solidFill>
-                  <a:srgbClr val="FFFFFF"/>
+                  <a:srgbClr val="2DD4BF"/>
                 </a:solidFill>
                 <a:latin typeface="Arial"/>
               </a:defRPr>
@@ -4813,14 +6589,14 @@
       </p:sp>
       <p:sp>
         <p:nvSpPr>
-          <p:cNvPr id="3" name="TextBox 2"/>
+          <p:cNvPr id="4" name="TextBox 3"/>
           <p:cNvSpPr txBox="1"/>
           <p:nvPr/>
         </p:nvSpPr>
         <p:spPr>
           <a:xfrm>
-            <a:off x="457200" y="3200400"/>
-            <a:ext cx="8229600" cy="1371600"/>
+            <a:off x="914400" y="2926080"/>
+            <a:ext cx="7315200" cy="1371600"/>
           </a:xfrm>
           <a:prstGeom prst="rect">
             <a:avLst/>
@@ -4834,9 +6610,9 @@
           <a:lstStyle/>
           <a:p>
             <a:pPr algn="ctr">
-              <a:defRPr sz="1600">
-                <a:solidFill>
-                  <a:srgbClr val="94A3B8"/>
+              <a:defRPr sz="1500">
+                <a:solidFill>
+                  <a:srgbClr val="F8FAFC"/>
                 </a:solidFill>
                 <a:latin typeface="Arial"/>
               </a:defRPr>
@@ -4854,14 +6630,14 @@
       </p:sp>
       <p:sp>
         <p:nvSpPr>
-          <p:cNvPr id="4" name="TextBox 3"/>
+          <p:cNvPr id="5" name="TextBox 4"/>
           <p:cNvSpPr txBox="1"/>
           <p:nvPr/>
         </p:nvSpPr>
         <p:spPr>
           <a:xfrm>
-            <a:off x="457200" y="4754880"/>
-            <a:ext cx="8229600" cy="1371600"/>
+            <a:off x="914400" y="4389120"/>
+            <a:ext cx="7315200" cy="1097280"/>
           </a:xfrm>
           <a:prstGeom prst="rect">
             <a:avLst/>
@@ -4875,7 +6651,7 @@
           <a:lstStyle/>
           <a:p>
             <a:pPr algn="ctr">
-              <a:defRPr sz="1200">
+              <a:defRPr sz="1300">
                 <a:solidFill>
                   <a:srgbClr val="3B82F6"/>
                 </a:solidFill>
@@ -4883,7 +6659,7 @@
               </a:defRPr>
             </a:pPr>
             <a:r>
-              <a:t>Live Site: https://vigneshwaratraders.vercel.app/</a:t>
+              <a:t>Live Deployed Portal: https://vigneshwaratraders.vercel.app/</a:t>
             </a:r>
             <a:br/>
             <a:r>
@@ -4906,7 +6682,7 @@
     <p:bg>
       <p:bgPr>
         <a:solidFill>
-          <a:srgbClr val="F8FAFC"/>
+          <a:srgbClr val="0F172A"/>
         </a:solidFill>
         <a:effectLst/>
       </p:bgPr>
@@ -4943,7 +6719,7 @@
             <a:pPr>
               <a:defRPr sz="2200" b="1">
                 <a:solidFill>
-                  <a:srgbClr val="0B0F19"/>
+                  <a:srgbClr val="2DD4BF"/>
                 </a:solidFill>
                 <a:latin typeface="Arial"/>
               </a:defRPr>
@@ -4956,14 +6732,137 @@
       </p:sp>
       <p:sp>
         <p:nvSpPr>
-          <p:cNvPr id="3" name="TextBox 2"/>
+          <p:cNvPr id="3" name="Rectangle 2"/>
+          <p:cNvSpPr/>
+          <p:nvPr/>
+        </p:nvSpPr>
+        <p:spPr>
+          <a:xfrm>
+            <a:off x="457200" y="914400"/>
+            <a:ext cx="8229600" cy="25400"/>
+          </a:xfrm>
+          <a:prstGeom prst="rect">
+            <a:avLst/>
+          </a:prstGeom>
+          <a:solidFill>
+            <a:srgbClr val="3B82F6"/>
+          </a:solidFill>
+          <a:ln>
+            <a:noFill/>
+          </a:ln>
+        </p:spPr>
+        <p:style>
+          <a:lnRef idx="1">
+            <a:schemeClr val="accent1"/>
+          </a:lnRef>
+          <a:fillRef idx="3">
+            <a:schemeClr val="accent1"/>
+          </a:fillRef>
+          <a:effectRef idx="2">
+            <a:schemeClr val="accent1"/>
+          </a:effectRef>
+          <a:fontRef idx="minor">
+            <a:schemeClr val="lt1"/>
+          </a:fontRef>
+        </p:style>
+        <p:txBody>
+          <a:bodyPr rtlCol="0" anchor="ctr"/>
+          <a:lstStyle/>
+          <a:p>
+            <a:pPr algn="ctr"/>
+          </a:p>
+        </p:txBody>
+      </p:sp>
+      <p:sp>
+        <p:nvSpPr>
+          <p:cNvPr id="4" name="Rounded Rectangle 3"/>
+          <p:cNvSpPr/>
+          <p:nvPr/>
+        </p:nvSpPr>
+        <p:spPr>
+          <a:xfrm>
+            <a:off x="457200" y="1371600"/>
+            <a:ext cx="2560320" cy="4754880"/>
+          </a:xfrm>
+          <a:prstGeom prst="roundRect">
+            <a:avLst/>
+          </a:prstGeom>
+          <a:solidFill>
+            <a:srgbClr val="1E293B"/>
+          </a:solidFill>
+          <a:ln w="19050">
+            <a:solidFill>
+              <a:srgbClr val="334155"/>
+            </a:solidFill>
+          </a:ln>
+        </p:spPr>
+        <p:style>
+          <a:lnRef idx="1">
+            <a:schemeClr val="accent1"/>
+          </a:lnRef>
+          <a:fillRef idx="3">
+            <a:schemeClr val="accent1"/>
+          </a:fillRef>
+          <a:effectRef idx="2">
+            <a:schemeClr val="accent1"/>
+          </a:effectRef>
+          <a:fontRef idx="minor">
+            <a:schemeClr val="lt1"/>
+          </a:fontRef>
+        </p:style>
+        <p:txBody>
+          <a:bodyPr rtlCol="0" anchor="ctr"/>
+          <a:lstStyle/>
+          <a:p>
+            <a:pPr algn="ctr"/>
+          </a:p>
+        </p:txBody>
+      </p:sp>
+      <p:sp>
+        <p:nvSpPr>
+          <p:cNvPr id="5" name="TextBox 4"/>
           <p:cNvSpPr txBox="1"/>
           <p:nvPr/>
         </p:nvSpPr>
         <p:spPr>
           <a:xfrm>
-            <a:off x="457200" y="1188720"/>
-            <a:ext cx="8229600" cy="5303520"/>
+            <a:off x="548640" y="1463040"/>
+            <a:ext cx="2377440" cy="548640"/>
+          </a:xfrm>
+          <a:prstGeom prst="rect">
+            <a:avLst/>
+          </a:prstGeom>
+          <a:noFill/>
+        </p:spPr>
+        <p:txBody>
+          <a:bodyPr wrap="none">
+            <a:spAutoFit/>
+          </a:bodyPr>
+          <a:lstStyle/>
+          <a:p>
+            <a:pPr>
+              <a:defRPr sz="2800" b="1">
+                <a:solidFill>
+                  <a:srgbClr val="2DD4BF"/>
+                </a:solidFill>
+              </a:defRPr>
+            </a:pPr>
+            <a:r>
+              <a:t>01</a:t>
+            </a:r>
+          </a:p>
+        </p:txBody>
+      </p:sp>
+      <p:sp>
+        <p:nvSpPr>
+          <p:cNvPr id="6" name="TextBox 5"/>
+          <p:cNvSpPr txBox="1"/>
+          <p:nvPr/>
+        </p:nvSpPr>
+        <p:spPr>
+          <a:xfrm>
+            <a:off x="548640" y="2103120"/>
+            <a:ext cx="2377440" cy="3931920"/>
           </a:xfrm>
           <a:prstGeom prst="rect">
             <a:avLst/>
@@ -4977,144 +6876,388 @@
           <a:lstStyle/>
           <a:p>
             <a:pPr>
-              <a:spcBef>
-                <a:spcPts val="800"/>
-              </a:spcBef>
-              <a:defRPr sz="1400" b="1">
-                <a:solidFill>
-                  <a:srgbClr val="1E293B"/>
-                </a:solidFill>
-                <a:latin typeface="Arial"/>
-              </a:defRPr>
-            </a:pPr>
-            <a:r>
-              <a:t>The full project development lifecycle mapped in three clear phases:</a:t>
-            </a:r>
-          </a:p>
-          <a:p>
-            <a:pPr>
-              <a:spcBef>
-                <a:spcPts val="800"/>
-              </a:spcBef>
-              <a:defRPr sz="1400" b="1">
-                <a:solidFill>
-                  <a:srgbClr val="1E293B"/>
-                </a:solidFill>
-                <a:latin typeface="Arial"/>
-              </a:defRPr>
-            </a:pPr>
-            <a:r>
-              <a:t>Phase 1: Problem Identified</a:t>
-            </a:r>
-          </a:p>
-          <a:p>
-            <a:pPr lvl="1">
-              <a:defRPr sz="1300">
-                <a:solidFill>
-                  <a:srgbClr val="475569"/>
-                </a:solidFill>
-                <a:latin typeface="Arial"/>
-              </a:defRPr>
-            </a:pPr>
-            <a:r>
-              <a:t>- Vigneshwara Traders experienced business challenges due to volatile market pricing of raw materials.</a:t>
-            </a:r>
-          </a:p>
-          <a:p>
-            <a:pPr lvl="1">
-              <a:defRPr sz="1300">
-                <a:solidFill>
-                  <a:srgbClr val="475569"/>
-                </a:solidFill>
-                <a:latin typeface="Arial"/>
-              </a:defRPr>
-            </a:pPr>
-            <a:r>
-              <a:t>- Civil builders and contractors had to call or visit the store, causing delayed quotes and support overhead.</a:t>
-            </a:r>
-          </a:p>
-          <a:p>
-            <a:pPr>
-              <a:spcBef>
-                <a:spcPts val="800"/>
-              </a:spcBef>
-              <a:defRPr sz="1400" b="1">
-                <a:solidFill>
-                  <a:srgbClr val="1E293B"/>
-                </a:solidFill>
-                <a:latin typeface="Arial"/>
-              </a:defRPr>
-            </a:pPr>
-            <a:r>
-              <a:t>Phase 2: Research Done</a:t>
-            </a:r>
-          </a:p>
-          <a:p>
-            <a:pPr lvl="1">
-              <a:defRPr sz="1300">
-                <a:solidFill>
-                  <a:srgbClr val="475569"/>
-                </a:solidFill>
-                <a:latin typeface="Arial"/>
-              </a:defRPr>
-            </a:pPr>
-            <a:r>
-              <a:t>- Analysed communication models (HTTP Polling vs WebSockets) and session security mechanisms.</a:t>
-            </a:r>
-          </a:p>
-          <a:p>
-            <a:pPr lvl="1">
-              <a:defRPr sz="1300">
-                <a:solidFill>
-                  <a:srgbClr val="475569"/>
-                </a:solidFill>
-                <a:latin typeface="Arial"/>
-              </a:defRPr>
-            </a:pPr>
-            <a:r>
-              <a:t>- Selected a MERN monorepo structure to facilitate rapid local rendering and clean routing separation.</a:t>
-            </a:r>
-          </a:p>
-          <a:p>
-            <a:pPr>
-              <a:spcBef>
-                <a:spcPts val="800"/>
-              </a:spcBef>
-              <a:defRPr sz="1400" b="1">
-                <a:solidFill>
-                  <a:srgbClr val="1E293B"/>
-                </a:solidFill>
-                <a:latin typeface="Arial"/>
-              </a:defRPr>
-            </a:pPr>
-            <a:r>
-              <a:t>Phase 3: System Designed</a:t>
-            </a:r>
-          </a:p>
-          <a:p>
-            <a:pPr lvl="1">
-              <a:defRPr sz="1300">
-                <a:solidFill>
-                  <a:srgbClr val="475569"/>
-                </a:solidFill>
-                <a:latin typeface="Arial"/>
-              </a:defRPr>
-            </a:pPr>
-            <a:r>
-              <a:t>- Engineered a bilingual localized client frontend hosted at https://vigneshwaratraders.vercel.app/.</a:t>
-            </a:r>
-          </a:p>
-          <a:p>
-            <a:pPr lvl="1">
-              <a:defRPr sz="1300">
-                <a:solidFill>
-                  <a:srgbClr val="475569"/>
-                </a:solidFill>
-                <a:latin typeface="Arial"/>
-              </a:defRPr>
-            </a:pPr>
-            <a:r>
-              <a:t>- Constructed a secure Express API server on Render communicating with a MongoDB Atlas cloud backend.</a:t>
+              <a:spcAft>
+                <a:spcPts val="1200"/>
+              </a:spcAft>
+              <a:defRPr b="1" sz="1300">
+                <a:solidFill>
+                  <a:srgbClr val="F8FAFC"/>
+                </a:solidFill>
+              </a:defRPr>
+            </a:pPr>
+            <a:r>
+              <a:t>PROBLEM IDENTIFIED</a:t>
+            </a:r>
+          </a:p>
+          <a:p>
+            <a:pPr>
+              <a:spcAft>
+                <a:spcPts val="600"/>
+              </a:spcAft>
+              <a:defRPr sz="1200">
+                <a:solidFill>
+                  <a:srgbClr val="94A3B8"/>
+                </a:solidFill>
+              </a:defRPr>
+            </a:pPr>
+            <a:r>
+              <a:t>• Daily material rates fluctuate rapidly due to market demands.</a:t>
+            </a:r>
+          </a:p>
+          <a:p>
+            <a:pPr>
+              <a:spcAft>
+                <a:spcPts val="600"/>
+              </a:spcAft>
+              <a:defRPr sz="1200">
+                <a:solidFill>
+                  <a:srgbClr val="94A3B8"/>
+                </a:solidFill>
+              </a:defRPr>
+            </a:pPr>
+            <a:r>
+              <a:t>• Manual tracking caused calculation errors and administrative bottlenecks.</a:t>
+            </a:r>
+          </a:p>
+          <a:p>
+            <a:pPr>
+              <a:spcAft>
+                <a:spcPts val="600"/>
+              </a:spcAft>
+              <a:defRPr sz="1200">
+                <a:solidFill>
+                  <a:srgbClr val="94A3B8"/>
+                </a:solidFill>
+              </a:defRPr>
+            </a:pPr>
+            <a:r>
+              <a:t>• Customer inquiries took hours to resolve manually.</a:t>
+            </a:r>
+          </a:p>
+        </p:txBody>
+      </p:sp>
+      <p:sp>
+        <p:nvSpPr>
+          <p:cNvPr id="7" name="Rounded Rectangle 6"/>
+          <p:cNvSpPr/>
+          <p:nvPr/>
+        </p:nvSpPr>
+        <p:spPr>
+          <a:xfrm>
+            <a:off x="3291840" y="1371600"/>
+            <a:ext cx="2560320" cy="4754880"/>
+          </a:xfrm>
+          <a:prstGeom prst="roundRect">
+            <a:avLst/>
+          </a:prstGeom>
+          <a:solidFill>
+            <a:srgbClr val="1E293B"/>
+          </a:solidFill>
+          <a:ln w="19050">
+            <a:solidFill>
+              <a:srgbClr val="334155"/>
+            </a:solidFill>
+          </a:ln>
+        </p:spPr>
+        <p:style>
+          <a:lnRef idx="1">
+            <a:schemeClr val="accent1"/>
+          </a:lnRef>
+          <a:fillRef idx="3">
+            <a:schemeClr val="accent1"/>
+          </a:fillRef>
+          <a:effectRef idx="2">
+            <a:schemeClr val="accent1"/>
+          </a:effectRef>
+          <a:fontRef idx="minor">
+            <a:schemeClr val="lt1"/>
+          </a:fontRef>
+        </p:style>
+        <p:txBody>
+          <a:bodyPr rtlCol="0" anchor="ctr"/>
+          <a:lstStyle/>
+          <a:p>
+            <a:pPr algn="ctr"/>
+          </a:p>
+        </p:txBody>
+      </p:sp>
+      <p:sp>
+        <p:nvSpPr>
+          <p:cNvPr id="8" name="TextBox 7"/>
+          <p:cNvSpPr txBox="1"/>
+          <p:nvPr/>
+        </p:nvSpPr>
+        <p:spPr>
+          <a:xfrm>
+            <a:off x="3383280" y="1463040"/>
+            <a:ext cx="2377440" cy="548640"/>
+          </a:xfrm>
+          <a:prstGeom prst="rect">
+            <a:avLst/>
+          </a:prstGeom>
+          <a:noFill/>
+        </p:spPr>
+        <p:txBody>
+          <a:bodyPr wrap="none">
+            <a:spAutoFit/>
+          </a:bodyPr>
+          <a:lstStyle/>
+          <a:p>
+            <a:pPr>
+              <a:defRPr sz="2800" b="1">
+                <a:solidFill>
+                  <a:srgbClr val="2DD4BF"/>
+                </a:solidFill>
+              </a:defRPr>
+            </a:pPr>
+            <a:r>
+              <a:t>02</a:t>
+            </a:r>
+          </a:p>
+        </p:txBody>
+      </p:sp>
+      <p:sp>
+        <p:nvSpPr>
+          <p:cNvPr id="9" name="TextBox 8"/>
+          <p:cNvSpPr txBox="1"/>
+          <p:nvPr/>
+        </p:nvSpPr>
+        <p:spPr>
+          <a:xfrm>
+            <a:off x="3383280" y="2103120"/>
+            <a:ext cx="2377440" cy="3931920"/>
+          </a:xfrm>
+          <a:prstGeom prst="rect">
+            <a:avLst/>
+          </a:prstGeom>
+          <a:noFill/>
+        </p:spPr>
+        <p:txBody>
+          <a:bodyPr wrap="square">
+            <a:spAutoFit/>
+          </a:bodyPr>
+          <a:lstStyle/>
+          <a:p>
+            <a:pPr>
+              <a:spcAft>
+                <a:spcPts val="1200"/>
+              </a:spcAft>
+              <a:defRPr b="1" sz="1300">
+                <a:solidFill>
+                  <a:srgbClr val="F8FAFC"/>
+                </a:solidFill>
+              </a:defRPr>
+            </a:pPr>
+            <a:r>
+              <a:t>RESEARCH DONE</a:t>
+            </a:r>
+          </a:p>
+          <a:p>
+            <a:pPr>
+              <a:spcAft>
+                <a:spcPts val="600"/>
+              </a:spcAft>
+              <a:defRPr sz="1200">
+                <a:solidFill>
+                  <a:srgbClr val="94A3B8"/>
+                </a:solidFill>
+              </a:defRPr>
+            </a:pPr>
+            <a:r>
+              <a:t>• Analysed HTTP Polling vs WebSockets for rate updates.</a:t>
+            </a:r>
+          </a:p>
+          <a:p>
+            <a:pPr>
+              <a:spcAft>
+                <a:spcPts val="600"/>
+              </a:spcAft>
+              <a:defRPr sz="1200">
+                <a:solidFill>
+                  <a:srgbClr val="94A3B8"/>
+                </a:solidFill>
+              </a:defRPr>
+            </a:pPr>
+            <a:r>
+              <a:t>• Implemented secure HttpOnly cookie session management.</a:t>
+            </a:r>
+          </a:p>
+          <a:p>
+            <a:pPr>
+              <a:spcAft>
+                <a:spcPts val="600"/>
+              </a:spcAft>
+              <a:defRPr sz="1200">
+                <a:solidFill>
+                  <a:srgbClr val="94A3B8"/>
+                </a:solidFill>
+              </a:defRPr>
+            </a:pPr>
+            <a:r>
+              <a:t>• Investigated CORS proxied configurations.</a:t>
+            </a:r>
+          </a:p>
+        </p:txBody>
+      </p:sp>
+      <p:sp>
+        <p:nvSpPr>
+          <p:cNvPr id="10" name="Rounded Rectangle 9"/>
+          <p:cNvSpPr/>
+          <p:nvPr/>
+        </p:nvSpPr>
+        <p:spPr>
+          <a:xfrm>
+            <a:off x="6126480" y="1371600"/>
+            <a:ext cx="2560320" cy="4754880"/>
+          </a:xfrm>
+          <a:prstGeom prst="roundRect">
+            <a:avLst/>
+          </a:prstGeom>
+          <a:solidFill>
+            <a:srgbClr val="1E293B"/>
+          </a:solidFill>
+          <a:ln w="19050">
+            <a:solidFill>
+              <a:srgbClr val="334155"/>
+            </a:solidFill>
+          </a:ln>
+        </p:spPr>
+        <p:style>
+          <a:lnRef idx="1">
+            <a:schemeClr val="accent1"/>
+          </a:lnRef>
+          <a:fillRef idx="3">
+            <a:schemeClr val="accent1"/>
+          </a:fillRef>
+          <a:effectRef idx="2">
+            <a:schemeClr val="accent1"/>
+          </a:effectRef>
+          <a:fontRef idx="minor">
+            <a:schemeClr val="lt1"/>
+          </a:fontRef>
+        </p:style>
+        <p:txBody>
+          <a:bodyPr rtlCol="0" anchor="ctr"/>
+          <a:lstStyle/>
+          <a:p>
+            <a:pPr algn="ctr"/>
+          </a:p>
+        </p:txBody>
+      </p:sp>
+      <p:sp>
+        <p:nvSpPr>
+          <p:cNvPr id="11" name="TextBox 10"/>
+          <p:cNvSpPr txBox="1"/>
+          <p:nvPr/>
+        </p:nvSpPr>
+        <p:spPr>
+          <a:xfrm>
+            <a:off x="6217920" y="1463040"/>
+            <a:ext cx="2377440" cy="548640"/>
+          </a:xfrm>
+          <a:prstGeom prst="rect">
+            <a:avLst/>
+          </a:prstGeom>
+          <a:noFill/>
+        </p:spPr>
+        <p:txBody>
+          <a:bodyPr wrap="none">
+            <a:spAutoFit/>
+          </a:bodyPr>
+          <a:lstStyle/>
+          <a:p>
+            <a:pPr>
+              <a:defRPr sz="2800" b="1">
+                <a:solidFill>
+                  <a:srgbClr val="2DD4BF"/>
+                </a:solidFill>
+              </a:defRPr>
+            </a:pPr>
+            <a:r>
+              <a:t>03</a:t>
+            </a:r>
+          </a:p>
+        </p:txBody>
+      </p:sp>
+      <p:sp>
+        <p:nvSpPr>
+          <p:cNvPr id="12" name="TextBox 11"/>
+          <p:cNvSpPr txBox="1"/>
+          <p:nvPr/>
+        </p:nvSpPr>
+        <p:spPr>
+          <a:xfrm>
+            <a:off x="6217920" y="2103120"/>
+            <a:ext cx="2377440" cy="3931920"/>
+          </a:xfrm>
+          <a:prstGeom prst="rect">
+            <a:avLst/>
+          </a:prstGeom>
+          <a:noFill/>
+        </p:spPr>
+        <p:txBody>
+          <a:bodyPr wrap="square">
+            <a:spAutoFit/>
+          </a:bodyPr>
+          <a:lstStyle/>
+          <a:p>
+            <a:pPr>
+              <a:spcAft>
+                <a:spcPts val="1200"/>
+              </a:spcAft>
+              <a:defRPr b="1" sz="1300">
+                <a:solidFill>
+                  <a:srgbClr val="F8FAFC"/>
+                </a:solidFill>
+              </a:defRPr>
+            </a:pPr>
+            <a:r>
+              <a:t>SYSTEM DESIGNED</a:t>
+            </a:r>
+          </a:p>
+          <a:p>
+            <a:pPr>
+              <a:spcAft>
+                <a:spcPts val="600"/>
+              </a:spcAft>
+              <a:defRPr sz="1200">
+                <a:solidFill>
+                  <a:srgbClr val="94A3B8"/>
+                </a:solidFill>
+              </a:defRPr>
+            </a:pPr>
+            <a:r>
+              <a:t>• bilingual React 19 storefront served at https://vigneshwaratraders.vercel.app/.</a:t>
+            </a:r>
+          </a:p>
+          <a:p>
+            <a:pPr>
+              <a:spcAft>
+                <a:spcPts val="600"/>
+              </a:spcAft>
+              <a:defRPr sz="1200">
+                <a:solidFill>
+                  <a:srgbClr val="94A3B8"/>
+                </a:solidFill>
+              </a:defRPr>
+            </a:pPr>
+            <a:r>
+              <a:t>• Node/Express 5 server securely hosted on Render.</a:t>
+            </a:r>
+          </a:p>
+          <a:p>
+            <a:pPr>
+              <a:spcAft>
+                <a:spcPts val="600"/>
+              </a:spcAft>
+              <a:defRPr sz="1200">
+                <a:solidFill>
+                  <a:srgbClr val="94A3B8"/>
+                </a:solidFill>
+              </a:defRPr>
+            </a:pPr>
+            <a:r>
+              <a:t>• Cloud repository: https://github.com/naveen7607/vigneshwara-traders.</a:t>
             </a:r>
           </a:p>
         </p:txBody>
@@ -5133,7 +7276,7 @@
     <p:bg>
       <p:bgPr>
         <a:solidFill>
-          <a:srgbClr val="F8FAFC"/>
+          <a:srgbClr val="0F172A"/>
         </a:solidFill>
         <a:effectLst/>
       </p:bgPr>
@@ -5170,7 +7313,7 @@
             <a:pPr>
               <a:defRPr sz="2200" b="1">
                 <a:solidFill>
-                  <a:srgbClr val="0B0F19"/>
+                  <a:srgbClr val="2DD4BF"/>
                 </a:solidFill>
                 <a:latin typeface="Arial"/>
               </a:defRPr>
@@ -5183,14 +7326,102 @@
       </p:sp>
       <p:sp>
         <p:nvSpPr>
-          <p:cNvPr id="3" name="TextBox 2"/>
+          <p:cNvPr id="3" name="Rectangle 2"/>
+          <p:cNvSpPr/>
+          <p:nvPr/>
+        </p:nvSpPr>
+        <p:spPr>
+          <a:xfrm>
+            <a:off x="457200" y="914400"/>
+            <a:ext cx="8229600" cy="25400"/>
+          </a:xfrm>
+          <a:prstGeom prst="rect">
+            <a:avLst/>
+          </a:prstGeom>
+          <a:solidFill>
+            <a:srgbClr val="3B82F6"/>
+          </a:solidFill>
+          <a:ln>
+            <a:noFill/>
+          </a:ln>
+        </p:spPr>
+        <p:style>
+          <a:lnRef idx="1">
+            <a:schemeClr val="accent1"/>
+          </a:lnRef>
+          <a:fillRef idx="3">
+            <a:schemeClr val="accent1"/>
+          </a:fillRef>
+          <a:effectRef idx="2">
+            <a:schemeClr val="accent1"/>
+          </a:effectRef>
+          <a:fontRef idx="minor">
+            <a:schemeClr val="lt1"/>
+          </a:fontRef>
+        </p:style>
+        <p:txBody>
+          <a:bodyPr rtlCol="0" anchor="ctr"/>
+          <a:lstStyle/>
+          <a:p>
+            <a:pPr algn="ctr"/>
+          </a:p>
+        </p:txBody>
+      </p:sp>
+      <p:sp>
+        <p:nvSpPr>
+          <p:cNvPr id="4" name="Rounded Rectangle 3"/>
+          <p:cNvSpPr/>
+          <p:nvPr/>
+        </p:nvSpPr>
+        <p:spPr>
+          <a:xfrm>
+            <a:off x="457200" y="1371600"/>
+            <a:ext cx="3931920" cy="4754880"/>
+          </a:xfrm>
+          <a:prstGeom prst="roundRect">
+            <a:avLst/>
+          </a:prstGeom>
+          <a:solidFill>
+            <a:srgbClr val="1E293B"/>
+          </a:solidFill>
+          <a:ln w="19050">
+            <a:solidFill>
+              <a:srgbClr val="334155"/>
+            </a:solidFill>
+          </a:ln>
+        </p:spPr>
+        <p:style>
+          <a:lnRef idx="1">
+            <a:schemeClr val="accent1"/>
+          </a:lnRef>
+          <a:fillRef idx="3">
+            <a:schemeClr val="accent1"/>
+          </a:fillRef>
+          <a:effectRef idx="2">
+            <a:schemeClr val="accent1"/>
+          </a:effectRef>
+          <a:fontRef idx="minor">
+            <a:schemeClr val="lt1"/>
+          </a:fontRef>
+        </p:style>
+        <p:txBody>
+          <a:bodyPr rtlCol="0" anchor="ctr"/>
+          <a:lstStyle/>
+          <a:p>
+            <a:pPr algn="ctr"/>
+          </a:p>
+        </p:txBody>
+      </p:sp>
+      <p:sp>
+        <p:nvSpPr>
+          <p:cNvPr id="5" name="TextBox 4"/>
           <p:cNvSpPr txBox="1"/>
           <p:nvPr/>
         </p:nvSpPr>
         <p:spPr>
           <a:xfrm>
-            <a:off x="457200" y="1188720"/>
-            <a:ext cx="8229600" cy="5303520"/>
+            <a:off x="548640" y="1463040"/>
+            <a:ext cx="3749039" cy="4572000"/>
           </a:xfrm>
           <a:prstGeom prst="rect">
             <a:avLst/>
@@ -5204,173 +7435,280 @@
           <a:lstStyle/>
           <a:p>
             <a:pPr>
-              <a:spcBef>
+              <a:spcAft>
+                <a:spcPts val="1200"/>
+              </a:spcAft>
+              <a:defRPr b="1" sz="1500">
+                <a:solidFill>
+                  <a:srgbClr val="2DD4BF"/>
+                </a:solidFill>
+              </a:defRPr>
+            </a:pPr>
+            <a:r>
+              <a:t>DELIVERED MODULES</a:t>
+            </a:r>
+          </a:p>
+          <a:p>
+            <a:pPr>
+              <a:spcAft>
                 <a:spcPts val="800"/>
-              </a:spcBef>
-              <a:defRPr sz="1400" b="1">
-                <a:solidFill>
-                  <a:srgbClr val="1E293B"/>
-                </a:solidFill>
-                <a:latin typeface="Arial"/>
-              </a:defRPr>
-            </a:pPr>
-            <a:r>
-              <a:t>Summary of planned vs. delivered features for the completed MERN system:</a:t>
-            </a:r>
-          </a:p>
-          <a:p>
-            <a:pPr>
-              <a:spcBef>
+              </a:spcAft>
+              <a:defRPr sz="1200">
+                <a:solidFill>
+                  <a:srgbClr val="F8FAFC"/>
+                </a:solidFill>
+              </a:defRPr>
+            </a:pPr>
+            <a:r>
+              <a:t>• Localized Public Catalog: Dual language toggling (Hindi/English).</a:t>
+            </a:r>
+          </a:p>
+          <a:p>
+            <a:pPr>
+              <a:spcAft>
                 <a:spcPts val="800"/>
-              </a:spcBef>
-              <a:defRPr sz="1400" b="1">
-                <a:solidFill>
-                  <a:srgbClr val="1E293B"/>
-                </a:solidFill>
-                <a:latin typeface="Arial"/>
-              </a:defRPr>
-            </a:pPr>
-            <a:r>
-              <a:t>Modules Delivered Successfully:</a:t>
-            </a:r>
-          </a:p>
-          <a:p>
-            <a:pPr lvl="1">
-              <a:defRPr sz="1300">
-                <a:solidFill>
-                  <a:srgbClr val="475569"/>
-                </a:solidFill>
-                <a:latin typeface="Arial"/>
-              </a:defRPr>
-            </a:pPr>
-            <a:r>
-              <a:t>• Public Storefront: Dynamic pricing views for 5 core materials (Cement, Steel, Bricks, Sand, Aggregate).</a:t>
-            </a:r>
-          </a:p>
-          <a:p>
-            <a:pPr lvl="1">
-              <a:defRPr sz="1300">
-                <a:solidFill>
-                  <a:srgbClr val="475569"/>
-                </a:solidFill>
-                <a:latin typeface="Arial"/>
-              </a:defRPr>
-            </a:pPr>
-            <a:r>
-              <a:t>• Dual-Language Support: Full localization toggles (English / Hindi) across public routes.</a:t>
-            </a:r>
-          </a:p>
-          <a:p>
-            <a:pPr lvl="1">
-              <a:defRPr sz="1300">
-                <a:solidFill>
-                  <a:srgbClr val="475569"/>
-                </a:solidFill>
-                <a:latin typeface="Arial"/>
-              </a:defRPr>
-            </a:pPr>
-            <a:r>
-              <a:t>• Construction Material Estimator: Real-time calculators mapping area dimensions to material quantities.</a:t>
-            </a:r>
-          </a:p>
-          <a:p>
-            <a:pPr lvl="1">
-              <a:defRPr sz="1300">
-                <a:solidFill>
-                  <a:srgbClr val="475569"/>
-                </a:solidFill>
-                <a:latin typeface="Arial"/>
-              </a:defRPr>
-            </a:pPr>
-            <a:r>
-              <a:t>• Admin Console: JWT-cookie authenticated dashboard to control pricing schemas, subscriber logs, and client leads.</a:t>
-            </a:r>
-          </a:p>
-          <a:p>
-            <a:pPr lvl="1">
-              <a:defRPr sz="1300">
-                <a:solidFill>
-                  <a:srgbClr val="475569"/>
-                </a:solidFill>
-                <a:latin typeface="Arial"/>
-              </a:defRPr>
-            </a:pPr>
-            <a:r>
-              <a:t>• Unified Alert Engine: Dispatches WhatsApp, email, and toast notifications about pricing hikes or drops.</a:t>
-            </a:r>
-          </a:p>
-          <a:p>
-            <a:pPr>
-              <a:spcBef>
+              </a:spcAft>
+              <a:defRPr sz="1200">
+                <a:solidFill>
+                  <a:srgbClr val="F8FAFC"/>
+                </a:solidFill>
+              </a:defRPr>
+            </a:pPr>
+            <a:r>
+              <a:t>• Material Estimator: Dimensions-to-quantity logic engines.</a:t>
+            </a:r>
+          </a:p>
+          <a:p>
+            <a:pPr>
+              <a:spcAft>
                 <a:spcPts val="800"/>
-              </a:spcBef>
-              <a:defRPr sz="1400" b="1">
-                <a:solidFill>
-                  <a:srgbClr val="1E293B"/>
-                </a:solidFill>
-                <a:latin typeface="Arial"/>
-              </a:defRPr>
-            </a:pPr>
-            <a:r>
-              <a:t>Planned vs. Descoped Actions:</a:t>
-            </a:r>
-          </a:p>
-          <a:p>
-            <a:pPr lvl="1">
-              <a:defRPr sz="1300">
-                <a:solidFill>
-                  <a:srgbClr val="475569"/>
-                </a:solidFill>
-                <a:latin typeface="Arial"/>
-              </a:defRPr>
-            </a:pPr>
-            <a:r>
-              <a:t>• Descoped: Automated government price sync schedules.</a:t>
-            </a:r>
-          </a:p>
-          <a:p>
-            <a:pPr lvl="1">
-              <a:defRPr sz="1300">
-                <a:solidFill>
-                  <a:srgbClr val="475569"/>
-                </a:solidFill>
-                <a:latin typeface="Arial"/>
-              </a:defRPr>
-            </a:pPr>
-            <a:r>
-              <a:t>• Reason: The owner requested 100% manual pricing control to adjust rate boundaries based on regional logistics.</a:t>
-            </a:r>
-          </a:p>
-          <a:p>
-            <a:pPr>
-              <a:spcBef>
+              </a:spcAft>
+              <a:defRPr sz="1200">
+                <a:solidFill>
+                  <a:srgbClr val="F8FAFC"/>
+                </a:solidFill>
+              </a:defRPr>
+            </a:pPr>
+            <a:r>
+              <a:t>• Administrative Controls: Core product price matrix updating grids.</a:t>
+            </a:r>
+          </a:p>
+          <a:p>
+            <a:pPr>
+              <a:spcAft>
                 <a:spcPts val="800"/>
-              </a:spcBef>
-              <a:defRPr sz="1400" b="1">
-                <a:solidFill>
-                  <a:srgbClr val="1E293B"/>
-                </a:solidFill>
-                <a:latin typeface="Arial"/>
-              </a:defRPr>
-            </a:pPr>
-            <a:r>
-              <a:t>Source Code Repository: https://github.com/naveen7607/vigneshwara-traders</a:t>
-            </a:r>
-          </a:p>
-          <a:p>
-            <a:pPr>
-              <a:spcBef>
+              </a:spcAft>
+              <a:defRPr sz="1200">
+                <a:solidFill>
+                  <a:srgbClr val="F8FAFC"/>
+                </a:solidFill>
+              </a:defRPr>
+            </a:pPr>
+            <a:r>
+              <a:t>• Lead Processor: Inquiries tracking dashboard.</a:t>
+            </a:r>
+          </a:p>
+          <a:p>
+            <a:pPr>
+              <a:spcAft>
                 <a:spcPts val="800"/>
-              </a:spcBef>
-              <a:defRPr sz="1400" b="1">
-                <a:solidFill>
-                  <a:srgbClr val="1E293B"/>
-                </a:solidFill>
-                <a:latin typeface="Arial"/>
-              </a:defRPr>
-            </a:pPr>
-            <a:r>
-              <a:t>Live Deployed Website: https://vigneshwaratraders.vercel.app/</a:t>
+              </a:spcAft>
+              <a:defRPr sz="1200">
+                <a:solidFill>
+                  <a:srgbClr val="F8FAFC"/>
+                </a:solidFill>
+              </a:defRPr>
+            </a:pPr>
+            <a:r>
+              <a:t>• WhatsApp &amp; Email Engine: Instant single-click alerts.</a:t>
+            </a:r>
+          </a:p>
+        </p:txBody>
+      </p:sp>
+      <p:sp>
+        <p:nvSpPr>
+          <p:cNvPr id="6" name="Rounded Rectangle 5"/>
+          <p:cNvSpPr/>
+          <p:nvPr/>
+        </p:nvSpPr>
+        <p:spPr>
+          <a:xfrm>
+            <a:off x="4754880" y="1371600"/>
+            <a:ext cx="3931920" cy="4754880"/>
+          </a:xfrm>
+          <a:prstGeom prst="roundRect">
+            <a:avLst/>
+          </a:prstGeom>
+          <a:solidFill>
+            <a:srgbClr val="1E293B"/>
+          </a:solidFill>
+          <a:ln w="19050">
+            <a:solidFill>
+              <a:srgbClr val="334155"/>
+            </a:solidFill>
+          </a:ln>
+        </p:spPr>
+        <p:style>
+          <a:lnRef idx="1">
+            <a:schemeClr val="accent1"/>
+          </a:lnRef>
+          <a:fillRef idx="3">
+            <a:schemeClr val="accent1"/>
+          </a:fillRef>
+          <a:effectRef idx="2">
+            <a:schemeClr val="accent1"/>
+          </a:effectRef>
+          <a:fontRef idx="minor">
+            <a:schemeClr val="lt1"/>
+          </a:fontRef>
+        </p:style>
+        <p:txBody>
+          <a:bodyPr rtlCol="0" anchor="ctr"/>
+          <a:lstStyle/>
+          <a:p>
+            <a:pPr algn="ctr"/>
+          </a:p>
+        </p:txBody>
+      </p:sp>
+      <p:sp>
+        <p:nvSpPr>
+          <p:cNvPr id="7" name="TextBox 6"/>
+          <p:cNvSpPr txBox="1"/>
+          <p:nvPr/>
+        </p:nvSpPr>
+        <p:spPr>
+          <a:xfrm>
+            <a:off x="4846320" y="1463040"/>
+            <a:ext cx="3749039" cy="4572000"/>
+          </a:xfrm>
+          <a:prstGeom prst="rect">
+            <a:avLst/>
+          </a:prstGeom>
+          <a:noFill/>
+        </p:spPr>
+        <p:txBody>
+          <a:bodyPr wrap="square">
+            <a:spAutoFit/>
+          </a:bodyPr>
+          <a:lstStyle/>
+          <a:p>
+            <a:pPr>
+              <a:spcAft>
+                <a:spcPts val="1200"/>
+              </a:spcAft>
+              <a:defRPr b="1" sz="1500">
+                <a:solidFill>
+                  <a:srgbClr val="2DD4BF"/>
+                </a:solidFill>
+              </a:defRPr>
+            </a:pPr>
+            <a:r>
+              <a:t>SCOPE CONTROLS &amp; DEPLOYMENTS</a:t>
+            </a:r>
+          </a:p>
+          <a:p>
+            <a:pPr>
+              <a:spcAft>
+                <a:spcPts val="600"/>
+              </a:spcAft>
+              <a:defRPr sz="1200" b="1">
+                <a:solidFill>
+                  <a:srgbClr val="F8FAFC"/>
+                </a:solidFill>
+              </a:defRPr>
+            </a:pPr>
+            <a:r>
+              <a:t>Descoped Feature:</a:t>
+            </a:r>
+          </a:p>
+          <a:p>
+            <a:pPr>
+              <a:spcAft>
+                <a:spcPts val="600"/>
+              </a:spcAft>
+              <a:defRPr sz="1200" b="0">
+                <a:solidFill>
+                  <a:srgbClr val="94A3B8"/>
+                </a:solidFill>
+              </a:defRPr>
+            </a:pPr>
+            <a:r>
+              <a:t>- Automated Government Sync Schedulers.</a:t>
+            </a:r>
+          </a:p>
+          <a:p>
+            <a:pPr>
+              <a:spcAft>
+                <a:spcPts val="600"/>
+              </a:spcAft>
+              <a:defRPr sz="1200" b="1">
+                <a:solidFill>
+                  <a:srgbClr val="F8FAFC"/>
+                </a:solidFill>
+              </a:defRPr>
+            </a:pPr>
+            <a:r>
+              <a:t>Reason:</a:t>
+            </a:r>
+          </a:p>
+          <a:p>
+            <a:pPr>
+              <a:spcAft>
+                <a:spcPts val="600"/>
+              </a:spcAft>
+              <a:defRPr sz="1200" b="0">
+                <a:solidFill>
+                  <a:srgbClr val="94A3B8"/>
+                </a:solidFill>
+              </a:defRPr>
+            </a:pPr>
+            <a:r>
+              <a:t>- The owner requested 100% manual pricing control to factor in regional logistics and freight volatility.</a:t>
+            </a:r>
+          </a:p>
+          <a:p>
+            <a:pPr>
+              <a:spcAft>
+                <a:spcPts val="600"/>
+              </a:spcAft>
+              <a:defRPr sz="1200" b="1">
+                <a:solidFill>
+                  <a:srgbClr val="F8FAFC"/>
+                </a:solidFill>
+              </a:defRPr>
+            </a:pPr>
+            <a:r>
+              <a:t>Live Production Links:</a:t>
+            </a:r>
+          </a:p>
+          <a:p>
+            <a:pPr>
+              <a:spcAft>
+                <a:spcPts val="600"/>
+              </a:spcAft>
+              <a:defRPr sz="1200" b="0">
+                <a:solidFill>
+                  <a:srgbClr val="94A3B8"/>
+                </a:solidFill>
+              </a:defRPr>
+            </a:pPr>
+            <a:r>
+              <a:t>- Website: https://vigneshwaratraders.vercel.app/</a:t>
+            </a:r>
+          </a:p>
+          <a:p>
+            <a:pPr>
+              <a:spcAft>
+                <a:spcPts val="600"/>
+              </a:spcAft>
+              <a:defRPr sz="1200" b="0">
+                <a:solidFill>
+                  <a:srgbClr val="94A3B8"/>
+                </a:solidFill>
+              </a:defRPr>
+            </a:pPr>
+            <a:r>
+              <a:t>- GitHub: https://github.com/naveen7607/vigneshwara-traders</a:t>
             </a:r>
           </a:p>
         </p:txBody>
@@ -5389,7 +7727,7 @@
     <p:bg>
       <p:bgPr>
         <a:solidFill>
-          <a:srgbClr val="F8FAFC"/>
+          <a:srgbClr val="0F172A"/>
         </a:solidFill>
         <a:effectLst/>
       </p:bgPr>
@@ -5426,27 +7764,115 @@
             <a:pPr>
               <a:defRPr sz="2200" b="1">
                 <a:solidFill>
-                  <a:srgbClr val="0B0F19"/>
+                  <a:srgbClr val="2DD4BF"/>
                 </a:solidFill>
                 <a:latin typeface="Arial"/>
               </a:defRPr>
             </a:pPr>
             <a:r>
-              <a:t>LIVE DEMO - STEP 1: PUBLIC INTERFACE</a:t>
-            </a:r>
-          </a:p>
-        </p:txBody>
-      </p:sp>
-      <p:sp>
-        <p:nvSpPr>
-          <p:cNvPr id="3" name="TextBox 2"/>
+              <a:t>STEP 1: PUBLIC PRICING STOREFRONT</a:t>
+            </a:r>
+          </a:p>
+        </p:txBody>
+      </p:sp>
+      <p:sp>
+        <p:nvSpPr>
+          <p:cNvPr id="3" name="Rectangle 2"/>
+          <p:cNvSpPr/>
+          <p:nvPr/>
+        </p:nvSpPr>
+        <p:spPr>
+          <a:xfrm>
+            <a:off x="457200" y="914400"/>
+            <a:ext cx="8229600" cy="25400"/>
+          </a:xfrm>
+          <a:prstGeom prst="rect">
+            <a:avLst/>
+          </a:prstGeom>
+          <a:solidFill>
+            <a:srgbClr val="3B82F6"/>
+          </a:solidFill>
+          <a:ln>
+            <a:noFill/>
+          </a:ln>
+        </p:spPr>
+        <p:style>
+          <a:lnRef idx="1">
+            <a:schemeClr val="accent1"/>
+          </a:lnRef>
+          <a:fillRef idx="3">
+            <a:schemeClr val="accent1"/>
+          </a:fillRef>
+          <a:effectRef idx="2">
+            <a:schemeClr val="accent1"/>
+          </a:effectRef>
+          <a:fontRef idx="minor">
+            <a:schemeClr val="lt1"/>
+          </a:fontRef>
+        </p:style>
+        <p:txBody>
+          <a:bodyPr rtlCol="0" anchor="ctr"/>
+          <a:lstStyle/>
+          <a:p>
+            <a:pPr algn="ctr"/>
+          </a:p>
+        </p:txBody>
+      </p:sp>
+      <p:sp>
+        <p:nvSpPr>
+          <p:cNvPr id="4" name="Rounded Rectangle 3"/>
+          <p:cNvSpPr/>
+          <p:nvPr/>
+        </p:nvSpPr>
+        <p:spPr>
+          <a:xfrm>
+            <a:off x="457200" y="1371600"/>
+            <a:ext cx="3931920" cy="4754880"/>
+          </a:xfrm>
+          <a:prstGeom prst="roundRect">
+            <a:avLst/>
+          </a:prstGeom>
+          <a:solidFill>
+            <a:srgbClr val="1E293B"/>
+          </a:solidFill>
+          <a:ln w="19050">
+            <a:solidFill>
+              <a:srgbClr val="334155"/>
+            </a:solidFill>
+          </a:ln>
+        </p:spPr>
+        <p:style>
+          <a:lnRef idx="1">
+            <a:schemeClr val="accent1"/>
+          </a:lnRef>
+          <a:fillRef idx="3">
+            <a:schemeClr val="accent1"/>
+          </a:fillRef>
+          <a:effectRef idx="2">
+            <a:schemeClr val="accent1"/>
+          </a:effectRef>
+          <a:fontRef idx="minor">
+            <a:schemeClr val="lt1"/>
+          </a:fontRef>
+        </p:style>
+        <p:txBody>
+          <a:bodyPr rtlCol="0" anchor="ctr"/>
+          <a:lstStyle/>
+          <a:p>
+            <a:pPr algn="ctr"/>
+          </a:p>
+        </p:txBody>
+      </p:sp>
+      <p:sp>
+        <p:nvSpPr>
+          <p:cNvPr id="5" name="TextBox 4"/>
           <p:cNvSpPr txBox="1"/>
           <p:nvPr/>
         </p:nvSpPr>
         <p:spPr>
           <a:xfrm>
-            <a:off x="457200" y="1188720"/>
-            <a:ext cx="8229600" cy="5303520"/>
+            <a:off x="548640" y="1463040"/>
+            <a:ext cx="3749039" cy="4572000"/>
           </a:xfrm>
           <a:prstGeom prst="rect">
             <a:avLst/>
@@ -5460,131 +7886,280 @@
           <a:lstStyle/>
           <a:p>
             <a:pPr>
-              <a:spcBef>
+              <a:spcAft>
                 <a:spcPts val="800"/>
-              </a:spcBef>
-              <a:defRPr sz="1400" b="1">
-                <a:solidFill>
-                  <a:srgbClr val="1E293B"/>
-                </a:solidFill>
-                <a:latin typeface="Arial"/>
-              </a:defRPr>
-            </a:pPr>
-            <a:r>
-              <a:t>Demonstration of the public-facing localized storefront:</a:t>
-            </a:r>
-          </a:p>
-          <a:p>
-            <a:pPr>
-              <a:spcBef>
+              </a:spcAft>
+              <a:defRPr sz="1200" b="1">
+                <a:solidFill>
+                  <a:srgbClr val="F8FAFC"/>
+                </a:solidFill>
+              </a:defRPr>
+            </a:pPr>
+            <a:r>
+              <a:t>User Entry Point:</a:t>
+            </a:r>
+          </a:p>
+          <a:p>
+            <a:pPr>
+              <a:spcAft>
                 <a:spcPts val="800"/>
-              </a:spcBef>
-              <a:defRPr sz="1400" b="1">
-                <a:solidFill>
-                  <a:srgbClr val="1E293B"/>
-                </a:solidFill>
-                <a:latin typeface="Arial"/>
-              </a:defRPr>
-            </a:pPr>
-            <a:r>
-              <a:t>User Entry &amp; Landing View:</a:t>
-            </a:r>
-          </a:p>
-          <a:p>
-            <a:pPr lvl="1">
-              <a:defRPr sz="1300">
-                <a:solidFill>
-                  <a:srgbClr val="475569"/>
-                </a:solidFill>
-                <a:latin typeface="Arial"/>
-              </a:defRPr>
-            </a:pPr>
-            <a:r>
-              <a:t>- Accessing the live production URL at https://vigneshwaratraders.vercel.app/.</a:t>
-            </a:r>
-          </a:p>
-          <a:p>
-            <a:pPr lvl="1">
-              <a:defRPr sz="1300">
-                <a:solidFill>
-                  <a:srgbClr val="475569"/>
-                </a:solidFill>
-                <a:latin typeface="Arial"/>
-              </a:defRPr>
-            </a:pPr>
-            <a:r>
-              <a:t>- Home View presents a premium dark-mode theme utilizing glassmorphism cards and layout grids.</a:t>
-            </a:r>
-          </a:p>
-          <a:p>
-            <a:pPr>
-              <a:spcBef>
+              </a:spcAft>
+              <a:defRPr sz="1200" b="0">
+                <a:solidFill>
+                  <a:srgbClr val="94A3B8"/>
+                </a:solidFill>
+              </a:defRPr>
+            </a:pPr>
+            <a:r>
+              <a:t>• Users access the application at https://vigneshwaratraders.vercel.app/.</a:t>
+            </a:r>
+          </a:p>
+          <a:p>
+            <a:pPr>
+              <a:spcAft>
                 <a:spcPts val="800"/>
-              </a:spcBef>
-              <a:defRPr sz="1400" b="1">
-                <a:solidFill>
-                  <a:srgbClr val="1E293B"/>
-                </a:solidFill>
-                <a:latin typeface="Arial"/>
-              </a:defRPr>
-            </a:pPr>
-            <a:r>
-              <a:t>Real-Time Prices Index:</a:t>
-            </a:r>
-          </a:p>
-          <a:p>
-            <a:pPr lvl="1">
-              <a:defRPr sz="1300">
-                <a:solidFill>
-                  <a:srgbClr val="475569"/>
-                </a:solidFill>
-                <a:latin typeface="Arial"/>
-              </a:defRPr>
-            </a:pPr>
-            <a:r>
-              <a:t>- Displays structural steel, cement brands (ACC, UltraTech), aggregates, red bricks, and sand rates.</a:t>
-            </a:r>
-          </a:p>
-          <a:p>
-            <a:pPr lvl="1">
-              <a:defRPr sz="1300">
-                <a:solidFill>
-                  <a:srgbClr val="475569"/>
-                </a:solidFill>
-                <a:latin typeface="Arial"/>
-              </a:defRPr>
-            </a:pPr>
-            <a:r>
-              <a:t>- Historical rates are struck through (e.g. ~~₹68,000~~) showing clear retail history next to live rates.</a:t>
-            </a:r>
-          </a:p>
-          <a:p>
-            <a:pPr>
-              <a:spcBef>
+              </a:spcAft>
+              <a:defRPr sz="1200" b="0">
+                <a:solidFill>
+                  <a:srgbClr val="94A3B8"/>
+                </a:solidFill>
+              </a:defRPr>
+            </a:pPr>
+            <a:r>
+              <a:t>• The landing page presents a premium glassmorphic UI.</a:t>
+            </a:r>
+          </a:p>
+          <a:p>
+            <a:pPr>
+              <a:spcAft>
                 <a:spcPts val="800"/>
-              </a:spcBef>
-              <a:defRPr sz="1400" b="1">
-                <a:solidFill>
-                  <a:srgbClr val="1E293B"/>
-                </a:solidFill>
-                <a:latin typeface="Arial"/>
-              </a:defRPr>
-            </a:pPr>
-            <a:r>
-              <a:t>Localization Toggles:</a:t>
-            </a:r>
-          </a:p>
-          <a:p>
-            <a:pPr lvl="1">
-              <a:defRPr sz="1300">
-                <a:solidFill>
-                  <a:srgbClr val="475569"/>
-                </a:solidFill>
-                <a:latin typeface="Arial"/>
-              </a:defRPr>
-            </a:pPr>
-            <a:r>
-              <a:t>- Toggle switch allows users to transition the complete page text and material catalogs between English and Hindi.</a:t>
+              </a:spcAft>
+              <a:defRPr sz="1200" b="1">
+                <a:solidFill>
+                  <a:srgbClr val="F8FAFC"/>
+                </a:solidFill>
+              </a:defRPr>
+            </a:pPr>
+            <a:r>
+              <a:t>Price Tracker Cards:</a:t>
+            </a:r>
+          </a:p>
+          <a:p>
+            <a:pPr>
+              <a:spcAft>
+                <a:spcPts val="800"/>
+              </a:spcAft>
+              <a:defRPr sz="1200" b="0">
+                <a:solidFill>
+                  <a:srgbClr val="94A3B8"/>
+                </a:solidFill>
+              </a:defRPr>
+            </a:pPr>
+            <a:r>
+              <a:t>• Displays JSW Steel, TATA Steel, UltraTech, ACC Cement, Sand, Bricks, and Aggregate.</a:t>
+            </a:r>
+          </a:p>
+          <a:p>
+            <a:pPr>
+              <a:spcAft>
+                <a:spcPts val="800"/>
+              </a:spcAft>
+              <a:defRPr sz="1200" b="0">
+                <a:solidFill>
+                  <a:srgbClr val="94A3B8"/>
+                </a:solidFill>
+              </a:defRPr>
+            </a:pPr>
+            <a:r>
+              <a:t>• Struck-through styling highlights historic rates next to live pricing.</a:t>
+            </a:r>
+          </a:p>
+        </p:txBody>
+      </p:sp>
+      <p:sp>
+        <p:nvSpPr>
+          <p:cNvPr id="6" name="Rounded Rectangle 5"/>
+          <p:cNvSpPr/>
+          <p:nvPr/>
+        </p:nvSpPr>
+        <p:spPr>
+          <a:xfrm>
+            <a:off x="4754880" y="1371600"/>
+            <a:ext cx="3931920" cy="4754880"/>
+          </a:xfrm>
+          <a:prstGeom prst="roundRect">
+            <a:avLst/>
+          </a:prstGeom>
+          <a:solidFill>
+            <a:srgbClr val="1E293B"/>
+          </a:solidFill>
+          <a:ln w="19050">
+            <a:solidFill>
+              <a:srgbClr val="334155"/>
+            </a:solidFill>
+          </a:ln>
+        </p:spPr>
+        <p:style>
+          <a:lnRef idx="1">
+            <a:schemeClr val="accent1"/>
+          </a:lnRef>
+          <a:fillRef idx="3">
+            <a:schemeClr val="accent1"/>
+          </a:fillRef>
+          <a:effectRef idx="2">
+            <a:schemeClr val="accent1"/>
+          </a:effectRef>
+          <a:fontRef idx="minor">
+            <a:schemeClr val="lt1"/>
+          </a:fontRef>
+        </p:style>
+        <p:txBody>
+          <a:bodyPr rtlCol="0" anchor="ctr"/>
+          <a:lstStyle/>
+          <a:p>
+            <a:pPr algn="ctr"/>
+          </a:p>
+        </p:txBody>
+      </p:sp>
+      <p:sp>
+        <p:nvSpPr>
+          <p:cNvPr id="7" name="TextBox 6"/>
+          <p:cNvSpPr txBox="1"/>
+          <p:nvPr/>
+        </p:nvSpPr>
+        <p:spPr>
+          <a:xfrm>
+            <a:off x="4846320" y="1463040"/>
+            <a:ext cx="3749039" cy="4572000"/>
+          </a:xfrm>
+          <a:prstGeom prst="rect">
+            <a:avLst/>
+          </a:prstGeom>
+          <a:noFill/>
+        </p:spPr>
+        <p:txBody>
+          <a:bodyPr wrap="square">
+            <a:spAutoFit/>
+          </a:bodyPr>
+          <a:lstStyle/>
+          <a:p>
+            <a:pPr>
+              <a:spcAft>
+                <a:spcPts val="800"/>
+              </a:spcAft>
+              <a:defRPr sz="1200" b="1">
+                <a:solidFill>
+                  <a:srgbClr val="F8FAFC"/>
+                </a:solidFill>
+              </a:defRPr>
+            </a:pPr>
+            <a:r>
+              <a:t>Bilingual Translations:</a:t>
+            </a:r>
+          </a:p>
+          <a:p>
+            <a:pPr>
+              <a:spcAft>
+                <a:spcPts val="800"/>
+              </a:spcAft>
+              <a:defRPr sz="1200" b="0">
+                <a:solidFill>
+                  <a:srgbClr val="94A3B8"/>
+                </a:solidFill>
+              </a:defRPr>
+            </a:pPr>
+            <a:r>
+              <a:t>• A toggle button instantly translates content.</a:t>
+            </a:r>
+          </a:p>
+          <a:p>
+            <a:pPr>
+              <a:spcAft>
+                <a:spcPts val="800"/>
+              </a:spcAft>
+              <a:defRPr sz="1200" b="0">
+                <a:solidFill>
+                  <a:srgbClr val="94A3B8"/>
+                </a:solidFill>
+              </a:defRPr>
+            </a:pPr>
+            <a:r>
+              <a:t>• Localized databases render terms in Hindi and English.</a:t>
+            </a:r>
+          </a:p>
+          <a:p>
+            <a:pPr>
+              <a:spcAft>
+                <a:spcPts val="800"/>
+              </a:spcAft>
+              <a:defRPr sz="1200" b="1">
+                <a:solidFill>
+                  <a:srgbClr val="F8FAFC"/>
+                </a:solidFill>
+              </a:defRPr>
+            </a:pPr>
+            <a:r>
+              <a:t>Visual Trend Charts:</a:t>
+            </a:r>
+          </a:p>
+          <a:p>
+            <a:pPr>
+              <a:spcAft>
+                <a:spcPts val="800"/>
+              </a:spcAft>
+              <a:defRPr sz="1200" b="1">
+                <a:solidFill>
+                  <a:srgbClr val="F8FAFC"/>
+                </a:solidFill>
+              </a:defRPr>
+            </a:pPr>
+            <a:r>
+              <a:t>• Live pricing changes are highlighted with colored icon elements:</a:t>
+            </a:r>
+          </a:p>
+          <a:p>
+            <a:pPr>
+              <a:spcAft>
+                <a:spcPts val="800"/>
+              </a:spcAft>
+              <a:defRPr sz="1200" b="0">
+                <a:solidFill>
+                  <a:srgbClr val="94A3B8"/>
+                </a:solidFill>
+              </a:defRPr>
+            </a:pPr>
+            <a:r>
+              <a:t>  - Green upward charts (Hikes)</a:t>
+            </a:r>
+          </a:p>
+          <a:p>
+            <a:pPr>
+              <a:spcAft>
+                <a:spcPts val="800"/>
+              </a:spcAft>
+              <a:defRPr sz="1200" b="0">
+                <a:solidFill>
+                  <a:srgbClr val="94A3B8"/>
+                </a:solidFill>
+              </a:defRPr>
+            </a:pPr>
+            <a:r>
+              <a:t>  - Red downward charts (Drops)</a:t>
+            </a:r>
+          </a:p>
+          <a:p>
+            <a:pPr>
+              <a:spcAft>
+                <a:spcPts val="800"/>
+              </a:spcAft>
+              <a:defRPr sz="1200" b="0">
+                <a:solidFill>
+                  <a:srgbClr val="94A3B8"/>
+                </a:solidFill>
+              </a:defRPr>
+            </a:pPr>
+            <a:r>
+              <a:t>  - Blue horizontal indicators (Stable)</a:t>
             </a:r>
           </a:p>
         </p:txBody>
@@ -5603,7 +8178,7 @@
     <p:bg>
       <p:bgPr>
         <a:solidFill>
-          <a:srgbClr val="F8FAFC"/>
+          <a:srgbClr val="0F172A"/>
         </a:solidFill>
         <a:effectLst/>
       </p:bgPr>
@@ -5640,27 +8215,115 @@
             <a:pPr>
               <a:defRPr sz="2200" b="1">
                 <a:solidFill>
-                  <a:srgbClr val="0B0F19"/>
+                  <a:srgbClr val="2DD4BF"/>
                 </a:solidFill>
                 <a:latin typeface="Arial"/>
               </a:defRPr>
             </a:pPr>
             <a:r>
-              <a:t>LIVE DEMO - STEP 2: INTERACTIVE ESTIMATOR</a:t>
-            </a:r>
-          </a:p>
-        </p:txBody>
-      </p:sp>
-      <p:sp>
-        <p:nvSpPr>
-          <p:cNvPr id="3" name="TextBox 2"/>
+              <a:t>STEP 2: QUANTITY ESTIMATOR</a:t>
+            </a:r>
+          </a:p>
+        </p:txBody>
+      </p:sp>
+      <p:sp>
+        <p:nvSpPr>
+          <p:cNvPr id="3" name="Rectangle 2"/>
+          <p:cNvSpPr/>
+          <p:nvPr/>
+        </p:nvSpPr>
+        <p:spPr>
+          <a:xfrm>
+            <a:off x="457200" y="914400"/>
+            <a:ext cx="8229600" cy="25400"/>
+          </a:xfrm>
+          <a:prstGeom prst="rect">
+            <a:avLst/>
+          </a:prstGeom>
+          <a:solidFill>
+            <a:srgbClr val="3B82F6"/>
+          </a:solidFill>
+          <a:ln>
+            <a:noFill/>
+          </a:ln>
+        </p:spPr>
+        <p:style>
+          <a:lnRef idx="1">
+            <a:schemeClr val="accent1"/>
+          </a:lnRef>
+          <a:fillRef idx="3">
+            <a:schemeClr val="accent1"/>
+          </a:fillRef>
+          <a:effectRef idx="2">
+            <a:schemeClr val="accent1"/>
+          </a:effectRef>
+          <a:fontRef idx="minor">
+            <a:schemeClr val="lt1"/>
+          </a:fontRef>
+        </p:style>
+        <p:txBody>
+          <a:bodyPr rtlCol="0" anchor="ctr"/>
+          <a:lstStyle/>
+          <a:p>
+            <a:pPr algn="ctr"/>
+          </a:p>
+        </p:txBody>
+      </p:sp>
+      <p:sp>
+        <p:nvSpPr>
+          <p:cNvPr id="4" name="Rounded Rectangle 3"/>
+          <p:cNvSpPr/>
+          <p:nvPr/>
+        </p:nvSpPr>
+        <p:spPr>
+          <a:xfrm>
+            <a:off x="457200" y="1371600"/>
+            <a:ext cx="3931920" cy="4754880"/>
+          </a:xfrm>
+          <a:prstGeom prst="roundRect">
+            <a:avLst/>
+          </a:prstGeom>
+          <a:solidFill>
+            <a:srgbClr val="1E293B"/>
+          </a:solidFill>
+          <a:ln w="19050">
+            <a:solidFill>
+              <a:srgbClr val="334155"/>
+            </a:solidFill>
+          </a:ln>
+        </p:spPr>
+        <p:style>
+          <a:lnRef idx="1">
+            <a:schemeClr val="accent1"/>
+          </a:lnRef>
+          <a:fillRef idx="3">
+            <a:schemeClr val="accent1"/>
+          </a:fillRef>
+          <a:effectRef idx="2">
+            <a:schemeClr val="accent1"/>
+          </a:effectRef>
+          <a:fontRef idx="minor">
+            <a:schemeClr val="lt1"/>
+          </a:fontRef>
+        </p:style>
+        <p:txBody>
+          <a:bodyPr rtlCol="0" anchor="ctr"/>
+          <a:lstStyle/>
+          <a:p>
+            <a:pPr algn="ctr"/>
+          </a:p>
+        </p:txBody>
+      </p:sp>
+      <p:sp>
+        <p:nvSpPr>
+          <p:cNvPr id="5" name="TextBox 4"/>
           <p:cNvSpPr txBox="1"/>
           <p:nvPr/>
         </p:nvSpPr>
         <p:spPr>
           <a:xfrm>
-            <a:off x="457200" y="1188720"/>
-            <a:ext cx="8229600" cy="5303520"/>
+            <a:off x="548640" y="1463040"/>
+            <a:ext cx="3749039" cy="4572000"/>
           </a:xfrm>
           <a:prstGeom prst="rect">
             <a:avLst/>
@@ -5674,144 +8337,235 @@
           <a:lstStyle/>
           <a:p>
             <a:pPr>
-              <a:spcBef>
+              <a:spcAft>
                 <a:spcPts val="800"/>
-              </a:spcBef>
-              <a:defRPr sz="1400" b="1">
-                <a:solidFill>
-                  <a:srgbClr val="1E293B"/>
-                </a:solidFill>
-                <a:latin typeface="Arial"/>
-              </a:defRPr>
-            </a:pPr>
-            <a:r>
-              <a:t>Demonstration of the material quantity and cost calculation engine:</a:t>
-            </a:r>
-          </a:p>
-          <a:p>
-            <a:pPr>
-              <a:spcBef>
+              </a:spcAft>
+              <a:defRPr sz="1200" b="1">
+                <a:solidFill>
+                  <a:srgbClr val="F8FAFC"/>
+                </a:solidFill>
+              </a:defRPr>
+            </a:pPr>
+            <a:r>
+              <a:t>Input Form Mechanics:</a:t>
+            </a:r>
+          </a:p>
+          <a:p>
+            <a:pPr>
+              <a:spcAft>
                 <a:spcPts val="800"/>
-              </a:spcBef>
-              <a:defRPr sz="1400" b="1">
-                <a:solidFill>
-                  <a:srgbClr val="1E293B"/>
-                </a:solidFill>
-                <a:latin typeface="Arial"/>
-              </a:defRPr>
-            </a:pPr>
-            <a:r>
-              <a:t>User Material Input Flow:</a:t>
-            </a:r>
-          </a:p>
-          <a:p>
-            <a:pPr lvl="1">
-              <a:defRPr sz="1300">
-                <a:solidFill>
-                  <a:srgbClr val="475569"/>
-                </a:solidFill>
-                <a:latin typeface="Arial"/>
-              </a:defRPr>
-            </a:pPr>
-            <a:r>
-              <a:t>- User selects a specific raw material card (e.g., Cement or Steel) or opens the global Estimator modal.</a:t>
-            </a:r>
-          </a:p>
-          <a:p>
-            <a:pPr lvl="1">
-              <a:defRPr sz="1300">
-                <a:solidFill>
-                  <a:srgbClr val="475569"/>
-                </a:solidFill>
-                <a:latin typeface="Arial"/>
-              </a:defRPr>
-            </a:pPr>
-            <a:r>
-              <a:t>- Enters building dimensions, such as construction area in square feet, ton volumes, or brick counts.</a:t>
-            </a:r>
-          </a:p>
-          <a:p>
-            <a:pPr>
-              <a:spcBef>
+              </a:spcAft>
+              <a:defRPr sz="1200" b="0">
+                <a:solidFill>
+                  <a:srgbClr val="94A3B8"/>
+                </a:solidFill>
+              </a:defRPr>
+            </a:pPr>
+            <a:r>
+              <a:t>• Users select a material card or load the global Estimator modal.</a:t>
+            </a:r>
+          </a:p>
+          <a:p>
+            <a:pPr>
+              <a:spcAft>
                 <a:spcPts val="800"/>
-              </a:spcBef>
-              <a:defRPr sz="1400" b="1">
-                <a:solidFill>
-                  <a:srgbClr val="1E293B"/>
-                </a:solidFill>
-                <a:latin typeface="Arial"/>
-              </a:defRPr>
-            </a:pPr>
-            <a:r>
-              <a:t>Real-Time Local Calculations:</a:t>
-            </a:r>
-          </a:p>
-          <a:p>
-            <a:pPr lvl="1">
-              <a:defRPr sz="1300">
-                <a:solidFill>
-                  <a:srgbClr val="475569"/>
-                </a:solidFill>
-                <a:latin typeface="Arial"/>
-              </a:defRPr>
-            </a:pPr>
-            <a:r>
-              <a:t>- React state automatically triggers algorithms to calculate estimated resource units.</a:t>
-            </a:r>
-          </a:p>
-          <a:p>
-            <a:pPr lvl="1">
-              <a:defRPr sz="1300">
-                <a:solidFill>
-                  <a:srgbClr val="475569"/>
-                </a:solidFill>
-                <a:latin typeface="Arial"/>
-              </a:defRPr>
-            </a:pPr>
-            <a:r>
-              <a:t>- Outputs required cement bags, steel tons, aggregate cubic feet, or bricks without page reloads.</a:t>
-            </a:r>
-          </a:p>
-          <a:p>
-            <a:pPr>
-              <a:spcBef>
+              </a:spcAft>
+              <a:defRPr sz="1200" b="0">
+                <a:solidFill>
+                  <a:srgbClr val="94A3B8"/>
+                </a:solidFill>
+              </a:defRPr>
+            </a:pPr>
+            <a:r>
+              <a:t>• Inputs specify construction area dimensions (sq ft) or counts.</a:t>
+            </a:r>
+          </a:p>
+          <a:p>
+            <a:pPr>
+              <a:spcAft>
                 <a:spcPts val="800"/>
-              </a:spcBef>
-              <a:defRPr sz="1400" b="1">
-                <a:solidFill>
-                  <a:srgbClr val="1E293B"/>
-                </a:solidFill>
-                <a:latin typeface="Arial"/>
-              </a:defRPr>
-            </a:pPr>
-            <a:r>
-              <a:t>Lead Generation System:</a:t>
-            </a:r>
-          </a:p>
-          <a:p>
-            <a:pPr lvl="1">
-              <a:defRPr sz="1300">
-                <a:solidFill>
-                  <a:srgbClr val="475569"/>
-                </a:solidFill>
-                <a:latin typeface="Arial"/>
-              </a:defRPr>
-            </a:pPr>
-            <a:r>
-              <a:t>- User clicks 'Submit Inquiry' to send their estimated specifications directly to the store admin.</a:t>
-            </a:r>
-          </a:p>
-          <a:p>
-            <a:pPr lvl="1">
-              <a:defRPr sz="1300">
-                <a:solidFill>
-                  <a:srgbClr val="475569"/>
-                </a:solidFill>
-                <a:latin typeface="Arial"/>
-              </a:defRPr>
-            </a:pPr>
-            <a:r>
-              <a:t>- Form fields validate in real-time, verifying contact inputs before persistence.</a:t>
+              </a:spcAft>
+              <a:defRPr sz="1200" b="1">
+                <a:solidFill>
+                  <a:srgbClr val="F8FAFC"/>
+                </a:solidFill>
+              </a:defRPr>
+            </a:pPr>
+            <a:r>
+              <a:t>Instant Calculation Engine:</a:t>
+            </a:r>
+          </a:p>
+          <a:p>
+            <a:pPr>
+              <a:spcAft>
+                <a:spcPts val="800"/>
+              </a:spcAft>
+              <a:defRPr sz="1200" b="0">
+                <a:solidFill>
+                  <a:srgbClr val="94A3B8"/>
+                </a:solidFill>
+              </a:defRPr>
+            </a:pPr>
+            <a:r>
+              <a:t>• React calculations run locally on state changes.</a:t>
+            </a:r>
+          </a:p>
+          <a:p>
+            <a:pPr>
+              <a:spcAft>
+                <a:spcPts val="800"/>
+              </a:spcAft>
+              <a:defRPr sz="1200" b="0">
+                <a:solidFill>
+                  <a:srgbClr val="94A3B8"/>
+                </a:solidFill>
+              </a:defRPr>
+            </a:pPr>
+            <a:r>
+              <a:t>• Outputs cement bags, steel tons, sand cubic feet instantly.</a:t>
+            </a:r>
+          </a:p>
+        </p:txBody>
+      </p:sp>
+      <p:sp>
+        <p:nvSpPr>
+          <p:cNvPr id="6" name="Rounded Rectangle 5"/>
+          <p:cNvSpPr/>
+          <p:nvPr/>
+        </p:nvSpPr>
+        <p:spPr>
+          <a:xfrm>
+            <a:off x="4754880" y="1371600"/>
+            <a:ext cx="3931920" cy="4754880"/>
+          </a:xfrm>
+          <a:prstGeom prst="roundRect">
+            <a:avLst/>
+          </a:prstGeom>
+          <a:solidFill>
+            <a:srgbClr val="1E293B"/>
+          </a:solidFill>
+          <a:ln w="19050">
+            <a:solidFill>
+              <a:srgbClr val="334155"/>
+            </a:solidFill>
+          </a:ln>
+        </p:spPr>
+        <p:style>
+          <a:lnRef idx="1">
+            <a:schemeClr val="accent1"/>
+          </a:lnRef>
+          <a:fillRef idx="3">
+            <a:schemeClr val="accent1"/>
+          </a:fillRef>
+          <a:effectRef idx="2">
+            <a:schemeClr val="accent1"/>
+          </a:effectRef>
+          <a:fontRef idx="minor">
+            <a:schemeClr val="lt1"/>
+          </a:fontRef>
+        </p:style>
+        <p:txBody>
+          <a:bodyPr rtlCol="0" anchor="ctr"/>
+          <a:lstStyle/>
+          <a:p>
+            <a:pPr algn="ctr"/>
+          </a:p>
+        </p:txBody>
+      </p:sp>
+      <p:sp>
+        <p:nvSpPr>
+          <p:cNvPr id="7" name="TextBox 6"/>
+          <p:cNvSpPr txBox="1"/>
+          <p:nvPr/>
+        </p:nvSpPr>
+        <p:spPr>
+          <a:xfrm>
+            <a:off x="4846320" y="1463040"/>
+            <a:ext cx="3749039" cy="4572000"/>
+          </a:xfrm>
+          <a:prstGeom prst="rect">
+            <a:avLst/>
+          </a:prstGeom>
+          <a:noFill/>
+        </p:spPr>
+        <p:txBody>
+          <a:bodyPr wrap="square">
+            <a:spAutoFit/>
+          </a:bodyPr>
+          <a:lstStyle/>
+          <a:p>
+            <a:pPr>
+              <a:spcAft>
+                <a:spcPts val="800"/>
+              </a:spcAft>
+              <a:defRPr sz="1200" b="1">
+                <a:solidFill>
+                  <a:srgbClr val="F8FAFC"/>
+                </a:solidFill>
+              </a:defRPr>
+            </a:pPr>
+            <a:r>
+              <a:t>Lead Collection Pipeline:</a:t>
+            </a:r>
+          </a:p>
+          <a:p>
+            <a:pPr>
+              <a:spcAft>
+                <a:spcPts val="800"/>
+              </a:spcAft>
+              <a:defRPr sz="1200" b="0">
+                <a:solidFill>
+                  <a:srgbClr val="94A3B8"/>
+                </a:solidFill>
+              </a:defRPr>
+            </a:pPr>
+            <a:r>
+              <a:t>• Clients submit estimation requests directly via form inputs.</a:t>
+            </a:r>
+          </a:p>
+          <a:p>
+            <a:pPr>
+              <a:spcAft>
+                <a:spcPts val="800"/>
+              </a:spcAft>
+              <a:defRPr sz="1200" b="0">
+                <a:solidFill>
+                  <a:srgbClr val="94A3B8"/>
+                </a:solidFill>
+              </a:defRPr>
+            </a:pPr>
+            <a:r>
+              <a:t>• Verifies email and phone formatting constraints.</a:t>
+            </a:r>
+          </a:p>
+          <a:p>
+            <a:pPr>
+              <a:spcAft>
+                <a:spcPts val="800"/>
+              </a:spcAft>
+              <a:defRPr sz="1200" b="1">
+                <a:solidFill>
+                  <a:srgbClr val="F8FAFC"/>
+                </a:solidFill>
+              </a:defRPr>
+            </a:pPr>
+            <a:r>
+              <a:t>Database Registration:</a:t>
+            </a:r>
+          </a:p>
+          <a:p>
+            <a:pPr>
+              <a:spcAft>
+                <a:spcPts val="800"/>
+              </a:spcAft>
+              <a:defRPr sz="1200" b="0">
+                <a:solidFill>
+                  <a:srgbClr val="94A3B8"/>
+                </a:solidFill>
+              </a:defRPr>
+            </a:pPr>
+            <a:r>
+              <a:t>• Leads are saved inside the Inquiries collection on MongoDB Atlas.</a:t>
             </a:r>
           </a:p>
         </p:txBody>
@@ -5830,7 +8584,7 @@
     <p:bg>
       <p:bgPr>
         <a:solidFill>
-          <a:srgbClr val="F8FAFC"/>
+          <a:srgbClr val="0F172A"/>
         </a:solidFill>
         <a:effectLst/>
       </p:bgPr>
@@ -5867,27 +8621,115 @@
             <a:pPr>
               <a:defRPr sz="2200" b="1">
                 <a:solidFill>
-                  <a:srgbClr val="0B0F19"/>
+                  <a:srgbClr val="2DD4BF"/>
                 </a:solidFill>
                 <a:latin typeface="Arial"/>
               </a:defRPr>
             </a:pPr>
             <a:r>
-              <a:t>LIVE DEMO - STEP 3: SECURE ADMIN PORTAL</a:t>
-            </a:r>
-          </a:p>
-        </p:txBody>
-      </p:sp>
-      <p:sp>
-        <p:nvSpPr>
-          <p:cNvPr id="3" name="TextBox 2"/>
+              <a:t>STEP 3: SECURE ADMINISTRATOR PORTAL</a:t>
+            </a:r>
+          </a:p>
+        </p:txBody>
+      </p:sp>
+      <p:sp>
+        <p:nvSpPr>
+          <p:cNvPr id="3" name="Rectangle 2"/>
+          <p:cNvSpPr/>
+          <p:nvPr/>
+        </p:nvSpPr>
+        <p:spPr>
+          <a:xfrm>
+            <a:off x="457200" y="914400"/>
+            <a:ext cx="8229600" cy="25400"/>
+          </a:xfrm>
+          <a:prstGeom prst="rect">
+            <a:avLst/>
+          </a:prstGeom>
+          <a:solidFill>
+            <a:srgbClr val="3B82F6"/>
+          </a:solidFill>
+          <a:ln>
+            <a:noFill/>
+          </a:ln>
+        </p:spPr>
+        <p:style>
+          <a:lnRef idx="1">
+            <a:schemeClr val="accent1"/>
+          </a:lnRef>
+          <a:fillRef idx="3">
+            <a:schemeClr val="accent1"/>
+          </a:fillRef>
+          <a:effectRef idx="2">
+            <a:schemeClr val="accent1"/>
+          </a:effectRef>
+          <a:fontRef idx="minor">
+            <a:schemeClr val="lt1"/>
+          </a:fontRef>
+        </p:style>
+        <p:txBody>
+          <a:bodyPr rtlCol="0" anchor="ctr"/>
+          <a:lstStyle/>
+          <a:p>
+            <a:pPr algn="ctr"/>
+          </a:p>
+        </p:txBody>
+      </p:sp>
+      <p:sp>
+        <p:nvSpPr>
+          <p:cNvPr id="4" name="Rounded Rectangle 3"/>
+          <p:cNvSpPr/>
+          <p:nvPr/>
+        </p:nvSpPr>
+        <p:spPr>
+          <a:xfrm>
+            <a:off x="457200" y="1371600"/>
+            <a:ext cx="3931920" cy="4754880"/>
+          </a:xfrm>
+          <a:prstGeom prst="roundRect">
+            <a:avLst/>
+          </a:prstGeom>
+          <a:solidFill>
+            <a:srgbClr val="1E293B"/>
+          </a:solidFill>
+          <a:ln w="19050">
+            <a:solidFill>
+              <a:srgbClr val="334155"/>
+            </a:solidFill>
+          </a:ln>
+        </p:spPr>
+        <p:style>
+          <a:lnRef idx="1">
+            <a:schemeClr val="accent1"/>
+          </a:lnRef>
+          <a:fillRef idx="3">
+            <a:schemeClr val="accent1"/>
+          </a:fillRef>
+          <a:effectRef idx="2">
+            <a:schemeClr val="accent1"/>
+          </a:effectRef>
+          <a:fontRef idx="minor">
+            <a:schemeClr val="lt1"/>
+          </a:fontRef>
+        </p:style>
+        <p:txBody>
+          <a:bodyPr rtlCol="0" anchor="ctr"/>
+          <a:lstStyle/>
+          <a:p>
+            <a:pPr algn="ctr"/>
+          </a:p>
+        </p:txBody>
+      </p:sp>
+      <p:sp>
+        <p:nvSpPr>
+          <p:cNvPr id="5" name="TextBox 4"/>
           <p:cNvSpPr txBox="1"/>
           <p:nvPr/>
         </p:nvSpPr>
         <p:spPr>
           <a:xfrm>
-            <a:off x="457200" y="1188720"/>
-            <a:ext cx="8229600" cy="5303520"/>
+            <a:off x="548640" y="1463040"/>
+            <a:ext cx="3749039" cy="4572000"/>
           </a:xfrm>
           <a:prstGeom prst="rect">
             <a:avLst/>
@@ -5901,144 +8743,220 @@
           <a:lstStyle/>
           <a:p>
             <a:pPr>
-              <a:spcBef>
+              <a:spcAft>
                 <a:spcPts val="800"/>
-              </a:spcBef>
-              <a:defRPr sz="1400" b="1">
-                <a:solidFill>
-                  <a:srgbClr val="1E293B"/>
-                </a:solidFill>
-                <a:latin typeface="Arial"/>
-              </a:defRPr>
-            </a:pPr>
-            <a:r>
-              <a:t>Accessing the secure administrative panel and backend authentication details:</a:t>
-            </a:r>
-          </a:p>
-          <a:p>
-            <a:pPr>
-              <a:spcBef>
+              </a:spcAft>
+              <a:defRPr sz="1200" b="1">
+                <a:solidFill>
+                  <a:srgbClr val="F8FAFC"/>
+                </a:solidFill>
+              </a:defRPr>
+            </a:pPr>
+            <a:r>
+              <a:t>Protected Route Entrance:</a:t>
+            </a:r>
+          </a:p>
+          <a:p>
+            <a:pPr>
+              <a:spcAft>
                 <a:spcPts val="800"/>
-              </a:spcBef>
-              <a:defRPr sz="1400" b="1">
-                <a:solidFill>
-                  <a:srgbClr val="1E293B"/>
-                </a:solidFill>
-                <a:latin typeface="Arial"/>
-              </a:defRPr>
-            </a:pPr>
-            <a:r>
-              <a:t>Protected Route Entrance:</a:t>
-            </a:r>
-          </a:p>
-          <a:p>
-            <a:pPr lvl="1">
-              <a:defRPr sz="1300">
-                <a:solidFill>
-                  <a:srgbClr val="475569"/>
-                </a:solidFill>
-                <a:latin typeface="Arial"/>
-              </a:defRPr>
-            </a:pPr>
-            <a:r>
-              <a:t>- Store administrator navigates to the private routing path in their browser.</a:t>
-            </a:r>
-          </a:p>
-          <a:p>
-            <a:pPr lvl="1">
-              <a:defRPr sz="1300">
-                <a:solidFill>
-                  <a:srgbClr val="475569"/>
-                </a:solidFill>
-                <a:latin typeface="Arial"/>
-              </a:defRPr>
-            </a:pPr>
-            <a:r>
-              <a:t>- Encounters a login card prompting for verified administrative credentials.</a:t>
-            </a:r>
-          </a:p>
-          <a:p>
-            <a:pPr>
-              <a:spcBef>
+              </a:spcAft>
+              <a:defRPr sz="1200" b="0">
+                <a:solidFill>
+                  <a:srgbClr val="94A3B8"/>
+                </a:solidFill>
+              </a:defRPr>
+            </a:pPr>
+            <a:r>
+              <a:t>• Admin navigates to the custom dashboard route.</a:t>
+            </a:r>
+          </a:p>
+          <a:p>
+            <a:pPr>
+              <a:spcAft>
                 <a:spcPts val="800"/>
-              </a:spcBef>
-              <a:defRPr sz="1400" b="1">
-                <a:solidFill>
-                  <a:srgbClr val="1E293B"/>
-                </a:solidFill>
-                <a:latin typeface="Arial"/>
-              </a:defRPr>
-            </a:pPr>
-            <a:r>
-              <a:t>Secure Handshake and Cookie Storage:</a:t>
-            </a:r>
-          </a:p>
-          <a:p>
-            <a:pPr lvl="1">
-              <a:defRPr sz="1300">
-                <a:solidFill>
-                  <a:srgbClr val="475569"/>
-                </a:solidFill>
-                <a:latin typeface="Arial"/>
-              </a:defRPr>
-            </a:pPr>
-            <a:r>
-              <a:t>- Enters matching credentials. The Node/Express server validates the hash using bcryptjs.</a:t>
-            </a:r>
-          </a:p>
-          <a:p>
-            <a:pPr lvl="1">
-              <a:defRPr sz="1300">
-                <a:solidFill>
-                  <a:srgbClr val="475569"/>
-                </a:solidFill>
-                <a:latin typeface="Arial"/>
-              </a:defRPr>
-            </a:pPr>
-            <a:r>
-              <a:t>- Returns a signed JSON Web Token (JWT) transmitted to the client browser inside HTTP-only cookies.</a:t>
-            </a:r>
-          </a:p>
-          <a:p>
-            <a:pPr>
-              <a:spcBef>
+              </a:spcAft>
+              <a:defRPr sz="1200" b="0">
+                <a:solidFill>
+                  <a:srgbClr val="94A3B8"/>
+                </a:solidFill>
+              </a:defRPr>
+            </a:pPr>
+            <a:r>
+              <a:t>• Encounter credentials inputs protected under Express routing rules.</a:t>
+            </a:r>
+          </a:p>
+          <a:p>
+            <a:pPr>
+              <a:spcAft>
                 <a:spcPts val="800"/>
-              </a:spcBef>
-              <a:defRPr sz="1400" b="1">
-                <a:solidFill>
-                  <a:srgbClr val="1E293B"/>
-                </a:solidFill>
-                <a:latin typeface="Arial"/>
-              </a:defRPr>
-            </a:pPr>
-            <a:r>
-              <a:t>Persistent Admin Session:</a:t>
-            </a:r>
-          </a:p>
-          <a:p>
-            <a:pPr lvl="1">
-              <a:defRPr sz="1300">
-                <a:solidFill>
-                  <a:srgbClr val="475569"/>
-                </a:solidFill>
-                <a:latin typeface="Arial"/>
-              </a:defRPr>
-            </a:pPr>
-            <a:r>
-              <a:t>- Session remains active in the browser. Admin can refresh or close windows without logging out.</a:t>
-            </a:r>
-          </a:p>
-          <a:p>
-            <a:pPr lvl="1">
-              <a:defRPr sz="1300">
-                <a:solidFill>
-                  <a:srgbClr val="475569"/>
-                </a:solidFill>
-                <a:latin typeface="Arial"/>
-              </a:defRPr>
-            </a:pPr>
-            <a:r>
-              <a:t>- All administrative data (subscribers list, customer inquiries) is safely guarded behind this session.</a:t>
+              </a:spcAft>
+              <a:defRPr sz="1200" b="1">
+                <a:solidFill>
+                  <a:srgbClr val="F8FAFC"/>
+                </a:solidFill>
+              </a:defRPr>
+            </a:pPr>
+            <a:r>
+              <a:t>Backend Authentication Handshake:</a:t>
+            </a:r>
+          </a:p>
+          <a:p>
+            <a:pPr>
+              <a:spcAft>
+                <a:spcPts val="800"/>
+              </a:spcAft>
+              <a:defRPr sz="1200" b="0">
+                <a:solidFill>
+                  <a:srgbClr val="94A3B8"/>
+                </a:solidFill>
+              </a:defRPr>
+            </a:pPr>
+            <a:r>
+              <a:t>• Express matches the hash values using bcryptjs.</a:t>
+            </a:r>
+          </a:p>
+          <a:p>
+            <a:pPr>
+              <a:spcAft>
+                <a:spcPts val="800"/>
+              </a:spcAft>
+              <a:defRPr sz="1200" b="0">
+                <a:solidFill>
+                  <a:srgbClr val="94A3B8"/>
+                </a:solidFill>
+              </a:defRPr>
+            </a:pPr>
+            <a:r>
+              <a:t>• Issues a signed JSON Web Token (JWT).</a:t>
+            </a:r>
+          </a:p>
+        </p:txBody>
+      </p:sp>
+      <p:sp>
+        <p:nvSpPr>
+          <p:cNvPr id="6" name="Rounded Rectangle 5"/>
+          <p:cNvSpPr/>
+          <p:nvPr/>
+        </p:nvSpPr>
+        <p:spPr>
+          <a:xfrm>
+            <a:off x="4754880" y="1371600"/>
+            <a:ext cx="3931920" cy="4754880"/>
+          </a:xfrm>
+          <a:prstGeom prst="roundRect">
+            <a:avLst/>
+          </a:prstGeom>
+          <a:solidFill>
+            <a:srgbClr val="1E293B"/>
+          </a:solidFill>
+          <a:ln w="19050">
+            <a:solidFill>
+              <a:srgbClr val="334155"/>
+            </a:solidFill>
+          </a:ln>
+        </p:spPr>
+        <p:style>
+          <a:lnRef idx="1">
+            <a:schemeClr val="accent1"/>
+          </a:lnRef>
+          <a:fillRef idx="3">
+            <a:schemeClr val="accent1"/>
+          </a:fillRef>
+          <a:effectRef idx="2">
+            <a:schemeClr val="accent1"/>
+          </a:effectRef>
+          <a:fontRef idx="minor">
+            <a:schemeClr val="lt1"/>
+          </a:fontRef>
+        </p:style>
+        <p:txBody>
+          <a:bodyPr rtlCol="0" anchor="ctr"/>
+          <a:lstStyle/>
+          <a:p>
+            <a:pPr algn="ctr"/>
+          </a:p>
+        </p:txBody>
+      </p:sp>
+      <p:sp>
+        <p:nvSpPr>
+          <p:cNvPr id="7" name="TextBox 6"/>
+          <p:cNvSpPr txBox="1"/>
+          <p:nvPr/>
+        </p:nvSpPr>
+        <p:spPr>
+          <a:xfrm>
+            <a:off x="4846320" y="1463040"/>
+            <a:ext cx="3749039" cy="4572000"/>
+          </a:xfrm>
+          <a:prstGeom prst="rect">
+            <a:avLst/>
+          </a:prstGeom>
+          <a:noFill/>
+        </p:spPr>
+        <p:txBody>
+          <a:bodyPr wrap="square">
+            <a:spAutoFit/>
+          </a:bodyPr>
+          <a:lstStyle/>
+          <a:p>
+            <a:pPr>
+              <a:spcAft>
+                <a:spcPts val="800"/>
+              </a:spcAft>
+              <a:defRPr sz="1200" b="1">
+                <a:solidFill>
+                  <a:srgbClr val="F8FAFC"/>
+                </a:solidFill>
+              </a:defRPr>
+            </a:pPr>
+            <a:r>
+              <a:t>Session Persistence Rules:</a:t>
+            </a:r>
+          </a:p>
+          <a:p>
+            <a:pPr>
+              <a:spcAft>
+                <a:spcPts val="800"/>
+              </a:spcAft>
+              <a:defRPr sz="1200" b="0">
+                <a:solidFill>
+                  <a:srgbClr val="94A3B8"/>
+                </a:solidFill>
+              </a:defRPr>
+            </a:pPr>
+            <a:r>
+              <a:t>• The JWT is dispatched via HttpOnly secure cookies.</a:t>
+            </a:r>
+          </a:p>
+          <a:p>
+            <a:pPr>
+              <a:spcAft>
+                <a:spcPts val="800"/>
+              </a:spcAft>
+              <a:defRPr sz="1200" b="0">
+                <a:solidFill>
+                  <a:srgbClr val="94A3B8"/>
+                </a:solidFill>
+              </a:defRPr>
+            </a:pPr>
+            <a:r>
+              <a:t>• Restricts client-side scripting access, neutralising XSS.</a:t>
+            </a:r>
+          </a:p>
+          <a:p>
+            <a:pPr>
+              <a:spcAft>
+                <a:spcPts val="800"/>
+              </a:spcAft>
+              <a:defRPr sz="1200" b="0">
+                <a:solidFill>
+                  <a:srgbClr val="94A3B8"/>
+                </a:solidFill>
+              </a:defRPr>
+            </a:pPr>
+            <a:r>
+              <a:t>• Persistent session logs allow admins to manage updates without recurring logins.</a:t>
             </a:r>
           </a:p>
         </p:txBody>
@@ -6057,7 +8975,7 @@
     <p:bg>
       <p:bgPr>
         <a:solidFill>
-          <a:srgbClr val="F8FAFC"/>
+          <a:srgbClr val="0F172A"/>
         </a:solidFill>
         <a:effectLst/>
       </p:bgPr>
@@ -6094,27 +9012,115 @@
             <a:pPr>
               <a:defRPr sz="2200" b="1">
                 <a:solidFill>
-                  <a:srgbClr val="0B0F19"/>
+                  <a:srgbClr val="2DD4BF"/>
                 </a:solidFill>
                 <a:latin typeface="Arial"/>
               </a:defRPr>
             </a:pPr>
             <a:r>
-              <a:t>LIVE DEMO - STEP 4: ADMIN PRICING CONTROLS</a:t>
-            </a:r>
-          </a:p>
-        </p:txBody>
-      </p:sp>
-      <p:sp>
-        <p:nvSpPr>
-          <p:cNvPr id="3" name="TextBox 2"/>
+              <a:t>STEP 4: PRICING ADJUSTMENT</a:t>
+            </a:r>
+          </a:p>
+        </p:txBody>
+      </p:sp>
+      <p:sp>
+        <p:nvSpPr>
+          <p:cNvPr id="3" name="Rectangle 2"/>
+          <p:cNvSpPr/>
+          <p:nvPr/>
+        </p:nvSpPr>
+        <p:spPr>
+          <a:xfrm>
+            <a:off x="457200" y="914400"/>
+            <a:ext cx="8229600" cy="25400"/>
+          </a:xfrm>
+          <a:prstGeom prst="rect">
+            <a:avLst/>
+          </a:prstGeom>
+          <a:solidFill>
+            <a:srgbClr val="3B82F6"/>
+          </a:solidFill>
+          <a:ln>
+            <a:noFill/>
+          </a:ln>
+        </p:spPr>
+        <p:style>
+          <a:lnRef idx="1">
+            <a:schemeClr val="accent1"/>
+          </a:lnRef>
+          <a:fillRef idx="3">
+            <a:schemeClr val="accent1"/>
+          </a:fillRef>
+          <a:effectRef idx="2">
+            <a:schemeClr val="accent1"/>
+          </a:effectRef>
+          <a:fontRef idx="minor">
+            <a:schemeClr val="lt1"/>
+          </a:fontRef>
+        </p:style>
+        <p:txBody>
+          <a:bodyPr rtlCol="0" anchor="ctr"/>
+          <a:lstStyle/>
+          <a:p>
+            <a:pPr algn="ctr"/>
+          </a:p>
+        </p:txBody>
+      </p:sp>
+      <p:sp>
+        <p:nvSpPr>
+          <p:cNvPr id="4" name="Rounded Rectangle 3"/>
+          <p:cNvSpPr/>
+          <p:nvPr/>
+        </p:nvSpPr>
+        <p:spPr>
+          <a:xfrm>
+            <a:off x="457200" y="1371600"/>
+            <a:ext cx="3931920" cy="4754880"/>
+          </a:xfrm>
+          <a:prstGeom prst="roundRect">
+            <a:avLst/>
+          </a:prstGeom>
+          <a:solidFill>
+            <a:srgbClr val="1E293B"/>
+          </a:solidFill>
+          <a:ln w="19050">
+            <a:solidFill>
+              <a:srgbClr val="334155"/>
+            </a:solidFill>
+          </a:ln>
+        </p:spPr>
+        <p:style>
+          <a:lnRef idx="1">
+            <a:schemeClr val="accent1"/>
+          </a:lnRef>
+          <a:fillRef idx="3">
+            <a:schemeClr val="accent1"/>
+          </a:fillRef>
+          <a:effectRef idx="2">
+            <a:schemeClr val="accent1"/>
+          </a:effectRef>
+          <a:fontRef idx="minor">
+            <a:schemeClr val="lt1"/>
+          </a:fontRef>
+        </p:style>
+        <p:txBody>
+          <a:bodyPr rtlCol="0" anchor="ctr"/>
+          <a:lstStyle/>
+          <a:p>
+            <a:pPr algn="ctr"/>
+          </a:p>
+        </p:txBody>
+      </p:sp>
+      <p:sp>
+        <p:nvSpPr>
+          <p:cNvPr id="5" name="TextBox 4"/>
           <p:cNvSpPr txBox="1"/>
           <p:nvPr/>
         </p:nvSpPr>
         <p:spPr>
           <a:xfrm>
-            <a:off x="457200" y="1188720"/>
-            <a:ext cx="8229600" cy="5303520"/>
+            <a:off x="548640" y="1463040"/>
+            <a:ext cx="3749039" cy="4572000"/>
           </a:xfrm>
           <a:prstGeom prst="rect">
             <a:avLst/>
@@ -6128,170 +9134,250 @@
           <a:lstStyle/>
           <a:p>
             <a:pPr>
-              <a:spcBef>
+              <a:spcAft>
                 <a:spcPts val="800"/>
-              </a:spcBef>
-              <a:defRPr sz="1400" b="1">
-                <a:solidFill>
-                  <a:srgbClr val="1E293B"/>
-                </a:solidFill>
-                <a:latin typeface="Arial"/>
-              </a:defRPr>
-            </a:pPr>
-            <a:r>
-              <a:t>Performing price management operations inside the administrator dashboard:</a:t>
-            </a:r>
-          </a:p>
-          <a:p>
-            <a:pPr>
-              <a:spcBef>
+              </a:spcAft>
+              <a:defRPr sz="1200" b="1">
+                <a:solidFill>
+                  <a:srgbClr val="F8FAFC"/>
+                </a:solidFill>
+              </a:defRPr>
+            </a:pPr>
+            <a:r>
+              <a:t>Pricing Matrix Modification:</a:t>
+            </a:r>
+          </a:p>
+          <a:p>
+            <a:pPr>
+              <a:spcAft>
                 <a:spcPts val="800"/>
-              </a:spcBef>
-              <a:defRPr sz="1400" b="1">
-                <a:solidFill>
-                  <a:srgbClr val="1E293B"/>
-                </a:solidFill>
-                <a:latin typeface="Arial"/>
-              </a:defRPr>
-            </a:pPr>
-            <a:r>
-              <a:t>Price Update Workflow:</a:t>
-            </a:r>
-          </a:p>
-          <a:p>
-            <a:pPr lvl="1">
-              <a:defRPr sz="1300">
-                <a:solidFill>
-                  <a:srgbClr val="475569"/>
-                </a:solidFill>
-                <a:latin typeface="Arial"/>
-              </a:defRPr>
-            </a:pPr>
-            <a:r>
-              <a:t>- Admin selects a product from the editable grid (e.g. JSW Steel or ACC Cement).</a:t>
-            </a:r>
-          </a:p>
-          <a:p>
-            <a:pPr lvl="1">
-              <a:defRPr sz="1300">
-                <a:solidFill>
-                  <a:srgbClr val="475569"/>
-                </a:solidFill>
-                <a:latin typeface="Arial"/>
-              </a:defRPr>
-            </a:pPr>
-            <a:r>
-              <a:t>- Types a new rate inside the input field and clicks the update icon.</a:t>
-            </a:r>
-          </a:p>
-          <a:p>
-            <a:pPr>
-              <a:spcBef>
+              </a:spcAft>
+              <a:defRPr sz="1200" b="0">
+                <a:solidFill>
+                  <a:srgbClr val="94A3B8"/>
+                </a:solidFill>
+              </a:defRPr>
+            </a:pPr>
+            <a:r>
+              <a:t>• Admin edits pricing directly inside the dashboard grid.</a:t>
+            </a:r>
+          </a:p>
+          <a:p>
+            <a:pPr>
+              <a:spcAft>
                 <a:spcPts val="800"/>
-              </a:spcBef>
-              <a:defRPr sz="1400" b="1">
-                <a:solidFill>
-                  <a:srgbClr val="1E293B"/>
-                </a:solidFill>
-                <a:latin typeface="Arial"/>
-              </a:defRPr>
-            </a:pPr>
-            <a:r>
-              <a:t>Live Database Mutation:</a:t>
-            </a:r>
-          </a:p>
-          <a:p>
-            <a:pPr lvl="1">
-              <a:defRPr sz="1300">
-                <a:solidFill>
-                  <a:srgbClr val="475569"/>
-                </a:solidFill>
-                <a:latin typeface="Arial"/>
-              </a:defRPr>
-            </a:pPr>
-            <a:r>
-              <a:t>- React dispatches a PUT request containing JWT cookie payloads.</a:t>
-            </a:r>
-          </a:p>
-          <a:p>
-            <a:pPr lvl="1">
-              <a:defRPr sz="1300">
-                <a:solidFill>
-                  <a:srgbClr val="475569"/>
-                </a:solidFill>
-                <a:latin typeface="Arial"/>
-              </a:defRPr>
-            </a:pPr>
-            <a:r>
-              <a:t>- Express backend updates the MongoDB document, moving the current price to the historic array.</a:t>
-            </a:r>
-          </a:p>
-          <a:p>
-            <a:pPr>
-              <a:spcBef>
+              </a:spcAft>
+              <a:defRPr sz="1200" b="0">
+                <a:solidFill>
+                  <a:srgbClr val="94A3B8"/>
+                </a:solidFill>
+              </a:defRPr>
+            </a:pPr>
+            <a:r>
+              <a:t>• PUT updates are sent securely with JWT authentication.</a:t>
+            </a:r>
+          </a:p>
+          <a:p>
+            <a:pPr>
+              <a:spcAft>
                 <a:spcPts val="800"/>
-              </a:spcBef>
-              <a:defRPr sz="1400" b="1">
-                <a:solidFill>
-                  <a:srgbClr val="1E293B"/>
-                </a:solidFill>
-                <a:latin typeface="Arial"/>
-              </a:defRPr>
-            </a:pPr>
-            <a:r>
-              <a:t>Colored Visual Trend Graphs:</a:t>
-            </a:r>
-          </a:p>
-          <a:p>
-            <a:pPr lvl="1">
-              <a:defRPr sz="1300">
-                <a:solidFill>
-                  <a:srgbClr val="475569"/>
-                </a:solidFill>
-                <a:latin typeface="Arial"/>
-              </a:defRPr>
-            </a:pPr>
-            <a:r>
-              <a:t>- The UI renders trend indicators dynamically based on the update:</a:t>
-            </a:r>
-          </a:p>
-          <a:p>
-            <a:pPr lvl="1">
-              <a:defRPr sz="1300">
-                <a:solidFill>
-                  <a:srgbClr val="475569"/>
-                </a:solidFill>
-                <a:latin typeface="Arial"/>
-              </a:defRPr>
-            </a:pPr>
-            <a:r>
-              <a:t>  • Upward Green graph charts indicate a rate hike.</a:t>
-            </a:r>
-          </a:p>
-          <a:p>
-            <a:pPr lvl="1">
-              <a:defRPr sz="1300">
-                <a:solidFill>
-                  <a:srgbClr val="475569"/>
-                </a:solidFill>
-                <a:latin typeface="Arial"/>
-              </a:defRPr>
-            </a:pPr>
-            <a:r>
-              <a:t>  • Downward Red graph charts indicate a rate drop.</a:t>
-            </a:r>
-          </a:p>
-          <a:p>
-            <a:pPr lvl="1">
-              <a:defRPr sz="1300">
-                <a:solidFill>
-                  <a:srgbClr val="475569"/>
-                </a:solidFill>
-                <a:latin typeface="Arial"/>
-              </a:defRPr>
-            </a:pPr>
-            <a:r>
-              <a:t>  • Horizontal Blue lines indicate a stable rate.</a:t>
+              </a:spcAft>
+              <a:defRPr sz="1200" b="1">
+                <a:solidFill>
+                  <a:srgbClr val="F8FAFC"/>
+                </a:solidFill>
+              </a:defRPr>
+            </a:pPr>
+            <a:r>
+              <a:t>Mongoose Mutations:</a:t>
+            </a:r>
+          </a:p>
+          <a:p>
+            <a:pPr>
+              <a:spcAft>
+                <a:spcPts val="800"/>
+              </a:spcAft>
+              <a:defRPr sz="1200" b="0">
+                <a:solidFill>
+                  <a:srgbClr val="94A3B8"/>
+                </a:solidFill>
+              </a:defRPr>
+            </a:pPr>
+            <a:r>
+              <a:t>• Mongoose updates the database collection.</a:t>
+            </a:r>
+          </a:p>
+          <a:p>
+            <a:pPr>
+              <a:spcAft>
+                <a:spcPts val="800"/>
+              </a:spcAft>
+              <a:defRPr sz="1200" b="0">
+                <a:solidFill>
+                  <a:srgbClr val="94A3B8"/>
+                </a:solidFill>
+              </a:defRPr>
+            </a:pPr>
+            <a:r>
+              <a:t>• Shifts current price to the historic array database.</a:t>
+            </a:r>
+          </a:p>
+        </p:txBody>
+      </p:sp>
+      <p:sp>
+        <p:nvSpPr>
+          <p:cNvPr id="6" name="Rounded Rectangle 5"/>
+          <p:cNvSpPr/>
+          <p:nvPr/>
+        </p:nvSpPr>
+        <p:spPr>
+          <a:xfrm>
+            <a:off x="4754880" y="1371600"/>
+            <a:ext cx="3931920" cy="4754880"/>
+          </a:xfrm>
+          <a:prstGeom prst="roundRect">
+            <a:avLst/>
+          </a:prstGeom>
+          <a:solidFill>
+            <a:srgbClr val="1E293B"/>
+          </a:solidFill>
+          <a:ln w="19050">
+            <a:solidFill>
+              <a:srgbClr val="334155"/>
+            </a:solidFill>
+          </a:ln>
+        </p:spPr>
+        <p:style>
+          <a:lnRef idx="1">
+            <a:schemeClr val="accent1"/>
+          </a:lnRef>
+          <a:fillRef idx="3">
+            <a:schemeClr val="accent1"/>
+          </a:fillRef>
+          <a:effectRef idx="2">
+            <a:schemeClr val="accent1"/>
+          </a:effectRef>
+          <a:fontRef idx="minor">
+            <a:schemeClr val="lt1"/>
+          </a:fontRef>
+        </p:style>
+        <p:txBody>
+          <a:bodyPr rtlCol="0" anchor="ctr"/>
+          <a:lstStyle/>
+          <a:p>
+            <a:pPr algn="ctr"/>
+          </a:p>
+        </p:txBody>
+      </p:sp>
+      <p:sp>
+        <p:nvSpPr>
+          <p:cNvPr id="7" name="TextBox 6"/>
+          <p:cNvSpPr txBox="1"/>
+          <p:nvPr/>
+        </p:nvSpPr>
+        <p:spPr>
+          <a:xfrm>
+            <a:off x="4846320" y="1463040"/>
+            <a:ext cx="3749039" cy="4572000"/>
+          </a:xfrm>
+          <a:prstGeom prst="rect">
+            <a:avLst/>
+          </a:prstGeom>
+          <a:noFill/>
+        </p:spPr>
+        <p:txBody>
+          <a:bodyPr wrap="square">
+            <a:spAutoFit/>
+          </a:bodyPr>
+          <a:lstStyle/>
+          <a:p>
+            <a:pPr>
+              <a:spcAft>
+                <a:spcPts val="800"/>
+              </a:spcAft>
+              <a:defRPr sz="1200" b="1">
+                <a:solidFill>
+                  <a:srgbClr val="F8FAFC"/>
+                </a:solidFill>
+              </a:defRPr>
+            </a:pPr>
+            <a:r>
+              <a:t>Trend Indicators Trigger:</a:t>
+            </a:r>
+          </a:p>
+          <a:p>
+            <a:pPr>
+              <a:spcAft>
+                <a:spcPts val="800"/>
+              </a:spcAft>
+              <a:defRPr sz="1200" b="0">
+                <a:solidFill>
+                  <a:srgbClr val="94A3B8"/>
+                </a:solidFill>
+              </a:defRPr>
+            </a:pPr>
+            <a:r>
+              <a:t>• The system compares the new rate with preceding indices.</a:t>
+            </a:r>
+          </a:p>
+          <a:p>
+            <a:pPr>
+              <a:spcAft>
+                <a:spcPts val="800"/>
+              </a:spcAft>
+              <a:defRPr sz="1200" b="1">
+                <a:solidFill>
+                  <a:srgbClr val="F8FAFC"/>
+                </a:solidFill>
+              </a:defRPr>
+            </a:pPr>
+            <a:r>
+              <a:t>• Automatically applies color coding:</a:t>
+            </a:r>
+          </a:p>
+          <a:p>
+            <a:pPr>
+              <a:spcAft>
+                <a:spcPts val="800"/>
+              </a:spcAft>
+              <a:defRPr sz="1200" b="0">
+                <a:solidFill>
+                  <a:srgbClr val="94A3B8"/>
+                </a:solidFill>
+              </a:defRPr>
+            </a:pPr>
+            <a:r>
+              <a:t>  - Rate Hike: Renders upward green trend indicators.</a:t>
+            </a:r>
+          </a:p>
+          <a:p>
+            <a:pPr>
+              <a:spcAft>
+                <a:spcPts val="800"/>
+              </a:spcAft>
+              <a:defRPr sz="1200" b="0">
+                <a:solidFill>
+                  <a:srgbClr val="94A3B8"/>
+                </a:solidFill>
+              </a:defRPr>
+            </a:pPr>
+            <a:r>
+              <a:t>  - Rate Drop: Renders downward red trend indicators.</a:t>
+            </a:r>
+          </a:p>
+          <a:p>
+            <a:pPr>
+              <a:spcAft>
+                <a:spcPts val="800"/>
+              </a:spcAft>
+              <a:defRPr sz="1200" b="0">
+                <a:solidFill>
+                  <a:srgbClr val="94A3B8"/>
+                </a:solidFill>
+              </a:defRPr>
+            </a:pPr>
+            <a:r>
+              <a:t>  - Stable: Renders horizontal blue indicators.</a:t>
             </a:r>
           </a:p>
         </p:txBody>
@@ -6310,7 +9396,7 @@
     <p:bg>
       <p:bgPr>
         <a:solidFill>
-          <a:srgbClr val="F8FAFC"/>
+          <a:srgbClr val="0F172A"/>
         </a:solidFill>
         <a:effectLst/>
       </p:bgPr>
@@ -6347,27 +9433,115 @@
             <a:pPr>
               <a:defRPr sz="2200" b="1">
                 <a:solidFill>
-                  <a:srgbClr val="0B0F19"/>
+                  <a:srgbClr val="2DD4BF"/>
                 </a:solidFill>
                 <a:latin typeface="Arial"/>
               </a:defRPr>
             </a:pPr>
             <a:r>
-              <a:t>LIVE DEMO - STEP 5: MULTI-CHANNEL ALERTS</a:t>
-            </a:r>
-          </a:p>
-        </p:txBody>
-      </p:sp>
-      <p:sp>
-        <p:nvSpPr>
-          <p:cNvPr id="3" name="TextBox 2"/>
+              <a:t>STEP 5: ALERT DISPATCHER ENGINE</a:t>
+            </a:r>
+          </a:p>
+        </p:txBody>
+      </p:sp>
+      <p:sp>
+        <p:nvSpPr>
+          <p:cNvPr id="3" name="Rectangle 2"/>
+          <p:cNvSpPr/>
+          <p:nvPr/>
+        </p:nvSpPr>
+        <p:spPr>
+          <a:xfrm>
+            <a:off x="457200" y="914400"/>
+            <a:ext cx="8229600" cy="25400"/>
+          </a:xfrm>
+          <a:prstGeom prst="rect">
+            <a:avLst/>
+          </a:prstGeom>
+          <a:solidFill>
+            <a:srgbClr val="3B82F6"/>
+          </a:solidFill>
+          <a:ln>
+            <a:noFill/>
+          </a:ln>
+        </p:spPr>
+        <p:style>
+          <a:lnRef idx="1">
+            <a:schemeClr val="accent1"/>
+          </a:lnRef>
+          <a:fillRef idx="3">
+            <a:schemeClr val="accent1"/>
+          </a:fillRef>
+          <a:effectRef idx="2">
+            <a:schemeClr val="accent1"/>
+          </a:effectRef>
+          <a:fontRef idx="minor">
+            <a:schemeClr val="lt1"/>
+          </a:fontRef>
+        </p:style>
+        <p:txBody>
+          <a:bodyPr rtlCol="0" anchor="ctr"/>
+          <a:lstStyle/>
+          <a:p>
+            <a:pPr algn="ctr"/>
+          </a:p>
+        </p:txBody>
+      </p:sp>
+      <p:sp>
+        <p:nvSpPr>
+          <p:cNvPr id="4" name="Rounded Rectangle 3"/>
+          <p:cNvSpPr/>
+          <p:nvPr/>
+        </p:nvSpPr>
+        <p:spPr>
+          <a:xfrm>
+            <a:off x="457200" y="1371600"/>
+            <a:ext cx="3931920" cy="4754880"/>
+          </a:xfrm>
+          <a:prstGeom prst="roundRect">
+            <a:avLst/>
+          </a:prstGeom>
+          <a:solidFill>
+            <a:srgbClr val="1E293B"/>
+          </a:solidFill>
+          <a:ln w="19050">
+            <a:solidFill>
+              <a:srgbClr val="334155"/>
+            </a:solidFill>
+          </a:ln>
+        </p:spPr>
+        <p:style>
+          <a:lnRef idx="1">
+            <a:schemeClr val="accent1"/>
+          </a:lnRef>
+          <a:fillRef idx="3">
+            <a:schemeClr val="accent1"/>
+          </a:fillRef>
+          <a:effectRef idx="2">
+            <a:schemeClr val="accent1"/>
+          </a:effectRef>
+          <a:fontRef idx="minor">
+            <a:schemeClr val="lt1"/>
+          </a:fontRef>
+        </p:style>
+        <p:txBody>
+          <a:bodyPr rtlCol="0" anchor="ctr"/>
+          <a:lstStyle/>
+          <a:p>
+            <a:pPr algn="ctr"/>
+          </a:p>
+        </p:txBody>
+      </p:sp>
+      <p:sp>
+        <p:nvSpPr>
+          <p:cNvPr id="5" name="TextBox 4"/>
           <p:cNvSpPr txBox="1"/>
           <p:nvPr/>
         </p:nvSpPr>
         <p:spPr>
           <a:xfrm>
-            <a:off x="457200" y="1188720"/>
-            <a:ext cx="8229600" cy="5303520"/>
+            <a:off x="548640" y="1463040"/>
+            <a:ext cx="3749039" cy="4572000"/>
           </a:xfrm>
           <a:prstGeom prst="rect">
             <a:avLst/>
@@ -6381,130 +9555,186 @@
           <a:lstStyle/>
           <a:p>
             <a:pPr>
-              <a:spcBef>
+              <a:spcAft>
                 <a:spcPts val="800"/>
-              </a:spcBef>
-              <a:defRPr sz="1400" b="1">
-                <a:solidFill>
-                  <a:srgbClr val="1E293B"/>
-                </a:solidFill>
-                <a:latin typeface="Arial"/>
-              </a:defRPr>
-            </a:pPr>
-            <a:r>
-              <a:t>Triggering the notification broadcast engine from the administrator interface:</a:t>
-            </a:r>
-          </a:p>
-          <a:p>
-            <a:pPr>
-              <a:spcBef>
+              </a:spcAft>
+              <a:defRPr sz="1200" b="1">
+                <a:solidFill>
+                  <a:srgbClr val="F8FAFC"/>
+                </a:solidFill>
+              </a:defRPr>
+            </a:pPr>
+            <a:r>
+              <a:t>Consolidated Alert Trigger:</a:t>
+            </a:r>
+          </a:p>
+          <a:p>
+            <a:pPr>
+              <a:spcAft>
                 <a:spcPts val="800"/>
-              </a:spcBef>
-              <a:defRPr sz="1400" b="1">
-                <a:solidFill>
-                  <a:srgbClr val="1E293B"/>
-                </a:solidFill>
-                <a:latin typeface="Arial"/>
-              </a:defRPr>
-            </a:pPr>
-            <a:r>
-              <a:t>Unified Notification Trigger:</a:t>
-            </a:r>
-          </a:p>
-          <a:p>
-            <a:pPr lvl="1">
-              <a:defRPr sz="1300">
-                <a:solidFill>
-                  <a:srgbClr val="475569"/>
-                </a:solidFill>
-                <a:latin typeface="Arial"/>
-              </a:defRPr>
-            </a:pPr>
-            <a:r>
-              <a:t>- From the admin dashboard, the manager clicks a single 'Broadcast Alerts' button.</a:t>
-            </a:r>
-          </a:p>
-          <a:p>
-            <a:pPr lvl="1">
-              <a:defRPr sz="1300">
-                <a:solidFill>
-                  <a:srgbClr val="475569"/>
-                </a:solidFill>
-                <a:latin typeface="Arial"/>
-              </a:defRPr>
-            </a:pPr>
-            <a:r>
-              <a:t>- Instead of individual messages, the system compiles every modified price into a single unified alert.</a:t>
-            </a:r>
-          </a:p>
-          <a:p>
-            <a:pPr>
-              <a:spcBef>
+              </a:spcAft>
+              <a:defRPr sz="1200" b="0">
+                <a:solidFill>
+                  <a:srgbClr val="94A3B8"/>
+                </a:solidFill>
+              </a:defRPr>
+            </a:pPr>
+            <a:r>
+              <a:t>• Admin triggers broadcast with a single button.</a:t>
+            </a:r>
+          </a:p>
+          <a:p>
+            <a:pPr>
+              <a:spcAft>
                 <a:spcPts val="800"/>
-              </a:spcBef>
-              <a:defRPr sz="1400" b="1">
-                <a:solidFill>
-                  <a:srgbClr val="1E293B"/>
-                </a:solidFill>
-                <a:latin typeface="Arial"/>
-              </a:defRPr>
-            </a:pPr>
-            <a:r>
-              <a:t>Broadcast Channels Dispatch:</a:t>
-            </a:r>
-          </a:p>
-          <a:p>
-            <a:pPr lvl="1">
-              <a:defRPr sz="1300">
-                <a:solidFill>
-                  <a:srgbClr val="475569"/>
-                </a:solidFill>
-                <a:latin typeface="Arial"/>
-              </a:defRPr>
-            </a:pPr>
-            <a:r>
-              <a:t>- Dispatches HTTP REST calls to the WhatsApp API and SMTP services (Nodemailer).</a:t>
-            </a:r>
-          </a:p>
-          <a:p>
-            <a:pPr>
-              <a:spcBef>
+              </a:spcAft>
+              <a:defRPr sz="1200" b="0">
+                <a:solidFill>
+                  <a:srgbClr val="94A3B8"/>
+                </a:solidFill>
+              </a:defRPr>
+            </a:pPr>
+            <a:r>
+              <a:t>• Combines all price mutations into a single alert.</a:t>
+            </a:r>
+          </a:p>
+          <a:p>
+            <a:pPr>
+              <a:spcAft>
                 <a:spcPts val="800"/>
-              </a:spcBef>
-              <a:defRPr sz="1400" b="1">
-                <a:solidFill>
-                  <a:srgbClr val="1E293B"/>
-                </a:solidFill>
-                <a:latin typeface="Arial"/>
-              </a:defRPr>
-            </a:pPr>
-            <a:r>
-              <a:t>Message Formatting:</a:t>
-            </a:r>
-          </a:p>
-          <a:p>
-            <a:pPr lvl="1">
-              <a:defRPr sz="1300">
-                <a:solidFill>
-                  <a:srgbClr val="475569"/>
-                </a:solidFill>
-                <a:latin typeface="Arial"/>
-              </a:defRPr>
-            </a:pPr>
-            <a:r>
-              <a:t>- Sends a structured broadcast including updated pricing, struck-through historic rates, and indicators.</a:t>
-            </a:r>
-          </a:p>
-          <a:p>
-            <a:pPr>
-              <a:spcBef>
+              </a:spcAft>
+              <a:defRPr sz="1200" b="1">
+                <a:solidFill>
+                  <a:srgbClr val="F8FAFC"/>
+                </a:solidFill>
+              </a:defRPr>
+            </a:pPr>
+            <a:r>
+              <a:t>WhatsApp Cloud Dispatcher:</a:t>
+            </a:r>
+          </a:p>
+          <a:p>
+            <a:pPr>
+              <a:spcAft>
                 <a:spcPts val="800"/>
-              </a:spcBef>
-              <a:defRPr sz="1400" b="1">
-                <a:solidFill>
-                  <a:srgbClr val="1E293B"/>
-                </a:solidFill>
-                <a:latin typeface="Arial"/>
+              </a:spcAft>
+              <a:defRPr sz="1200" b="0">
+                <a:solidFill>
+                  <a:srgbClr val="94A3B8"/>
+                </a:solidFill>
+              </a:defRPr>
+            </a:pPr>
+            <a:r>
+              <a:t>• Sends notifications containing struck-through prior rates and colored graphs.</a:t>
+            </a:r>
+          </a:p>
+        </p:txBody>
+      </p:sp>
+      <p:sp>
+        <p:nvSpPr>
+          <p:cNvPr id="6" name="Rounded Rectangle 5"/>
+          <p:cNvSpPr/>
+          <p:nvPr/>
+        </p:nvSpPr>
+        <p:spPr>
+          <a:xfrm>
+            <a:off x="4754880" y="1371600"/>
+            <a:ext cx="3931920" cy="4754880"/>
+          </a:xfrm>
+          <a:prstGeom prst="roundRect">
+            <a:avLst/>
+          </a:prstGeom>
+          <a:solidFill>
+            <a:srgbClr val="1E293B"/>
+          </a:solidFill>
+          <a:ln w="19050">
+            <a:solidFill>
+              <a:srgbClr val="334155"/>
+            </a:solidFill>
+          </a:ln>
+        </p:spPr>
+        <p:style>
+          <a:lnRef idx="1">
+            <a:schemeClr val="accent1"/>
+          </a:lnRef>
+          <a:fillRef idx="3">
+            <a:schemeClr val="accent1"/>
+          </a:fillRef>
+          <a:effectRef idx="2">
+            <a:schemeClr val="accent1"/>
+          </a:effectRef>
+          <a:fontRef idx="minor">
+            <a:schemeClr val="lt1"/>
+          </a:fontRef>
+        </p:style>
+        <p:txBody>
+          <a:bodyPr rtlCol="0" anchor="ctr"/>
+          <a:lstStyle/>
+          <a:p>
+            <a:pPr algn="ctr"/>
+          </a:p>
+        </p:txBody>
+      </p:sp>
+      <p:sp>
+        <p:nvSpPr>
+          <p:cNvPr id="7" name="TextBox 6"/>
+          <p:cNvSpPr txBox="1"/>
+          <p:nvPr/>
+        </p:nvSpPr>
+        <p:spPr>
+          <a:xfrm>
+            <a:off x="4846320" y="1463040"/>
+            <a:ext cx="3749039" cy="4572000"/>
+          </a:xfrm>
+          <a:prstGeom prst="rect">
+            <a:avLst/>
+          </a:prstGeom>
+          <a:noFill/>
+        </p:spPr>
+        <p:txBody>
+          <a:bodyPr wrap="square">
+            <a:spAutoFit/>
+          </a:bodyPr>
+          <a:lstStyle/>
+          <a:p>
+            <a:pPr>
+              <a:spcAft>
+                <a:spcPts val="800"/>
+              </a:spcAft>
+              <a:defRPr sz="1200" b="1">
+                <a:solidFill>
+                  <a:srgbClr val="F8FAFC"/>
+                </a:solidFill>
+              </a:defRPr>
+            </a:pPr>
+            <a:r>
+              <a:t>SMTP Email Delivery:</a:t>
+            </a:r>
+          </a:p>
+          <a:p>
+            <a:pPr>
+              <a:spcAft>
+                <a:spcPts val="800"/>
+              </a:spcAft>
+              <a:defRPr sz="1200" b="0">
+                <a:solidFill>
+                  <a:srgbClr val="94A3B8"/>
+                </a:solidFill>
+              </a:defRPr>
+            </a:pPr>
+            <a:r>
+              <a:t>• Nodemailer sends detailed newsletters to subscribers.</a:t>
+            </a:r>
+          </a:p>
+          <a:p>
+            <a:pPr>
+              <a:spcAft>
+                <a:spcPts val="800"/>
+              </a:spcAft>
+              <a:defRPr sz="1200" b="1">
+                <a:solidFill>
+                  <a:srgbClr val="F8FAFC"/>
+                </a:solidFill>
               </a:defRPr>
             </a:pPr>
             <a:r>
@@ -6512,16 +9742,33 @@
             </a:r>
           </a:p>
           <a:p>
-            <a:pPr lvl="1">
-              <a:defRPr sz="1300">
-                <a:solidFill>
-                  <a:srgbClr val="475569"/>
-                </a:solidFill>
-                <a:latin typeface="Arial"/>
-              </a:defRPr>
-            </a:pPr>
-            <a:r>
-              <a:t>- Public users currently browsing the website receive in-app toast alerts about updated rates.</a:t>
+            <a:pPr>
+              <a:spcAft>
+                <a:spcPts val="800"/>
+              </a:spcAft>
+              <a:defRPr sz="1200" b="0">
+                <a:solidFill>
+                  <a:srgbClr val="94A3B8"/>
+                </a:solidFill>
+              </a:defRPr>
+            </a:pPr>
+            <a:r>
+              <a:t>• Currently active visitors receive instant toast alerts.</a:t>
+            </a:r>
+          </a:p>
+          <a:p>
+            <a:pPr>
+              <a:spcAft>
+                <a:spcPts val="800"/>
+              </a:spcAft>
+              <a:defRPr sz="1200" b="0">
+                <a:solidFill>
+                  <a:srgbClr val="94A3B8"/>
+                </a:solidFill>
+              </a:defRPr>
+            </a:pPr>
+            <a:r>
+              <a:t>• Ensures all clients are notified of changes.</a:t>
             </a:r>
           </a:p>
         </p:txBody>
@@ -6540,7 +9787,7 @@
     <p:bg>
       <p:bgPr>
         <a:solidFill>
-          <a:srgbClr val="F8FAFC"/>
+          <a:srgbClr val="0F172A"/>
         </a:solidFill>
         <a:effectLst/>
       </p:bgPr>
@@ -6577,7 +9824,7 @@
             <a:pPr>
               <a:defRPr sz="2200" b="1">
                 <a:solidFill>
-                  <a:srgbClr val="0B0F19"/>
+                  <a:srgbClr val="2DD4BF"/>
                 </a:solidFill>
                 <a:latin typeface="Arial"/>
               </a:defRPr>
@@ -6590,14 +9837,102 @@
       </p:sp>
       <p:sp>
         <p:nvSpPr>
-          <p:cNvPr id="3" name="TextBox 2"/>
+          <p:cNvPr id="3" name="Rectangle 2"/>
+          <p:cNvSpPr/>
+          <p:nvPr/>
+        </p:nvSpPr>
+        <p:spPr>
+          <a:xfrm>
+            <a:off x="457200" y="914400"/>
+            <a:ext cx="8229600" cy="25400"/>
+          </a:xfrm>
+          <a:prstGeom prst="rect">
+            <a:avLst/>
+          </a:prstGeom>
+          <a:solidFill>
+            <a:srgbClr val="3B82F6"/>
+          </a:solidFill>
+          <a:ln>
+            <a:noFill/>
+          </a:ln>
+        </p:spPr>
+        <p:style>
+          <a:lnRef idx="1">
+            <a:schemeClr val="accent1"/>
+          </a:lnRef>
+          <a:fillRef idx="3">
+            <a:schemeClr val="accent1"/>
+          </a:fillRef>
+          <a:effectRef idx="2">
+            <a:schemeClr val="accent1"/>
+          </a:effectRef>
+          <a:fontRef idx="minor">
+            <a:schemeClr val="lt1"/>
+          </a:fontRef>
+        </p:style>
+        <p:txBody>
+          <a:bodyPr rtlCol="0" anchor="ctr"/>
+          <a:lstStyle/>
+          <a:p>
+            <a:pPr algn="ctr"/>
+          </a:p>
+        </p:txBody>
+      </p:sp>
+      <p:sp>
+        <p:nvSpPr>
+          <p:cNvPr id="4" name="Rounded Rectangle 3"/>
+          <p:cNvSpPr/>
+          <p:nvPr/>
+        </p:nvSpPr>
+        <p:spPr>
+          <a:xfrm>
+            <a:off x="457200" y="1371600"/>
+            <a:ext cx="2560320" cy="4754880"/>
+          </a:xfrm>
+          <a:prstGeom prst="roundRect">
+            <a:avLst/>
+          </a:prstGeom>
+          <a:solidFill>
+            <a:srgbClr val="1E293B"/>
+          </a:solidFill>
+          <a:ln w="19050">
+            <a:solidFill>
+              <a:srgbClr val="334155"/>
+            </a:solidFill>
+          </a:ln>
+        </p:spPr>
+        <p:style>
+          <a:lnRef idx="1">
+            <a:schemeClr val="accent1"/>
+          </a:lnRef>
+          <a:fillRef idx="3">
+            <a:schemeClr val="accent1"/>
+          </a:fillRef>
+          <a:effectRef idx="2">
+            <a:schemeClr val="accent1"/>
+          </a:effectRef>
+          <a:fontRef idx="minor">
+            <a:schemeClr val="lt1"/>
+          </a:fontRef>
+        </p:style>
+        <p:txBody>
+          <a:bodyPr rtlCol="0" anchor="ctr"/>
+          <a:lstStyle/>
+          <a:p>
+            <a:pPr algn="ctr"/>
+          </a:p>
+        </p:txBody>
+      </p:sp>
+      <p:sp>
+        <p:nvSpPr>
+          <p:cNvPr id="5" name="TextBox 4"/>
           <p:cNvSpPr txBox="1"/>
           <p:nvPr/>
         </p:nvSpPr>
         <p:spPr>
           <a:xfrm>
-            <a:off x="457200" y="1188720"/>
-            <a:ext cx="8229600" cy="5303520"/>
+            <a:off x="548640" y="1463040"/>
+            <a:ext cx="2377440" cy="4572000"/>
           </a:xfrm>
           <a:prstGeom prst="rect">
             <a:avLst/>
@@ -6610,190 +9945,421 @@
           </a:bodyPr>
           <a:lstStyle/>
           <a:p>
-            <a:pPr>
-              <a:spcBef>
-                <a:spcPts val="800"/>
-              </a:spcBef>
-              <a:defRPr sz="1400" b="1">
-                <a:solidFill>
-                  <a:srgbClr val="1E293B"/>
-                </a:solidFill>
-                <a:latin typeface="Arial"/>
-              </a:defRPr>
-            </a:pPr>
-            <a:r>
-              <a:t>The final as-built MERN stack architecture layout:</a:t>
-            </a:r>
-          </a:p>
-          <a:p>
-            <a:pPr>
-              <a:spcBef>
-                <a:spcPts val="800"/>
-              </a:spcBef>
-              <a:defRPr sz="1400" b="1">
-                <a:solidFill>
-                  <a:srgbClr val="1E293B"/>
-                </a:solidFill>
-                <a:latin typeface="Arial"/>
-              </a:defRPr>
-            </a:pPr>
-            <a:r>
-              <a:t>Frontend Layer (Vercel):</a:t>
-            </a:r>
-          </a:p>
-          <a:p>
-            <a:pPr lvl="1">
-              <a:defRPr sz="1300">
-                <a:solidFill>
-                  <a:srgbClr val="475569"/>
-                </a:solidFill>
-                <a:latin typeface="Arial"/>
-              </a:defRPr>
-            </a:pPr>
-            <a:r>
-              <a:t>- React 19 Client served globally via Vercel Edge Server.</a:t>
-            </a:r>
-          </a:p>
-          <a:p>
-            <a:pPr lvl="1">
-              <a:defRPr sz="1300">
-                <a:solidFill>
-                  <a:srgbClr val="475569"/>
-                </a:solidFill>
-                <a:latin typeface="Arial"/>
-              </a:defRPr>
-            </a:pPr>
-            <a:r>
-              <a:t>- Assets, icons, translation engines render locally for optimal performance.</a:t>
-            </a:r>
-          </a:p>
-          <a:p>
-            <a:pPr>
-              <a:spcBef>
-                <a:spcPts val="800"/>
-              </a:spcBef>
-              <a:defRPr sz="1400" b="1">
-                <a:solidFill>
-                  <a:srgbClr val="1E293B"/>
-                </a:solidFill>
-                <a:latin typeface="Arial"/>
-              </a:defRPr>
-            </a:pPr>
-            <a:r>
-              <a:t>Backend API Layer (Render):</a:t>
-            </a:r>
-          </a:p>
-          <a:p>
-            <a:pPr lvl="1">
-              <a:defRPr sz="1300">
-                <a:solidFill>
-                  <a:srgbClr val="475569"/>
-                </a:solidFill>
-                <a:latin typeface="Arial"/>
-              </a:defRPr>
-            </a:pPr>
-            <a:r>
-              <a:t>- Node.js / Express 5 API Server handling REST queries.</a:t>
-            </a:r>
-          </a:p>
-          <a:p>
-            <a:pPr lvl="1">
-              <a:defRPr sz="1300">
-                <a:solidFill>
-                  <a:srgbClr val="475569"/>
-                </a:solidFill>
-                <a:latin typeface="Arial"/>
-              </a:defRPr>
-            </a:pPr>
-            <a:r>
-              <a:t>- Routes divided into `/api/auth`, `/api/products`, `/api/inquiries`, and `/api/subscribers`.</a:t>
-            </a:r>
-          </a:p>
-          <a:p>
-            <a:pPr>
-              <a:spcBef>
-                <a:spcPts val="800"/>
-              </a:spcBef>
-              <a:defRPr sz="1400" b="1">
-                <a:solidFill>
-                  <a:srgbClr val="1E293B"/>
-                </a:solidFill>
-                <a:latin typeface="Arial"/>
-              </a:defRPr>
-            </a:pPr>
-            <a:r>
-              <a:t>Database Layer (MongoDB Atlas):</a:t>
-            </a:r>
-          </a:p>
-          <a:p>
-            <a:pPr lvl="1">
-              <a:defRPr sz="1300">
-                <a:solidFill>
-                  <a:srgbClr val="475569"/>
-                </a:solidFill>
-                <a:latin typeface="Arial"/>
-              </a:defRPr>
-            </a:pPr>
-            <a:r>
-              <a:t>- MongoDB cloud database storing customer leads and product documents.</a:t>
-            </a:r>
-          </a:p>
-          <a:p>
-            <a:pPr>
-              <a:spcBef>
-                <a:spcPts val="800"/>
-              </a:spcBef>
-              <a:defRPr sz="1400" b="1">
-                <a:solidFill>
-                  <a:srgbClr val="1E293B"/>
-                </a:solidFill>
-                <a:latin typeface="Arial"/>
-              </a:defRPr>
-            </a:pPr>
-            <a:r>
-              <a:t>External Services Integration:</a:t>
-            </a:r>
-          </a:p>
-          <a:p>
-            <a:pPr lvl="1">
-              <a:defRPr sz="1300">
-                <a:solidFill>
-                  <a:srgbClr val="475569"/>
-                </a:solidFill>
-                <a:latin typeface="Arial"/>
-              </a:defRPr>
-            </a:pPr>
-            <a:r>
-              <a:t>- Node.js dispatches automated Email alerts and WhatsApp API payloads to notify subscribers.</a:t>
-            </a:r>
-          </a:p>
-          <a:p>
-            <a:pPr>
-              <a:spcBef>
-                <a:spcPts val="800"/>
-              </a:spcBef>
-              <a:defRPr sz="1400" b="1">
-                <a:solidFill>
-                  <a:srgbClr val="1E293B"/>
-                </a:solidFill>
-                <a:latin typeface="Arial"/>
-              </a:defRPr>
-            </a:pPr>
-            <a:r>
-              <a:t>Reverse Proxy Rewrite:</a:t>
-            </a:r>
-          </a:p>
-          <a:p>
-            <a:pPr lvl="1">
-              <a:defRPr sz="1300">
-                <a:solidFill>
-                  <a:srgbClr val="475569"/>
-                </a:solidFill>
-                <a:latin typeface="Arial"/>
-              </a:defRPr>
-            </a:pPr>
-            <a:r>
-              <a:t>- Vercel routes `/api/:path*` to Render to prevent CORS errors.</a:t>
+            <a:pPr algn="ctr">
+              <a:spcAft>
+                <a:spcPts val="1200"/>
+              </a:spcAft>
+              <a:defRPr b="1" sz="1400">
+                <a:solidFill>
+                  <a:srgbClr val="2DD4BF"/>
+                </a:solidFill>
+              </a:defRPr>
+            </a:pPr>
+            <a:r>
+              <a:t>CLIENT LAYER</a:t>
+            </a:r>
+            <a:br/>
+            <a:r>
+              <a:t>(Vercel Hosting)</a:t>
+            </a:r>
+          </a:p>
+          <a:p>
+            <a:pPr>
+              <a:spcAft>
+                <a:spcPts val="600"/>
+              </a:spcAft>
+              <a:defRPr sz="1200">
+                <a:solidFill>
+                  <a:srgbClr val="F8FAFC"/>
+                </a:solidFill>
+              </a:defRPr>
+            </a:pPr>
+            <a:r>
+              <a:t>• React 19 Client UI</a:t>
+            </a:r>
+          </a:p>
+          <a:p>
+            <a:pPr>
+              <a:spcAft>
+                <a:spcPts val="600"/>
+              </a:spcAft>
+              <a:defRPr sz="1200">
+                <a:solidFill>
+                  <a:srgbClr val="F8FAFC"/>
+                </a:solidFill>
+              </a:defRPr>
+            </a:pPr>
+            <a:r>
+              <a:t>• Vite build system</a:t>
+            </a:r>
+          </a:p>
+          <a:p>
+            <a:pPr>
+              <a:spcAft>
+                <a:spcPts val="600"/>
+              </a:spcAft>
+              <a:defRPr sz="1200">
+                <a:solidFill>
+                  <a:srgbClr val="F8FAFC"/>
+                </a:solidFill>
+              </a:defRPr>
+            </a:pPr>
+            <a:r>
+              <a:t>• Styled with glassmorphism CSS components</a:t>
+            </a:r>
+          </a:p>
+          <a:p>
+            <a:pPr>
+              <a:spcAft>
+                <a:spcPts val="600"/>
+              </a:spcAft>
+              <a:defRPr sz="1200">
+                <a:solidFill>
+                  <a:srgbClr val="F8FAFC"/>
+                </a:solidFill>
+              </a:defRPr>
+            </a:pPr>
+            <a:r>
+              <a:t>• Axios query integration</a:t>
+            </a:r>
+          </a:p>
+          <a:p>
+            <a:pPr>
+              <a:spcAft>
+                <a:spcPts val="600"/>
+              </a:spcAft>
+              <a:defRPr sz="1200">
+                <a:solidFill>
+                  <a:srgbClr val="F8FAFC"/>
+                </a:solidFill>
+              </a:defRPr>
+            </a:pPr>
+            <a:r>
+              <a:t>• Handles browser toast push notifications</a:t>
+            </a:r>
+          </a:p>
+        </p:txBody>
+      </p:sp>
+      <p:sp>
+        <p:nvSpPr>
+          <p:cNvPr id="6" name="Rounded Rectangle 5"/>
+          <p:cNvSpPr/>
+          <p:nvPr/>
+        </p:nvSpPr>
+        <p:spPr>
+          <a:xfrm>
+            <a:off x="3291840" y="1371600"/>
+            <a:ext cx="2560320" cy="4754880"/>
+          </a:xfrm>
+          <a:prstGeom prst="roundRect">
+            <a:avLst/>
+          </a:prstGeom>
+          <a:solidFill>
+            <a:srgbClr val="1E293B"/>
+          </a:solidFill>
+          <a:ln w="19050">
+            <a:solidFill>
+              <a:srgbClr val="334155"/>
+            </a:solidFill>
+          </a:ln>
+        </p:spPr>
+        <p:style>
+          <a:lnRef idx="1">
+            <a:schemeClr val="accent1"/>
+          </a:lnRef>
+          <a:fillRef idx="3">
+            <a:schemeClr val="accent1"/>
+          </a:fillRef>
+          <a:effectRef idx="2">
+            <a:schemeClr val="accent1"/>
+          </a:effectRef>
+          <a:fontRef idx="minor">
+            <a:schemeClr val="lt1"/>
+          </a:fontRef>
+        </p:style>
+        <p:txBody>
+          <a:bodyPr rtlCol="0" anchor="ctr"/>
+          <a:lstStyle/>
+          <a:p>
+            <a:pPr algn="ctr"/>
+          </a:p>
+        </p:txBody>
+      </p:sp>
+      <p:sp>
+        <p:nvSpPr>
+          <p:cNvPr id="7" name="TextBox 6"/>
+          <p:cNvSpPr txBox="1"/>
+          <p:nvPr/>
+        </p:nvSpPr>
+        <p:spPr>
+          <a:xfrm>
+            <a:off x="3383280" y="1463040"/>
+            <a:ext cx="2377440" cy="4572000"/>
+          </a:xfrm>
+          <a:prstGeom prst="rect">
+            <a:avLst/>
+          </a:prstGeom>
+          <a:noFill/>
+        </p:spPr>
+        <p:txBody>
+          <a:bodyPr wrap="square">
+            <a:spAutoFit/>
+          </a:bodyPr>
+          <a:lstStyle/>
+          <a:p>
+            <a:pPr algn="ctr">
+              <a:spcAft>
+                <a:spcPts val="1200"/>
+              </a:spcAft>
+              <a:defRPr b="1" sz="1400">
+                <a:solidFill>
+                  <a:srgbClr val="2DD4BF"/>
+                </a:solidFill>
+              </a:defRPr>
+            </a:pPr>
+            <a:r>
+              <a:t>BACKEND API LAYER</a:t>
+            </a:r>
+            <a:br/>
+            <a:r>
+              <a:t>(Render Server)</a:t>
+            </a:r>
+          </a:p>
+          <a:p>
+            <a:pPr>
+              <a:spcAft>
+                <a:spcPts val="600"/>
+              </a:spcAft>
+              <a:defRPr sz="1200">
+                <a:solidFill>
+                  <a:srgbClr val="F8FAFC"/>
+                </a:solidFill>
+              </a:defRPr>
+            </a:pPr>
+            <a:r>
+              <a:t>• Node.js &amp; Express 5 API</a:t>
+            </a:r>
+          </a:p>
+          <a:p>
+            <a:pPr>
+              <a:spcAft>
+                <a:spcPts val="600"/>
+              </a:spcAft>
+              <a:defRPr sz="1200">
+                <a:solidFill>
+                  <a:srgbClr val="F8FAFC"/>
+                </a:solidFill>
+              </a:defRPr>
+            </a:pPr>
+            <a:r>
+              <a:t>• JWT Authentication session validations</a:t>
+            </a:r>
+          </a:p>
+          <a:p>
+            <a:pPr>
+              <a:spcAft>
+                <a:spcPts val="600"/>
+              </a:spcAft>
+              <a:defRPr sz="1200">
+                <a:solidFill>
+                  <a:srgbClr val="F8FAFC"/>
+                </a:solidFill>
+              </a:defRPr>
+            </a:pPr>
+            <a:r>
+              <a:t>• WhatsApp Cloud HTTP integration</a:t>
+            </a:r>
+          </a:p>
+          <a:p>
+            <a:pPr>
+              <a:spcAft>
+                <a:spcPts val="600"/>
+              </a:spcAft>
+              <a:defRPr sz="1200">
+                <a:solidFill>
+                  <a:srgbClr val="F8FAFC"/>
+                </a:solidFill>
+              </a:defRPr>
+            </a:pPr>
+            <a:r>
+              <a:t>• Nodemailer SMTP transporter</a:t>
+            </a:r>
+          </a:p>
+          <a:p>
+            <a:pPr>
+              <a:spcAft>
+                <a:spcPts val="600"/>
+              </a:spcAft>
+              <a:defRPr sz="1200">
+                <a:solidFill>
+                  <a:srgbClr val="F8FAFC"/>
+                </a:solidFill>
+              </a:defRPr>
+            </a:pPr>
+            <a:r>
+              <a:t>• CORS headers configurations</a:t>
+            </a:r>
+          </a:p>
+        </p:txBody>
+      </p:sp>
+      <p:sp>
+        <p:nvSpPr>
+          <p:cNvPr id="8" name="Rounded Rectangle 7"/>
+          <p:cNvSpPr/>
+          <p:nvPr/>
+        </p:nvSpPr>
+        <p:spPr>
+          <a:xfrm>
+            <a:off x="6126480" y="1371600"/>
+            <a:ext cx="2560320" cy="4754880"/>
+          </a:xfrm>
+          <a:prstGeom prst="roundRect">
+            <a:avLst/>
+          </a:prstGeom>
+          <a:solidFill>
+            <a:srgbClr val="1E293B"/>
+          </a:solidFill>
+          <a:ln w="19050">
+            <a:solidFill>
+              <a:srgbClr val="334155"/>
+            </a:solidFill>
+          </a:ln>
+        </p:spPr>
+        <p:style>
+          <a:lnRef idx="1">
+            <a:schemeClr val="accent1"/>
+          </a:lnRef>
+          <a:fillRef idx="3">
+            <a:schemeClr val="accent1"/>
+          </a:fillRef>
+          <a:effectRef idx="2">
+            <a:schemeClr val="accent1"/>
+          </a:effectRef>
+          <a:fontRef idx="minor">
+            <a:schemeClr val="lt1"/>
+          </a:fontRef>
+        </p:style>
+        <p:txBody>
+          <a:bodyPr rtlCol="0" anchor="ctr"/>
+          <a:lstStyle/>
+          <a:p>
+            <a:pPr algn="ctr"/>
+          </a:p>
+        </p:txBody>
+      </p:sp>
+      <p:sp>
+        <p:nvSpPr>
+          <p:cNvPr id="9" name="TextBox 8"/>
+          <p:cNvSpPr txBox="1"/>
+          <p:nvPr/>
+        </p:nvSpPr>
+        <p:spPr>
+          <a:xfrm>
+            <a:off x="6217920" y="1463040"/>
+            <a:ext cx="2377440" cy="4572000"/>
+          </a:xfrm>
+          <a:prstGeom prst="rect">
+            <a:avLst/>
+          </a:prstGeom>
+          <a:noFill/>
+        </p:spPr>
+        <p:txBody>
+          <a:bodyPr wrap="square">
+            <a:spAutoFit/>
+          </a:bodyPr>
+          <a:lstStyle/>
+          <a:p>
+            <a:pPr algn="ctr">
+              <a:spcAft>
+                <a:spcPts val="1200"/>
+              </a:spcAft>
+              <a:defRPr b="1" sz="1400">
+                <a:solidFill>
+                  <a:srgbClr val="2DD4BF"/>
+                </a:solidFill>
+              </a:defRPr>
+            </a:pPr>
+            <a:r>
+              <a:t>DATA STORAGE LAYER</a:t>
+            </a:r>
+            <a:br/>
+            <a:r>
+              <a:t>(MongoDB Atlas)</a:t>
+            </a:r>
+          </a:p>
+          <a:p>
+            <a:pPr>
+              <a:spcAft>
+                <a:spcPts val="600"/>
+              </a:spcAft>
+              <a:defRPr sz="1200">
+                <a:solidFill>
+                  <a:srgbClr val="F8FAFC"/>
+                </a:solidFill>
+              </a:defRPr>
+            </a:pPr>
+            <a:r>
+              <a:t>• MongoDB Cloud database</a:t>
+            </a:r>
+          </a:p>
+          <a:p>
+            <a:pPr>
+              <a:spcAft>
+                <a:spcPts val="600"/>
+              </a:spcAft>
+              <a:defRPr sz="1200">
+                <a:solidFill>
+                  <a:srgbClr val="F8FAFC"/>
+                </a:solidFill>
+              </a:defRPr>
+            </a:pPr>
+            <a:r>
+              <a:t>• Schemas for Products, Users, and Leads</a:t>
+            </a:r>
+          </a:p>
+          <a:p>
+            <a:pPr>
+              <a:spcAft>
+                <a:spcPts val="600"/>
+              </a:spcAft>
+              <a:defRPr sz="1200">
+                <a:solidFill>
+                  <a:srgbClr val="F8FAFC"/>
+                </a:solidFill>
+              </a:defRPr>
+            </a:pPr>
+            <a:r>
+              <a:t>• Price arrays for historical rate lookups</a:t>
+            </a:r>
+          </a:p>
+          <a:p>
+            <a:pPr>
+              <a:spcAft>
+                <a:spcPts val="600"/>
+              </a:spcAft>
+              <a:defRPr sz="1200">
+                <a:solidFill>
+                  <a:srgbClr val="F8FAFC"/>
+                </a:solidFill>
+              </a:defRPr>
+            </a:pPr>
+            <a:r>
+              <a:t>• Inquiries record collections</a:t>
+            </a:r>
+          </a:p>
+          <a:p>
+            <a:pPr>
+              <a:spcAft>
+                <a:spcPts val="600"/>
+              </a:spcAft>
+              <a:defRPr sz="1200">
+                <a:solidFill>
+                  <a:srgbClr val="F8FAFC"/>
+                </a:solidFill>
+              </a:defRPr>
+            </a:pPr>
+            <a:r>
+              <a:t>• Broadcast logs tracker</a:t>
             </a:r>
           </a:p>
         </p:txBody>
